--- a/strweb/temp/СТРweb-пр -1.pptx
+++ b/strweb/temp/СТРweb-пр -1.pptx
@@ -1,91 +1,91 @@
 
 <file path=ppt/presentation.xml><?xml version="1.0" encoding="utf-8"?>
-<p:presentation xmlns:a="http://schemas.openxmlformats.org/drawingml/2006/main" xmlns:r="http://schemas.openxmlformats.org/officeDocument/2006/relationships" xmlns:p="http://schemas.openxmlformats.org/presentationml/2006/main" saveSubsetFonts="1" bookmarkIdSeed="2">
+<p:presentation xmlns:a="http://schemas.openxmlformats.org/drawingml/2006/main" xmlns:r="http://schemas.openxmlformats.org/officeDocument/2006/relationships" xmlns:p="http://schemas.openxmlformats.org/presentationml/2006/main" bookmarkIdSeed="2">
   <p:sldMasterIdLst>
-    <p:sldMasterId id="2147483672" r:id="rId1"/>
+    <p:sldMasterId id="2147483648" r:id="rId1"/>
   </p:sldMasterIdLst>
   <p:notesMasterIdLst>
-    <p:notesMasterId r:id="rId77"/>
+    <p:notesMasterId r:id="rId4"/>
   </p:notesMasterIdLst>
   <p:handoutMasterIdLst>
-    <p:handoutMasterId r:id="rId78"/>
+    <p:handoutMasterId r:id="rId79"/>
   </p:handoutMasterIdLst>
   <p:sldIdLst>
-    <p:sldId id="280" r:id="rId2"/>
-    <p:sldId id="433" r:id="rId3"/>
-    <p:sldId id="504" r:id="rId4"/>
-    <p:sldId id="505" r:id="rId5"/>
-    <p:sldId id="437" r:id="rId6"/>
-    <p:sldId id="506" r:id="rId7"/>
-    <p:sldId id="438" r:id="rId8"/>
-    <p:sldId id="439" r:id="rId9"/>
-    <p:sldId id="440" r:id="rId10"/>
-    <p:sldId id="441" r:id="rId11"/>
-    <p:sldId id="442" r:id="rId12"/>
-    <p:sldId id="443" r:id="rId13"/>
-    <p:sldId id="444" r:id="rId14"/>
-    <p:sldId id="445" r:id="rId15"/>
-    <p:sldId id="446" r:id="rId16"/>
-    <p:sldId id="447" r:id="rId17"/>
-    <p:sldId id="448" r:id="rId18"/>
-    <p:sldId id="449" r:id="rId19"/>
-    <p:sldId id="450" r:id="rId20"/>
-    <p:sldId id="451" r:id="rId21"/>
-    <p:sldId id="507" r:id="rId22"/>
-    <p:sldId id="452" r:id="rId23"/>
-    <p:sldId id="453" r:id="rId24"/>
-    <p:sldId id="454" r:id="rId25"/>
-    <p:sldId id="455" r:id="rId26"/>
-    <p:sldId id="456" r:id="rId27"/>
-    <p:sldId id="457" r:id="rId28"/>
-    <p:sldId id="458" r:id="rId29"/>
-    <p:sldId id="459" r:id="rId30"/>
-    <p:sldId id="460" r:id="rId31"/>
-    <p:sldId id="461" r:id="rId32"/>
-    <p:sldId id="462" r:id="rId33"/>
-    <p:sldId id="463" r:id="rId34"/>
-    <p:sldId id="464" r:id="rId35"/>
-    <p:sldId id="465" r:id="rId36"/>
-    <p:sldId id="466" r:id="rId37"/>
-    <p:sldId id="467" r:id="rId38"/>
-    <p:sldId id="468" r:id="rId39"/>
-    <p:sldId id="469" r:id="rId40"/>
-    <p:sldId id="470" r:id="rId41"/>
-    <p:sldId id="471" r:id="rId42"/>
-    <p:sldId id="472" r:id="rId43"/>
-    <p:sldId id="473" r:id="rId44"/>
-    <p:sldId id="474" r:id="rId45"/>
-    <p:sldId id="475" r:id="rId46"/>
-    <p:sldId id="476" r:id="rId47"/>
-    <p:sldId id="477" r:id="rId48"/>
-    <p:sldId id="478" r:id="rId49"/>
-    <p:sldId id="479" r:id="rId50"/>
-    <p:sldId id="480" r:id="rId51"/>
-    <p:sldId id="481" r:id="rId52"/>
-    <p:sldId id="482" r:id="rId53"/>
-    <p:sldId id="508" r:id="rId54"/>
-    <p:sldId id="510" r:id="rId55"/>
-    <p:sldId id="483" r:id="rId56"/>
-    <p:sldId id="484" r:id="rId57"/>
-    <p:sldId id="486" r:id="rId58"/>
-    <p:sldId id="487" r:id="rId59"/>
-    <p:sldId id="488" r:id="rId60"/>
-    <p:sldId id="489" r:id="rId61"/>
-    <p:sldId id="490" r:id="rId62"/>
-    <p:sldId id="491" r:id="rId63"/>
-    <p:sldId id="492" r:id="rId64"/>
-    <p:sldId id="493" r:id="rId65"/>
-    <p:sldId id="494" r:id="rId66"/>
-    <p:sldId id="495" r:id="rId67"/>
-    <p:sldId id="496" r:id="rId68"/>
-    <p:sldId id="497" r:id="rId69"/>
-    <p:sldId id="498" r:id="rId70"/>
-    <p:sldId id="499" r:id="rId71"/>
-    <p:sldId id="509" r:id="rId72"/>
-    <p:sldId id="500" r:id="rId73"/>
-    <p:sldId id="501" r:id="rId74"/>
-    <p:sldId id="502" r:id="rId75"/>
-    <p:sldId id="503" r:id="rId76"/>
+    <p:sldId id="280" r:id="rId3"/>
+    <p:sldId id="433" r:id="rId5"/>
+    <p:sldId id="504" r:id="rId6"/>
+    <p:sldId id="505" r:id="rId7"/>
+    <p:sldId id="437" r:id="rId8"/>
+    <p:sldId id="506" r:id="rId9"/>
+    <p:sldId id="438" r:id="rId10"/>
+    <p:sldId id="439" r:id="rId11"/>
+    <p:sldId id="440" r:id="rId12"/>
+    <p:sldId id="441" r:id="rId13"/>
+    <p:sldId id="442" r:id="rId14"/>
+    <p:sldId id="443" r:id="rId15"/>
+    <p:sldId id="444" r:id="rId16"/>
+    <p:sldId id="445" r:id="rId17"/>
+    <p:sldId id="446" r:id="rId18"/>
+    <p:sldId id="447" r:id="rId19"/>
+    <p:sldId id="448" r:id="rId20"/>
+    <p:sldId id="449" r:id="rId21"/>
+    <p:sldId id="450" r:id="rId22"/>
+    <p:sldId id="451" r:id="rId23"/>
+    <p:sldId id="507" r:id="rId24"/>
+    <p:sldId id="452" r:id="rId25"/>
+    <p:sldId id="453" r:id="rId26"/>
+    <p:sldId id="454" r:id="rId27"/>
+    <p:sldId id="455" r:id="rId28"/>
+    <p:sldId id="456" r:id="rId29"/>
+    <p:sldId id="457" r:id="rId30"/>
+    <p:sldId id="458" r:id="rId31"/>
+    <p:sldId id="459" r:id="rId32"/>
+    <p:sldId id="460" r:id="rId33"/>
+    <p:sldId id="461" r:id="rId34"/>
+    <p:sldId id="462" r:id="rId35"/>
+    <p:sldId id="463" r:id="rId36"/>
+    <p:sldId id="464" r:id="rId37"/>
+    <p:sldId id="465" r:id="rId38"/>
+    <p:sldId id="466" r:id="rId39"/>
+    <p:sldId id="467" r:id="rId40"/>
+    <p:sldId id="468" r:id="rId41"/>
+    <p:sldId id="469" r:id="rId42"/>
+    <p:sldId id="470" r:id="rId43"/>
+    <p:sldId id="471" r:id="rId44"/>
+    <p:sldId id="472" r:id="rId45"/>
+    <p:sldId id="473" r:id="rId46"/>
+    <p:sldId id="474" r:id="rId47"/>
+    <p:sldId id="475" r:id="rId48"/>
+    <p:sldId id="476" r:id="rId49"/>
+    <p:sldId id="477" r:id="rId50"/>
+    <p:sldId id="478" r:id="rId51"/>
+    <p:sldId id="479" r:id="rId52"/>
+    <p:sldId id="480" r:id="rId53"/>
+    <p:sldId id="481" r:id="rId54"/>
+    <p:sldId id="482" r:id="rId55"/>
+    <p:sldId id="508" r:id="rId56"/>
+    <p:sldId id="510" r:id="rId57"/>
+    <p:sldId id="483" r:id="rId58"/>
+    <p:sldId id="484" r:id="rId59"/>
+    <p:sldId id="486" r:id="rId60"/>
+    <p:sldId id="487" r:id="rId61"/>
+    <p:sldId id="488" r:id="rId62"/>
+    <p:sldId id="489" r:id="rId63"/>
+    <p:sldId id="490" r:id="rId64"/>
+    <p:sldId id="491" r:id="rId65"/>
+    <p:sldId id="492" r:id="rId66"/>
+    <p:sldId id="493" r:id="rId67"/>
+    <p:sldId id="494" r:id="rId68"/>
+    <p:sldId id="495" r:id="rId69"/>
+    <p:sldId id="496" r:id="rId70"/>
+    <p:sldId id="497" r:id="rId71"/>
+    <p:sldId id="498" r:id="rId72"/>
+    <p:sldId id="499" r:id="rId73"/>
+    <p:sldId id="509" r:id="rId74"/>
+    <p:sldId id="500" r:id="rId75"/>
+    <p:sldId id="501" r:id="rId76"/>
+    <p:sldId id="502" r:id="rId77"/>
+    <p:sldId id="503" r:id="rId78"/>
   </p:sldIdLst>
   <p:sldSz cx="12192000" cy="6858000"/>
   <p:notesSz cx="9928225" cy="6797675"/>
@@ -184,22 +184,6 @@
       </a:defRPr>
     </a:lvl9pPr>
   </p:defaultTextStyle>
-  <p:extLst>
-    <p:ext uri="{EFAFB233-063F-42B5-8137-9DF3F51BA10A}">
-      <p15:sldGuideLst xmlns:p15="http://schemas.microsoft.com/office/powerpoint/2012/main">
-        <p15:guide id="1" orient="horz" pos="2160">
-          <p15:clr>
-            <a:srgbClr val="A4A3A4"/>
-          </p15:clr>
-        </p15:guide>
-        <p15:guide id="2" pos="3840">
-          <p15:clr>
-            <a:srgbClr val="A4A3A4"/>
-          </p15:clr>
-        </p15:guide>
-      </p15:sldGuideLst>
-    </p:ext>
-  </p:extLst>
 </p:presentation>
 </file>
 
@@ -285,7 +269,6 @@
           <a:p>
             <a:fld id="{1C293CAB-A6E8-4F84-B002-DB1C4B9BC430}" type="datetimeFigureOut">
               <a:rPr lang="en-US" smtClean="0"/>
-              <a:t>9/1/2023</a:t>
             </a:fld>
             <a:endParaRPr lang="en-US"/>
           </a:p>
@@ -351,18 +334,12 @@
           <a:p>
             <a:fld id="{B19271A0-3214-4C0F-98E9-07E8770FBF3A}" type="slidenum">
               <a:rPr lang="en-US" smtClean="0"/>
-              <a:t>‹#›</a:t>
             </a:fld>
             <a:endParaRPr lang="en-US"/>
           </a:p>
         </p:txBody>
       </p:sp>
     </p:spTree>
-    <p:extLst>
-      <p:ext uri="{BB962C8B-B14F-4D97-AF65-F5344CB8AC3E}">
-        <p14:creationId xmlns:p14="http://schemas.microsoft.com/office/powerpoint/2010/main" val="3561894690"/>
-      </p:ext>
-    </p:extLst>
   </p:cSld>
   <p:clrMap bg1="lt1" tx1="dk1" bg2="lt2" tx2="dk2" accent1="accent1" accent2="accent2" accent3="accent3" accent4="accent4" accent5="accent5" accent6="accent6" hlink="hlink" folHlink="folHlink"/>
 </p:handoutMaster>
@@ -450,7 +427,6 @@
           <a:p>
             <a:fld id="{2B56B409-7F35-4B75-975D-83CC9322541B}" type="datetimeFigureOut">
               <a:rPr lang="en-US" smtClean="0"/>
-              <a:t>9/1/2023</a:t>
             </a:fld>
             <a:endParaRPr lang="en-US"/>
           </a:p>
@@ -517,6 +493,7 @@
               <a:rPr lang="en-US" smtClean="0"/>
               <a:t>Click to edit Master text styles</a:t>
             </a:r>
+            <a:endParaRPr lang="en-US" smtClean="0"/>
           </a:p>
           <a:p>
             <a:pPr lvl="1"/>
@@ -524,6 +501,7 @@
               <a:rPr lang="en-US" smtClean="0"/>
               <a:t>Second level</a:t>
             </a:r>
+            <a:endParaRPr lang="en-US" smtClean="0"/>
           </a:p>
           <a:p>
             <a:pPr lvl="2"/>
@@ -531,6 +509,7 @@
               <a:rPr lang="en-US" smtClean="0"/>
               <a:t>Third level</a:t>
             </a:r>
+            <a:endParaRPr lang="en-US" smtClean="0"/>
           </a:p>
           <a:p>
             <a:pPr lvl="3"/>
@@ -538,6 +517,7 @@
               <a:rPr lang="en-US" smtClean="0"/>
               <a:t>Fourth level</a:t>
             </a:r>
+            <a:endParaRPr lang="en-US" smtClean="0"/>
           </a:p>
           <a:p>
             <a:pPr lvl="4"/>
@@ -609,18 +589,12 @@
           <a:p>
             <a:fld id="{E33E2D1D-25A5-45DC-B24F-AC401B916F32}" type="slidenum">
               <a:rPr lang="en-US" smtClean="0"/>
-              <a:t>‹#›</a:t>
             </a:fld>
             <a:endParaRPr lang="en-US"/>
           </a:p>
         </p:txBody>
       </p:sp>
     </p:spTree>
-    <p:extLst>
-      <p:ext uri="{BB962C8B-B14F-4D97-AF65-F5344CB8AC3E}">
-        <p14:creationId xmlns:p14="http://schemas.microsoft.com/office/powerpoint/2010/main" val="3837681816"/>
-      </p:ext>
-    </p:extLst>
   </p:cSld>
   <p:clrMap bg1="lt1" tx1="dk1" bg2="lt2" tx2="dk2" accent1="accent1" accent2="accent2" accent3="accent3" accent4="accent4" accent5="accent5" accent6="accent6" hlink="hlink" folHlink="folHlink"/>
   <p:notesStyle>
@@ -783,18 +757,12 @@
           <a:p>
             <a:fld id="{E33E2D1D-25A5-45DC-B24F-AC401B916F32}" type="slidenum">
               <a:rPr lang="en-US" smtClean="0"/>
-              <a:t>1</a:t>
             </a:fld>
             <a:endParaRPr lang="en-US"/>
           </a:p>
         </p:txBody>
       </p:sp>
     </p:spTree>
-    <p:extLst>
-      <p:ext uri="{BB962C8B-B14F-4D97-AF65-F5344CB8AC3E}">
-        <p14:creationId xmlns:p14="http://schemas.microsoft.com/office/powerpoint/2010/main" val="2679269107"/>
-      </p:ext>
-    </p:extLst>
   </p:cSld>
   <p:clrMapOvr>
     <a:masterClrMapping/>
@@ -1044,18 +1012,12 @@
           <a:p>
             <a:fld id="{E33E2D1D-25A5-45DC-B24F-AC401B916F32}" type="slidenum">
               <a:rPr lang="en-US" smtClean="0"/>
-              <a:t>42</a:t>
             </a:fld>
             <a:endParaRPr lang="en-US"/>
           </a:p>
         </p:txBody>
       </p:sp>
     </p:spTree>
-    <p:extLst>
-      <p:ext uri="{BB962C8B-B14F-4D97-AF65-F5344CB8AC3E}">
-        <p14:creationId xmlns:p14="http://schemas.microsoft.com/office/powerpoint/2010/main" val="2656813792"/>
-      </p:ext>
-    </p:extLst>
   </p:cSld>
   <p:clrMapOvr>
     <a:masterClrMapping/>
@@ -1160,18 +1122,12 @@
           <a:p>
             <a:fld id="{E33E2D1D-25A5-45DC-B24F-AC401B916F32}" type="slidenum">
               <a:rPr lang="en-US" smtClean="0"/>
-              <a:t>43</a:t>
             </a:fld>
             <a:endParaRPr lang="en-US"/>
           </a:p>
         </p:txBody>
       </p:sp>
     </p:spTree>
-    <p:extLst>
-      <p:ext uri="{BB962C8B-B14F-4D97-AF65-F5344CB8AC3E}">
-        <p14:creationId xmlns:p14="http://schemas.microsoft.com/office/powerpoint/2010/main" val="3814933587"/>
-      </p:ext>
-    </p:extLst>
   </p:cSld>
   <p:clrMapOvr>
     <a:masterClrMapping/>
@@ -1227,6 +1183,7 @@
               <a:rPr lang="en-US" dirty="0" smtClean="0"/>
               <a:t>http://www.i18nguy.com/markup/right-to-left.html</a:t>
             </a:r>
+            <a:endParaRPr lang="en-US" dirty="0" smtClean="0"/>
           </a:p>
           <a:p>
             <a:endParaRPr lang="en-US" dirty="0"/>
@@ -1250,18 +1207,12 @@
           <a:p>
             <a:fld id="{E33E2D1D-25A5-45DC-B24F-AC401B916F32}" type="slidenum">
               <a:rPr lang="en-US" smtClean="0"/>
-              <a:t>44</a:t>
             </a:fld>
             <a:endParaRPr lang="en-US"/>
           </a:p>
         </p:txBody>
       </p:sp>
     </p:spTree>
-    <p:extLst>
-      <p:ext uri="{BB962C8B-B14F-4D97-AF65-F5344CB8AC3E}">
-        <p14:creationId xmlns:p14="http://schemas.microsoft.com/office/powerpoint/2010/main" val="2816089262"/>
-      </p:ext>
-    </p:extLst>
   </p:cSld>
   <p:clrMapOvr>
     <a:masterClrMapping/>
@@ -1351,18 +1302,12 @@
           <a:p>
             <a:fld id="{E33E2D1D-25A5-45DC-B24F-AC401B916F32}" type="slidenum">
               <a:rPr lang="en-US" smtClean="0"/>
-              <a:t>45</a:t>
             </a:fld>
             <a:endParaRPr lang="en-US"/>
           </a:p>
         </p:txBody>
       </p:sp>
     </p:spTree>
-    <p:extLst>
-      <p:ext uri="{BB962C8B-B14F-4D97-AF65-F5344CB8AC3E}">
-        <p14:creationId xmlns:p14="http://schemas.microsoft.com/office/powerpoint/2010/main" val="2298601004"/>
-      </p:ext>
-    </p:extLst>
   </p:cSld>
   <p:clrMapOvr>
     <a:masterClrMapping/>
@@ -1447,18 +1392,12 @@
           <a:p>
             <a:fld id="{E33E2D1D-25A5-45DC-B24F-AC401B916F32}" type="slidenum">
               <a:rPr lang="en-US" smtClean="0"/>
-              <a:t>46</a:t>
             </a:fld>
             <a:endParaRPr lang="en-US"/>
           </a:p>
         </p:txBody>
       </p:sp>
     </p:spTree>
-    <p:extLst>
-      <p:ext uri="{BB962C8B-B14F-4D97-AF65-F5344CB8AC3E}">
-        <p14:creationId xmlns:p14="http://schemas.microsoft.com/office/powerpoint/2010/main" val="2665955855"/>
-      </p:ext>
-    </p:extLst>
   </p:cSld>
   <p:clrMapOvr>
     <a:masterClrMapping/>
@@ -1524,7 +1463,6 @@
               <a:buSzTx/>
               <a:buFontTx/>
               <a:buNone/>
-              <a:tabLst/>
               <a:defRPr/>
             </a:pPr>
             <a:r>
@@ -1606,6 +1544,14 @@
               </a:rPr>
               <a:t>element I just described. Spellchecking will be performed using the language defined by the user’s operating</a:t>
             </a:r>
+            <a:endParaRPr lang="en-US" sz="1200" b="0" i="0" u="none" strike="noStrike" kern="1200" baseline="0" dirty="0" smtClean="0">
+              <a:solidFill>
+                <a:schemeClr val="tx1"/>
+              </a:solidFill>
+              <a:latin typeface="+mn-lt"/>
+              <a:ea typeface="+mn-ea"/>
+              <a:cs typeface="+mn-cs"/>
+            </a:endParaRPr>
           </a:p>
           <a:p>
             <a:r>
@@ -1640,18 +1586,12 @@
           <a:p>
             <a:fld id="{E33E2D1D-25A5-45DC-B24F-AC401B916F32}" type="slidenum">
               <a:rPr lang="en-US" smtClean="0"/>
-              <a:t>48</a:t>
             </a:fld>
             <a:endParaRPr lang="en-US"/>
           </a:p>
         </p:txBody>
       </p:sp>
     </p:spTree>
-    <p:extLst>
-      <p:ext uri="{BB962C8B-B14F-4D97-AF65-F5344CB8AC3E}">
-        <p14:creationId xmlns:p14="http://schemas.microsoft.com/office/powerpoint/2010/main" val="552541810"/>
-      </p:ext>
-    </p:extLst>
   </p:cSld>
   <p:clrMapOvr>
     <a:masterClrMapping/>
@@ -1764,18 +1704,12 @@
           <a:p>
             <a:fld id="{E33E2D1D-25A5-45DC-B24F-AC401B916F32}" type="slidenum">
               <a:rPr lang="en-US" smtClean="0"/>
-              <a:t>49</a:t>
             </a:fld>
             <a:endParaRPr lang="en-US"/>
           </a:p>
         </p:txBody>
       </p:sp>
     </p:spTree>
-    <p:extLst>
-      <p:ext uri="{BB962C8B-B14F-4D97-AF65-F5344CB8AC3E}">
-        <p14:creationId xmlns:p14="http://schemas.microsoft.com/office/powerpoint/2010/main" val="1410826960"/>
-      </p:ext>
-    </p:extLst>
   </p:cSld>
   <p:clrMapOvr>
     <a:masterClrMapping/>
@@ -1860,18 +1794,12 @@
           <a:p>
             <a:fld id="{E33E2D1D-25A5-45DC-B24F-AC401B916F32}" type="slidenum">
               <a:rPr lang="en-US" smtClean="0"/>
-              <a:t>51</a:t>
             </a:fld>
             <a:endParaRPr lang="en-US"/>
           </a:p>
         </p:txBody>
       </p:sp>
     </p:spTree>
-    <p:extLst>
-      <p:ext uri="{BB962C8B-B14F-4D97-AF65-F5344CB8AC3E}">
-        <p14:creationId xmlns:p14="http://schemas.microsoft.com/office/powerpoint/2010/main" val="1656259260"/>
-      </p:ext>
-    </p:extLst>
   </p:cSld>
   <p:clrMapOvr>
     <a:masterClrMapping/>
@@ -1964,18 +1892,12 @@
           <a:p>
             <a:fld id="{E33E2D1D-25A5-45DC-B24F-AC401B916F32}" type="slidenum">
               <a:rPr lang="en-US" smtClean="0"/>
-              <a:t>52</a:t>
             </a:fld>
             <a:endParaRPr lang="en-US"/>
           </a:p>
         </p:txBody>
       </p:sp>
     </p:spTree>
-    <p:extLst>
-      <p:ext uri="{BB962C8B-B14F-4D97-AF65-F5344CB8AC3E}">
-        <p14:creationId xmlns:p14="http://schemas.microsoft.com/office/powerpoint/2010/main" val="787402009"/>
-      </p:ext>
-    </p:extLst>
   </p:cSld>
   <p:clrMapOvr>
     <a:masterClrMapping/>
@@ -2054,18 +1976,12 @@
           <a:p>
             <a:fld id="{E33E2D1D-25A5-45DC-B24F-AC401B916F32}" type="slidenum">
               <a:rPr lang="en-US" smtClean="0"/>
-              <a:t>53</a:t>
             </a:fld>
             <a:endParaRPr lang="en-US"/>
           </a:p>
         </p:txBody>
       </p:sp>
     </p:spTree>
-    <p:extLst>
-      <p:ext uri="{BB962C8B-B14F-4D97-AF65-F5344CB8AC3E}">
-        <p14:creationId xmlns:p14="http://schemas.microsoft.com/office/powerpoint/2010/main" val="4022337099"/>
-      </p:ext>
-    </p:extLst>
   </p:cSld>
   <p:clrMapOvr>
     <a:masterClrMapping/>
@@ -2129,6 +2045,7 @@
               <a:rPr lang="ru-RU" baseline="0" dirty="0" smtClean="0"/>
               <a:t> такая статистика:</a:t>
             </a:r>
+            <a:endParaRPr lang="ru-RU" baseline="0" dirty="0" smtClean="0"/>
           </a:p>
           <a:p>
             <a:pPr marL="228600" indent="-228600">
@@ -2154,6 +2071,7 @@
               <a:rPr lang="ru-RU" baseline="0" dirty="0" smtClean="0"/>
               <a:t>август 2015)</a:t>
             </a:r>
+            <a:endParaRPr lang="ru-RU" baseline="0" dirty="0" smtClean="0"/>
           </a:p>
           <a:p>
             <a:pPr marL="228600" indent="-228600">
@@ -2179,6 +2097,7 @@
               <a:rPr lang="ru-RU" baseline="0" dirty="0" smtClean="0"/>
               <a:t> (август 2015)</a:t>
             </a:r>
+            <a:endParaRPr lang="ru-RU" baseline="0" dirty="0" smtClean="0"/>
           </a:p>
           <a:p>
             <a:pPr marL="228600" indent="-228600">
@@ -2273,18 +2192,12 @@
           <a:p>
             <a:fld id="{E33E2D1D-25A5-45DC-B24F-AC401B916F32}" type="slidenum">
               <a:rPr lang="en-US" smtClean="0"/>
-              <a:t>5</a:t>
             </a:fld>
             <a:endParaRPr lang="en-US"/>
           </a:p>
         </p:txBody>
       </p:sp>
     </p:spTree>
-    <p:extLst>
-      <p:ext uri="{BB962C8B-B14F-4D97-AF65-F5344CB8AC3E}">
-        <p14:creationId xmlns:p14="http://schemas.microsoft.com/office/powerpoint/2010/main" val="903849233"/>
-      </p:ext>
-    </p:extLst>
   </p:cSld>
   <p:clrMapOvr>
     <a:masterClrMapping/>
@@ -2511,18 +2424,12 @@
           <a:p>
             <a:fld id="{E33E2D1D-25A5-45DC-B24F-AC401B916F32}" type="slidenum">
               <a:rPr lang="en-US" smtClean="0"/>
-              <a:t>56</a:t>
             </a:fld>
             <a:endParaRPr lang="en-US"/>
           </a:p>
         </p:txBody>
       </p:sp>
     </p:spTree>
-    <p:extLst>
-      <p:ext uri="{BB962C8B-B14F-4D97-AF65-F5344CB8AC3E}">
-        <p14:creationId xmlns:p14="http://schemas.microsoft.com/office/powerpoint/2010/main" val="2347607538"/>
-      </p:ext>
-    </p:extLst>
   </p:cSld>
   <p:clrMapOvr>
     <a:masterClrMapping/>
@@ -2599,18 +2506,12 @@
           <a:p>
             <a:fld id="{E33E2D1D-25A5-45DC-B24F-AC401B916F32}" type="slidenum">
               <a:rPr lang="en-US" smtClean="0"/>
-              <a:t>57</a:t>
             </a:fld>
             <a:endParaRPr lang="en-US"/>
           </a:p>
         </p:txBody>
       </p:sp>
     </p:spTree>
-    <p:extLst>
-      <p:ext uri="{BB962C8B-B14F-4D97-AF65-F5344CB8AC3E}">
-        <p14:creationId xmlns:p14="http://schemas.microsoft.com/office/powerpoint/2010/main" val="3305733916"/>
-      </p:ext>
-    </p:extLst>
   </p:cSld>
   <p:clrMapOvr>
     <a:masterClrMapping/>
@@ -2678,6 +2579,7 @@
               <a:rPr lang="ru-RU" baseline="0" dirty="0" smtClean="0"/>
               <a:t> про который не знает?</a:t>
             </a:r>
+            <a:endParaRPr lang="ru-RU" baseline="0" dirty="0" smtClean="0"/>
           </a:p>
           <a:p>
             <a:r>
@@ -2721,18 +2623,12 @@
           <a:p>
             <a:fld id="{E33E2D1D-25A5-45DC-B24F-AC401B916F32}" type="slidenum">
               <a:rPr lang="en-US" smtClean="0"/>
-              <a:t>60</a:t>
             </a:fld>
             <a:endParaRPr lang="en-US"/>
           </a:p>
         </p:txBody>
       </p:sp>
     </p:spTree>
-    <p:extLst>
-      <p:ext uri="{BB962C8B-B14F-4D97-AF65-F5344CB8AC3E}">
-        <p14:creationId xmlns:p14="http://schemas.microsoft.com/office/powerpoint/2010/main" val="2102094271"/>
-      </p:ext>
-    </p:extLst>
   </p:cSld>
   <p:clrMapOvr>
     <a:masterClrMapping/>
@@ -2825,18 +2721,12 @@
           <a:p>
             <a:fld id="{E33E2D1D-25A5-45DC-B24F-AC401B916F32}" type="slidenum">
               <a:rPr lang="en-US" smtClean="0"/>
-              <a:t>61</a:t>
             </a:fld>
             <a:endParaRPr lang="en-US"/>
           </a:p>
         </p:txBody>
       </p:sp>
     </p:spTree>
-    <p:extLst>
-      <p:ext uri="{BB962C8B-B14F-4D97-AF65-F5344CB8AC3E}">
-        <p14:creationId xmlns:p14="http://schemas.microsoft.com/office/powerpoint/2010/main" val="1656912250"/>
-      </p:ext>
-    </p:extLst>
   </p:cSld>
   <p:clrMapOvr>
     <a:masterClrMapping/>
@@ -2902,7 +2792,6 @@
               <a:buSzTx/>
               <a:buFontTx/>
               <a:buNone/>
-              <a:tabLst/>
               <a:defRPr/>
             </a:pPr>
             <a:r>
@@ -2925,6 +2814,7 @@
               <a:rPr lang="ru-RU" sz="1200" dirty="0" smtClean="0"/>
               <a:t> устарел, версия определяется через DOCTYPE. </a:t>
             </a:r>
+            <a:endParaRPr lang="ru-RU" sz="1200" dirty="0" smtClean="0"/>
           </a:p>
           <a:p>
             <a:pPr marL="0" marR="0" lvl="0" indent="0" algn="l" defTabSz="914400" rtl="0" eaLnBrk="1" fontAlgn="auto" latinLnBrk="0" hangingPunct="1">
@@ -2941,7 +2831,6 @@
               <a:buSzTx/>
               <a:buFontTx/>
               <a:buNone/>
-              <a:tabLst/>
               <a:defRPr/>
             </a:pPr>
             <a:endParaRPr lang="ru-RU" sz="1200" dirty="0" smtClean="0"/>
@@ -2961,13 +2850,13 @@
               <a:buSzTx/>
               <a:buFontTx/>
               <a:buNone/>
-              <a:tabLst/>
               <a:defRPr/>
             </a:pPr>
             <a:r>
               <a:rPr lang="en-US" sz="1200" dirty="0" smtClean="0"/>
               <a:t>http://www.w3.org/International/questions/qa-lang-why.en.php</a:t>
             </a:r>
+            <a:endParaRPr lang="en-US" sz="1200" dirty="0" smtClean="0"/>
           </a:p>
           <a:p>
             <a:pPr marL="0" marR="0" lvl="0" indent="0" algn="l" defTabSz="914400" rtl="0" eaLnBrk="1" fontAlgn="auto" latinLnBrk="0" hangingPunct="1">
@@ -2984,7 +2873,6 @@
               <a:buSzTx/>
               <a:buFontTx/>
               <a:buNone/>
-              <a:tabLst/>
               <a:defRPr/>
             </a:pPr>
             <a:r>
@@ -3258,7 +3146,6 @@
               <a:buSzTx/>
               <a:buFontTx/>
               <a:buNone/>
-              <a:tabLst/>
               <a:defRPr/>
             </a:pPr>
             <a:endParaRPr lang="en-US" sz="1200" b="1" kern="1200" dirty="0" smtClean="0">
@@ -3286,7 +3173,6 @@
               <a:buSzTx/>
               <a:buFontTx/>
               <a:buNone/>
-              <a:tabLst/>
               <a:defRPr/>
             </a:pPr>
             <a:r>
@@ -3354,7 +3240,6 @@
               <a:buSzTx/>
               <a:buFontTx/>
               <a:buNone/>
-              <a:tabLst/>
               <a:defRPr/>
             </a:pPr>
             <a:r>
@@ -3546,7 +3431,6 @@
               <a:buSzTx/>
               <a:buFontTx/>
               <a:buNone/>
-              <a:tabLst/>
               <a:defRPr/>
             </a:pPr>
             <a:endParaRPr lang="ru-RU" sz="1200" dirty="0" smtClean="0"/>
@@ -3566,7 +3450,6 @@
               <a:buSzTx/>
               <a:buFontTx/>
               <a:buNone/>
-              <a:tabLst/>
               <a:defRPr/>
             </a:pPr>
             <a:endParaRPr lang="en-US" sz="1200" dirty="0" smtClean="0"/>
@@ -3590,18 +3473,12 @@
           <a:p>
             <a:fld id="{E33E2D1D-25A5-45DC-B24F-AC401B916F32}" type="slidenum">
               <a:rPr lang="en-US" smtClean="0"/>
-              <a:t>62</a:t>
             </a:fld>
             <a:endParaRPr lang="en-US"/>
           </a:p>
         </p:txBody>
       </p:sp>
     </p:spTree>
-    <p:extLst>
-      <p:ext uri="{BB962C8B-B14F-4D97-AF65-F5344CB8AC3E}">
-        <p14:creationId xmlns:p14="http://schemas.microsoft.com/office/powerpoint/2010/main" val="4030919622"/>
-      </p:ext>
-    </p:extLst>
   </p:cSld>
   <p:clrMapOvr>
     <a:masterClrMapping/>
@@ -3674,18 +3551,12 @@
           <a:p>
             <a:fld id="{E33E2D1D-25A5-45DC-B24F-AC401B916F32}" type="slidenum">
               <a:rPr lang="en-US" smtClean="0"/>
-              <a:t>63</a:t>
             </a:fld>
             <a:endParaRPr lang="en-US"/>
           </a:p>
         </p:txBody>
       </p:sp>
     </p:spTree>
-    <p:extLst>
-      <p:ext uri="{BB962C8B-B14F-4D97-AF65-F5344CB8AC3E}">
-        <p14:creationId xmlns:p14="http://schemas.microsoft.com/office/powerpoint/2010/main" val="2704719973"/>
-      </p:ext>
-    </p:extLst>
   </p:cSld>
   <p:clrMapOvr>
     <a:masterClrMapping/>
@@ -3758,18 +3629,12 @@
           <a:p>
             <a:fld id="{E33E2D1D-25A5-45DC-B24F-AC401B916F32}" type="slidenum">
               <a:rPr lang="en-US" smtClean="0"/>
-              <a:t>64</a:t>
             </a:fld>
             <a:endParaRPr lang="en-US"/>
           </a:p>
         </p:txBody>
       </p:sp>
     </p:spTree>
-    <p:extLst>
-      <p:ext uri="{BB962C8B-B14F-4D97-AF65-F5344CB8AC3E}">
-        <p14:creationId xmlns:p14="http://schemas.microsoft.com/office/powerpoint/2010/main" val="3083063105"/>
-      </p:ext>
-    </p:extLst>
   </p:cSld>
   <p:clrMapOvr>
     <a:masterClrMapping/>
@@ -3842,18 +3707,12 @@
           <a:p>
             <a:fld id="{E33E2D1D-25A5-45DC-B24F-AC401B916F32}" type="slidenum">
               <a:rPr lang="en-US" smtClean="0"/>
-              <a:t>65</a:t>
             </a:fld>
             <a:endParaRPr lang="en-US"/>
           </a:p>
         </p:txBody>
       </p:sp>
     </p:spTree>
-    <p:extLst>
-      <p:ext uri="{BB962C8B-B14F-4D97-AF65-F5344CB8AC3E}">
-        <p14:creationId xmlns:p14="http://schemas.microsoft.com/office/powerpoint/2010/main" val="580846576"/>
-      </p:ext>
-    </p:extLst>
   </p:cSld>
   <p:clrMapOvr>
     <a:masterClrMapping/>
@@ -3909,6 +3768,7 @@
               <a:rPr lang="ru-RU" dirty="0" smtClean="0"/>
               <a:t>К вопросу о том, как создать окно:</a:t>
             </a:r>
+            <a:endParaRPr lang="ru-RU" dirty="0" smtClean="0"/>
           </a:p>
           <a:p>
             <a:endParaRPr lang="ru-RU" dirty="0" smtClean="0"/>
@@ -3951,18 +3811,12 @@
           <a:p>
             <a:fld id="{E33E2D1D-25A5-45DC-B24F-AC401B916F32}" type="slidenum">
               <a:rPr lang="en-US" smtClean="0"/>
-              <a:t>66</a:t>
             </a:fld>
             <a:endParaRPr lang="en-US"/>
           </a:p>
         </p:txBody>
       </p:sp>
     </p:spTree>
-    <p:extLst>
-      <p:ext uri="{BB962C8B-B14F-4D97-AF65-F5344CB8AC3E}">
-        <p14:creationId xmlns:p14="http://schemas.microsoft.com/office/powerpoint/2010/main" val="400512242"/>
-      </p:ext>
-    </p:extLst>
   </p:cSld>
   <p:clrMapOvr>
     <a:masterClrMapping/>
@@ -4035,18 +3889,12 @@
           <a:p>
             <a:fld id="{E33E2D1D-25A5-45DC-B24F-AC401B916F32}" type="slidenum">
               <a:rPr lang="en-US" smtClean="0"/>
-              <a:t>67</a:t>
             </a:fld>
             <a:endParaRPr lang="en-US"/>
           </a:p>
         </p:txBody>
       </p:sp>
     </p:spTree>
-    <p:extLst>
-      <p:ext uri="{BB962C8B-B14F-4D97-AF65-F5344CB8AC3E}">
-        <p14:creationId xmlns:p14="http://schemas.microsoft.com/office/powerpoint/2010/main" val="2685687666"/>
-      </p:ext>
-    </p:extLst>
   </p:cSld>
   <p:clrMapOvr>
     <a:masterClrMapping/>
@@ -4106,6 +3954,7 @@
               <a:rPr lang="ru-RU" baseline="0" dirty="0" smtClean="0"/>
               <a:t> не в тему, но существует такая статистика:</a:t>
             </a:r>
+            <a:endParaRPr lang="ru-RU" baseline="0" dirty="0" smtClean="0"/>
           </a:p>
           <a:p>
             <a:pPr marL="228600" indent="-228600">
@@ -4115,6 +3964,7 @@
               <a:rPr lang="en-US" baseline="0" dirty="0" smtClean="0"/>
               <a:t>http://alexvaleev.ru/browserstat/</a:t>
             </a:r>
+            <a:endParaRPr lang="en-US" baseline="0" dirty="0" smtClean="0"/>
           </a:p>
         </p:txBody>
       </p:sp>
@@ -4135,18 +3985,12 @@
           <a:p>
             <a:fld id="{E33E2D1D-25A5-45DC-B24F-AC401B916F32}" type="slidenum">
               <a:rPr lang="en-US" smtClean="0"/>
-              <a:t>6</a:t>
             </a:fld>
             <a:endParaRPr lang="en-US"/>
           </a:p>
         </p:txBody>
       </p:sp>
     </p:spTree>
-    <p:extLst>
-      <p:ext uri="{BB962C8B-B14F-4D97-AF65-F5344CB8AC3E}">
-        <p14:creationId xmlns:p14="http://schemas.microsoft.com/office/powerpoint/2010/main" val="903849233"/>
-      </p:ext>
-    </p:extLst>
   </p:cSld>
   <p:clrMapOvr>
     <a:masterClrMapping/>
@@ -4219,18 +4063,12 @@
           <a:p>
             <a:fld id="{E33E2D1D-25A5-45DC-B24F-AC401B916F32}" type="slidenum">
               <a:rPr lang="en-US" smtClean="0"/>
-              <a:t>68</a:t>
             </a:fld>
             <a:endParaRPr lang="en-US"/>
           </a:p>
         </p:txBody>
       </p:sp>
     </p:spTree>
-    <p:extLst>
-      <p:ext uri="{BB962C8B-B14F-4D97-AF65-F5344CB8AC3E}">
-        <p14:creationId xmlns:p14="http://schemas.microsoft.com/office/powerpoint/2010/main" val="1159408536"/>
-      </p:ext>
-    </p:extLst>
   </p:cSld>
   <p:clrMapOvr>
     <a:masterClrMapping/>
@@ -4350,18 +4188,12 @@
           <a:p>
             <a:fld id="{E33E2D1D-25A5-45DC-B24F-AC401B916F32}" type="slidenum">
               <a:rPr lang="en-US" smtClean="0"/>
-              <a:t>69</a:t>
             </a:fld>
             <a:endParaRPr lang="en-US"/>
           </a:p>
         </p:txBody>
       </p:sp>
     </p:spTree>
-    <p:extLst>
-      <p:ext uri="{BB962C8B-B14F-4D97-AF65-F5344CB8AC3E}">
-        <p14:creationId xmlns:p14="http://schemas.microsoft.com/office/powerpoint/2010/main" val="3353712536"/>
-      </p:ext>
-    </p:extLst>
   </p:cSld>
   <p:clrMapOvr>
     <a:masterClrMapping/>
@@ -4425,11 +4257,7 @@
           <a:p>
             <a:r>
               <a:rPr lang="en-US" dirty="0" smtClean="0"/>
-              <a:t>https</a:t>
-            </a:r>
-            <a:r>
-              <a:rPr lang="en-US" dirty="0" smtClean="0"/>
-              <a:t>://wiki.whatwg.org/wiki/MetaExtensions</a:t>
+              <a:t>https://wiki.whatwg.org/wiki/MetaExtensions</a:t>
             </a:r>
             <a:endParaRPr lang="ru-RU" dirty="0"/>
           </a:p>
@@ -4452,18 +4280,12 @@
           <a:p>
             <a:fld id="{E33E2D1D-25A5-45DC-B24F-AC401B916F32}" type="slidenum">
               <a:rPr lang="en-US" smtClean="0"/>
-              <a:t>70</a:t>
             </a:fld>
             <a:endParaRPr lang="en-US"/>
           </a:p>
         </p:txBody>
       </p:sp>
     </p:spTree>
-    <p:extLst>
-      <p:ext uri="{BB962C8B-B14F-4D97-AF65-F5344CB8AC3E}">
-        <p14:creationId xmlns:p14="http://schemas.microsoft.com/office/powerpoint/2010/main" val="2924131631"/>
-      </p:ext>
-    </p:extLst>
   </p:cSld>
   <p:clrMapOvr>
     <a:masterClrMapping/>
@@ -4542,18 +4364,12 @@
           <a:p>
             <a:fld id="{E33E2D1D-25A5-45DC-B24F-AC401B916F32}" type="slidenum">
               <a:rPr lang="en-US" smtClean="0"/>
-              <a:t>71</a:t>
             </a:fld>
             <a:endParaRPr lang="en-US"/>
           </a:p>
         </p:txBody>
       </p:sp>
     </p:spTree>
-    <p:extLst>
-      <p:ext uri="{BB962C8B-B14F-4D97-AF65-F5344CB8AC3E}">
-        <p14:creationId xmlns:p14="http://schemas.microsoft.com/office/powerpoint/2010/main" val="751344836"/>
-      </p:ext>
-    </p:extLst>
   </p:cSld>
   <p:clrMapOvr>
     <a:masterClrMapping/>
@@ -4626,18 +4442,12 @@
           <a:p>
             <a:fld id="{E33E2D1D-25A5-45DC-B24F-AC401B916F32}" type="slidenum">
               <a:rPr lang="en-US" smtClean="0"/>
-              <a:t>72</a:t>
             </a:fld>
             <a:endParaRPr lang="en-US"/>
           </a:p>
         </p:txBody>
       </p:sp>
     </p:spTree>
-    <p:extLst>
-      <p:ext uri="{BB962C8B-B14F-4D97-AF65-F5344CB8AC3E}">
-        <p14:creationId xmlns:p14="http://schemas.microsoft.com/office/powerpoint/2010/main" val="878983354"/>
-      </p:ext>
-    </p:extLst>
   </p:cSld>
   <p:clrMapOvr>
     <a:masterClrMapping/>
@@ -4710,18 +4520,12 @@
           <a:p>
             <a:fld id="{E33E2D1D-25A5-45DC-B24F-AC401B916F32}" type="slidenum">
               <a:rPr lang="en-US" smtClean="0"/>
-              <a:t>73</a:t>
             </a:fld>
             <a:endParaRPr lang="en-US"/>
           </a:p>
         </p:txBody>
       </p:sp>
     </p:spTree>
-    <p:extLst>
-      <p:ext uri="{BB962C8B-B14F-4D97-AF65-F5344CB8AC3E}">
-        <p14:creationId xmlns:p14="http://schemas.microsoft.com/office/powerpoint/2010/main" val="2675230745"/>
-      </p:ext>
-    </p:extLst>
   </p:cSld>
   <p:clrMapOvr>
     <a:masterClrMapping/>
@@ -4794,18 +4598,12 @@
           <a:p>
             <a:fld id="{E33E2D1D-25A5-45DC-B24F-AC401B916F32}" type="slidenum">
               <a:rPr lang="en-US" smtClean="0"/>
-              <a:t>74</a:t>
             </a:fld>
             <a:endParaRPr lang="en-US"/>
           </a:p>
         </p:txBody>
       </p:sp>
     </p:spTree>
-    <p:extLst>
-      <p:ext uri="{BB962C8B-B14F-4D97-AF65-F5344CB8AC3E}">
-        <p14:creationId xmlns:p14="http://schemas.microsoft.com/office/powerpoint/2010/main" val="731210837"/>
-      </p:ext>
-    </p:extLst>
   </p:cSld>
   <p:clrMapOvr>
     <a:masterClrMapping/>
@@ -4878,18 +4676,12 @@
           <a:p>
             <a:fld id="{E33E2D1D-25A5-45DC-B24F-AC401B916F32}" type="slidenum">
               <a:rPr lang="en-US" smtClean="0"/>
-              <a:t>75</a:t>
             </a:fld>
             <a:endParaRPr lang="en-US"/>
           </a:p>
         </p:txBody>
       </p:sp>
     </p:spTree>
-    <p:extLst>
-      <p:ext uri="{BB962C8B-B14F-4D97-AF65-F5344CB8AC3E}">
-        <p14:creationId xmlns:p14="http://schemas.microsoft.com/office/powerpoint/2010/main" val="3052492376"/>
-      </p:ext>
-    </p:extLst>
   </p:cSld>
   <p:clrMapOvr>
     <a:masterClrMapping/>
@@ -4966,18 +4758,12 @@
           <a:p>
             <a:fld id="{E33E2D1D-25A5-45DC-B24F-AC401B916F32}" type="slidenum">
               <a:rPr lang="en-US" smtClean="0"/>
-              <a:t>10</a:t>
             </a:fld>
             <a:endParaRPr lang="en-US"/>
           </a:p>
         </p:txBody>
       </p:sp>
     </p:spTree>
-    <p:extLst>
-      <p:ext uri="{BB962C8B-B14F-4D97-AF65-F5344CB8AC3E}">
-        <p14:creationId xmlns:p14="http://schemas.microsoft.com/office/powerpoint/2010/main" val="2040070423"/>
-      </p:ext>
-    </p:extLst>
   </p:cSld>
   <p:clrMapOvr>
     <a:masterClrMapping/>
@@ -5062,18 +4848,12 @@
           <a:p>
             <a:fld id="{E33E2D1D-25A5-45DC-B24F-AC401B916F32}" type="slidenum">
               <a:rPr lang="en-US" smtClean="0"/>
-              <a:t>12</a:t>
             </a:fld>
             <a:endParaRPr lang="en-US"/>
           </a:p>
         </p:txBody>
       </p:sp>
     </p:spTree>
-    <p:extLst>
-      <p:ext uri="{BB962C8B-B14F-4D97-AF65-F5344CB8AC3E}">
-        <p14:creationId xmlns:p14="http://schemas.microsoft.com/office/powerpoint/2010/main" val="3769370869"/>
-      </p:ext>
-    </p:extLst>
   </p:cSld>
   <p:clrMapOvr>
     <a:masterClrMapping/>
@@ -5133,6 +4913,7 @@
               <a:rPr lang="ru-RU" baseline="0" dirty="0" smtClean="0"/>
               <a:t> самом деле, групп больше. По спецификации:</a:t>
             </a:r>
+            <a:endParaRPr lang="ru-RU" baseline="0" dirty="0" smtClean="0"/>
           </a:p>
           <a:p>
             <a:r>
@@ -5143,6 +4924,7 @@
               <a:rPr lang="en-US" b="1" dirty="0" smtClean="0"/>
               <a:t>Void elements</a:t>
             </a:r>
+            <a:endParaRPr lang="en-US" b="1" dirty="0" smtClean="0"/>
           </a:p>
           <a:p>
             <a:r>
@@ -5216,6 +4998,7 @@
               <a:rPr lang="en-US" b="1" dirty="0" smtClean="0"/>
               <a:t>Raw text elements</a:t>
             </a:r>
+            <a:endParaRPr lang="en-US" b="1" dirty="0" smtClean="0"/>
           </a:p>
           <a:p>
             <a:r>
@@ -5226,6 +5009,7 @@
               <a:rPr lang="en-US" dirty="0" smtClean="0"/>
               <a:t>script, style</a:t>
             </a:r>
+            <a:endParaRPr lang="en-US" dirty="0" smtClean="0"/>
           </a:p>
           <a:p>
             <a:r>
@@ -5236,6 +5020,7 @@
               <a:rPr lang="en-US" b="1" dirty="0" smtClean="0"/>
               <a:t>Escapable raw text elements</a:t>
             </a:r>
+            <a:endParaRPr lang="en-US" b="1" dirty="0" smtClean="0"/>
           </a:p>
           <a:p>
             <a:r>
@@ -5250,6 +5035,7 @@
               <a:rPr lang="en-US" dirty="0" smtClean="0"/>
               <a:t>, title</a:t>
             </a:r>
+            <a:endParaRPr lang="en-US" dirty="0" smtClean="0"/>
           </a:p>
           <a:p>
             <a:r>
@@ -5264,12 +5050,14 @@
               <a:rPr lang="en-US" b="1" dirty="0" smtClean="0"/>
               <a:t>Foreign elements</a:t>
             </a:r>
+            <a:endParaRPr lang="en-US" b="1" dirty="0" smtClean="0"/>
           </a:p>
           <a:p>
             <a:r>
               <a:rPr lang="en-US" dirty="0" smtClean="0"/>
               <a:t>    Elements from the MathML namespace and the SVG namespace.</a:t>
             </a:r>
+            <a:endParaRPr lang="en-US" dirty="0" smtClean="0"/>
           </a:p>
           <a:p>
             <a:r>
@@ -5284,6 +5072,7 @@
               <a:rPr lang="en-US" b="1" dirty="0" smtClean="0"/>
               <a:t>Normal elements</a:t>
             </a:r>
+            <a:endParaRPr lang="en-US" b="1" dirty="0" smtClean="0"/>
           </a:p>
           <a:p>
             <a:r>
@@ -5311,18 +5100,12 @@
           <a:p>
             <a:fld id="{E33E2D1D-25A5-45DC-B24F-AC401B916F32}" type="slidenum">
               <a:rPr lang="en-US" smtClean="0"/>
-              <a:t>22</a:t>
             </a:fld>
             <a:endParaRPr lang="en-US"/>
           </a:p>
         </p:txBody>
       </p:sp>
     </p:spTree>
-    <p:extLst>
-      <p:ext uri="{BB962C8B-B14F-4D97-AF65-F5344CB8AC3E}">
-        <p14:creationId xmlns:p14="http://schemas.microsoft.com/office/powerpoint/2010/main" val="2103429163"/>
-      </p:ext>
-    </p:extLst>
   </p:cSld>
   <p:clrMapOvr>
     <a:masterClrMapping/>
@@ -5395,18 +5178,12 @@
           <a:p>
             <a:fld id="{E33E2D1D-25A5-45DC-B24F-AC401B916F32}" type="slidenum">
               <a:rPr lang="en-US" smtClean="0"/>
-              <a:t>23</a:t>
             </a:fld>
             <a:endParaRPr lang="en-US"/>
           </a:p>
         </p:txBody>
       </p:sp>
     </p:spTree>
-    <p:extLst>
-      <p:ext uri="{BB962C8B-B14F-4D97-AF65-F5344CB8AC3E}">
-        <p14:creationId xmlns:p14="http://schemas.microsoft.com/office/powerpoint/2010/main" val="3755851415"/>
-      </p:ext>
-    </p:extLst>
   </p:cSld>
   <p:clrMapOvr>
     <a:masterClrMapping/>
@@ -5517,18 +5294,12 @@
           <a:p>
             <a:fld id="{E33E2D1D-25A5-45DC-B24F-AC401B916F32}" type="slidenum">
               <a:rPr lang="en-US" smtClean="0"/>
-              <a:t>33</a:t>
             </a:fld>
             <a:endParaRPr lang="en-US"/>
           </a:p>
         </p:txBody>
       </p:sp>
     </p:spTree>
-    <p:extLst>
-      <p:ext uri="{BB962C8B-B14F-4D97-AF65-F5344CB8AC3E}">
-        <p14:creationId xmlns:p14="http://schemas.microsoft.com/office/powerpoint/2010/main" val="4230334807"/>
-      </p:ext>
-    </p:extLst>
   </p:cSld>
   <p:clrMapOvr>
     <a:masterClrMapping/>
@@ -5649,18 +5420,12 @@
           <a:p>
             <a:fld id="{E33E2D1D-25A5-45DC-B24F-AC401B916F32}" type="slidenum">
               <a:rPr lang="en-US" smtClean="0"/>
-              <a:t>41</a:t>
             </a:fld>
             <a:endParaRPr lang="en-US"/>
           </a:p>
         </p:txBody>
       </p:sp>
     </p:spTree>
-    <p:extLst>
-      <p:ext uri="{BB962C8B-B14F-4D97-AF65-F5344CB8AC3E}">
-        <p14:creationId xmlns:p14="http://schemas.microsoft.com/office/powerpoint/2010/main" val="2612564888"/>
-      </p:ext>
-    </p:extLst>
   </p:cSld>
   <p:clrMapOvr>
     <a:masterClrMapping/>
@@ -5669,7 +5434,7 @@
 </file>
 
 <file path=ppt/slideLayouts/slideLayout1.xml><?xml version="1.0" encoding="utf-8"?>
-<p:sldLayout xmlns:a="http://schemas.openxmlformats.org/drawingml/2006/main" xmlns:r="http://schemas.openxmlformats.org/officeDocument/2006/relationships" xmlns:p="http://schemas.openxmlformats.org/presentationml/2006/main" showMasterSp="0" type="title" preserve="1">
+<p:sldLayout xmlns:a="http://schemas.openxmlformats.org/drawingml/2006/main" xmlns:r="http://schemas.openxmlformats.org/officeDocument/2006/relationships" xmlns:p="http://schemas.openxmlformats.org/presentationml/2006/main" type="title" preserve="1" showMasterSp="0">
   <p:cSld name="Title Slide">
     <p:spTree>
       <p:nvGrpSpPr>
@@ -5894,7 +5659,6 @@
           <a:p>
             <a:fld id="{E642AE0A-37F8-43B6-8A56-4BDD2B51FA78}" type="datetimeFigureOut">
               <a:rPr lang="en-US" smtClean="0"/>
-              <a:t>9/1/2023</a:t>
             </a:fld>
             <a:endParaRPr lang="en-US"/>
           </a:p>
@@ -5936,7 +5700,6 @@
           <a:p>
             <a:fld id="{7B6A1755-7084-4254-A2EF-6950312A7CC7}" type="slidenum">
               <a:rPr lang="en-US" smtClean="0"/>
-              <a:t>‹#›</a:t>
             </a:fld>
             <a:endParaRPr lang="en-US"/>
           </a:p>
@@ -5981,11 +5744,6 @@
         </p:style>
       </p:cxnSp>
     </p:spTree>
-    <p:extLst>
-      <p:ext uri="{BB962C8B-B14F-4D97-AF65-F5344CB8AC3E}">
-        <p14:creationId xmlns:p14="http://schemas.microsoft.com/office/powerpoint/2010/main" val="2468766663"/>
-      </p:ext>
-    </p:extLst>
   </p:cSld>
   <p:clrMapOvr>
     <a:masterClrMapping/>
@@ -6053,6 +5811,7 @@
               <a:rPr lang="en-US" smtClean="0"/>
               <a:t>Click to edit Master text styles</a:t>
             </a:r>
+            <a:endParaRPr lang="en-US" smtClean="0"/>
           </a:p>
           <a:p>
             <a:pPr lvl="1"/>
@@ -6060,6 +5819,7 @@
               <a:rPr lang="en-US" smtClean="0"/>
               <a:t>Second level</a:t>
             </a:r>
+            <a:endParaRPr lang="en-US" smtClean="0"/>
           </a:p>
           <a:p>
             <a:pPr lvl="2"/>
@@ -6067,6 +5827,7 @@
               <a:rPr lang="en-US" smtClean="0"/>
               <a:t>Third level</a:t>
             </a:r>
+            <a:endParaRPr lang="en-US" smtClean="0"/>
           </a:p>
           <a:p>
             <a:pPr lvl="3"/>
@@ -6074,6 +5835,7 @@
               <a:rPr lang="en-US" smtClean="0"/>
               <a:t>Fourth level</a:t>
             </a:r>
+            <a:endParaRPr lang="en-US" smtClean="0"/>
           </a:p>
           <a:p>
             <a:pPr lvl="4"/>
@@ -6102,7 +5864,6 @@
           <a:p>
             <a:fld id="{E642AE0A-37F8-43B6-8A56-4BDD2B51FA78}" type="datetimeFigureOut">
               <a:rPr lang="en-US" smtClean="0"/>
-              <a:t>9/1/2023</a:t>
             </a:fld>
             <a:endParaRPr lang="en-US"/>
           </a:p>
@@ -6144,18 +5905,12 @@
           <a:p>
             <a:fld id="{7B6A1755-7084-4254-A2EF-6950312A7CC7}" type="slidenum">
               <a:rPr lang="en-US" smtClean="0"/>
-              <a:t>‹#›</a:t>
             </a:fld>
             <a:endParaRPr lang="en-US"/>
           </a:p>
         </p:txBody>
       </p:sp>
     </p:spTree>
-    <p:extLst>
-      <p:ext uri="{BB962C8B-B14F-4D97-AF65-F5344CB8AC3E}">
-        <p14:creationId xmlns:p14="http://schemas.microsoft.com/office/powerpoint/2010/main" val="1702933531"/>
-      </p:ext>
-    </p:extLst>
   </p:cSld>
   <p:clrMapOvr>
     <a:masterClrMapping/>
@@ -6164,7 +5919,7 @@
 </file>
 
 <file path=ppt/slideLayouts/slideLayout11.xml><?xml version="1.0" encoding="utf-8"?>
-<p:sldLayout xmlns:a="http://schemas.openxmlformats.org/drawingml/2006/main" xmlns:r="http://schemas.openxmlformats.org/officeDocument/2006/relationships" xmlns:p="http://schemas.openxmlformats.org/presentationml/2006/main" showMasterSp="0" type="vertTitleAndTx" preserve="1">
+<p:sldLayout xmlns:a="http://schemas.openxmlformats.org/drawingml/2006/main" xmlns:r="http://schemas.openxmlformats.org/officeDocument/2006/relationships" xmlns:p="http://schemas.openxmlformats.org/presentationml/2006/main" type="vertTitleAndTx" preserve="1" showMasterSp="0">
   <p:cSld name="Vertical Title and Text">
     <p:spTree>
       <p:nvGrpSpPr>
@@ -6309,6 +6064,7 @@
               <a:rPr lang="en-US" smtClean="0"/>
               <a:t>Click to edit Master text styles</a:t>
             </a:r>
+            <a:endParaRPr lang="en-US" smtClean="0"/>
           </a:p>
           <a:p>
             <a:pPr lvl="1"/>
@@ -6316,6 +6072,7 @@
               <a:rPr lang="en-US" smtClean="0"/>
               <a:t>Second level</a:t>
             </a:r>
+            <a:endParaRPr lang="en-US" smtClean="0"/>
           </a:p>
           <a:p>
             <a:pPr lvl="2"/>
@@ -6323,6 +6080,7 @@
               <a:rPr lang="en-US" smtClean="0"/>
               <a:t>Third level</a:t>
             </a:r>
+            <a:endParaRPr lang="en-US" smtClean="0"/>
           </a:p>
           <a:p>
             <a:pPr lvl="3"/>
@@ -6330,6 +6088,7 @@
               <a:rPr lang="en-US" smtClean="0"/>
               <a:t>Fourth level</a:t>
             </a:r>
+            <a:endParaRPr lang="en-US" smtClean="0"/>
           </a:p>
           <a:p>
             <a:pPr lvl="4"/>
@@ -6358,7 +6117,6 @@
           <a:p>
             <a:fld id="{E642AE0A-37F8-43B6-8A56-4BDD2B51FA78}" type="datetimeFigureOut">
               <a:rPr lang="en-US" smtClean="0"/>
-              <a:t>9/1/2023</a:t>
             </a:fld>
             <a:endParaRPr lang="en-US"/>
           </a:p>
@@ -6400,18 +6158,12 @@
           <a:p>
             <a:fld id="{7B6A1755-7084-4254-A2EF-6950312A7CC7}" type="slidenum">
               <a:rPr lang="en-US" smtClean="0"/>
-              <a:t>‹#›</a:t>
             </a:fld>
             <a:endParaRPr lang="en-US"/>
           </a:p>
         </p:txBody>
       </p:sp>
     </p:spTree>
-    <p:extLst>
-      <p:ext uri="{BB962C8B-B14F-4D97-AF65-F5344CB8AC3E}">
-        <p14:creationId xmlns:p14="http://schemas.microsoft.com/office/powerpoint/2010/main" val="1288857259"/>
-      </p:ext>
-    </p:extLst>
   </p:cSld>
   <p:clrMapOvr>
     <a:masterClrMapping/>
@@ -6479,6 +6231,7 @@
               <a:rPr lang="en-US" smtClean="0"/>
               <a:t>Click to edit Master text styles</a:t>
             </a:r>
+            <a:endParaRPr lang="en-US" smtClean="0"/>
           </a:p>
           <a:p>
             <a:pPr lvl="1"/>
@@ -6486,6 +6239,7 @@
               <a:rPr lang="en-US" smtClean="0"/>
               <a:t>Second level</a:t>
             </a:r>
+            <a:endParaRPr lang="en-US" smtClean="0"/>
           </a:p>
           <a:p>
             <a:pPr lvl="2"/>
@@ -6493,6 +6247,7 @@
               <a:rPr lang="en-US" smtClean="0"/>
               <a:t>Third level</a:t>
             </a:r>
+            <a:endParaRPr lang="en-US" smtClean="0"/>
           </a:p>
           <a:p>
             <a:pPr lvl="3"/>
@@ -6500,6 +6255,7 @@
               <a:rPr lang="en-US" smtClean="0"/>
               <a:t>Fourth level</a:t>
             </a:r>
+            <a:endParaRPr lang="en-US" smtClean="0"/>
           </a:p>
           <a:p>
             <a:pPr lvl="4"/>
@@ -6528,7 +6284,6 @@
           <a:p>
             <a:fld id="{E642AE0A-37F8-43B6-8A56-4BDD2B51FA78}" type="datetimeFigureOut">
               <a:rPr lang="en-US" smtClean="0"/>
-              <a:t>9/1/2023</a:t>
             </a:fld>
             <a:endParaRPr lang="en-US"/>
           </a:p>
@@ -6570,18 +6325,12 @@
           <a:p>
             <a:fld id="{7B6A1755-7084-4254-A2EF-6950312A7CC7}" type="slidenum">
               <a:rPr lang="en-US" smtClean="0"/>
-              <a:t>‹#›</a:t>
             </a:fld>
             <a:endParaRPr lang="en-US"/>
           </a:p>
         </p:txBody>
       </p:sp>
     </p:spTree>
-    <p:extLst>
-      <p:ext uri="{BB962C8B-B14F-4D97-AF65-F5344CB8AC3E}">
-        <p14:creationId xmlns:p14="http://schemas.microsoft.com/office/powerpoint/2010/main" val="961195889"/>
-      </p:ext>
-    </p:extLst>
   </p:cSld>
   <p:clrMapOvr>
     <a:masterClrMapping/>
@@ -6590,7 +6339,7 @@
 </file>
 
 <file path=ppt/slideLayouts/slideLayout3.xml><?xml version="1.0" encoding="utf-8"?>
-<p:sldLayout xmlns:a="http://schemas.openxmlformats.org/drawingml/2006/main" xmlns:r="http://schemas.openxmlformats.org/officeDocument/2006/relationships" xmlns:p="http://schemas.openxmlformats.org/presentationml/2006/main" showMasterSp="0" type="secHead" preserve="1">
+<p:sldLayout xmlns:a="http://schemas.openxmlformats.org/drawingml/2006/main" xmlns:r="http://schemas.openxmlformats.org/officeDocument/2006/relationships" xmlns:p="http://schemas.openxmlformats.org/presentationml/2006/main" type="secHead" preserve="1" showMasterSp="0">
   <p:cSld name="Section Header">
     <p:bg>
       <p:bgPr>
@@ -6851,6 +6600,7 @@
               <a:rPr lang="en-US" smtClean="0"/>
               <a:t>Click to edit Master text styles</a:t>
             </a:r>
+            <a:endParaRPr lang="en-US" smtClean="0"/>
           </a:p>
         </p:txBody>
       </p:sp>
@@ -6871,7 +6621,6 @@
           <a:p>
             <a:fld id="{E642AE0A-37F8-43B6-8A56-4BDD2B51FA78}" type="datetimeFigureOut">
               <a:rPr lang="en-US" smtClean="0"/>
-              <a:t>9/1/2023</a:t>
             </a:fld>
             <a:endParaRPr lang="en-US"/>
           </a:p>
@@ -6913,7 +6662,6 @@
           <a:p>
             <a:fld id="{7B6A1755-7084-4254-A2EF-6950312A7CC7}" type="slidenum">
               <a:rPr lang="en-US" smtClean="0"/>
-              <a:t>‹#›</a:t>
             </a:fld>
             <a:endParaRPr lang="en-US"/>
           </a:p>
@@ -6958,11 +6706,6 @@
         </p:style>
       </p:cxnSp>
     </p:spTree>
-    <p:extLst>
-      <p:ext uri="{BB962C8B-B14F-4D97-AF65-F5344CB8AC3E}">
-        <p14:creationId xmlns:p14="http://schemas.microsoft.com/office/powerpoint/2010/main" val="4062813176"/>
-      </p:ext>
-    </p:extLst>
   </p:cSld>
   <p:clrMapOvr>
     <a:masterClrMapping/>
@@ -7040,6 +6783,7 @@
               <a:rPr lang="en-US" smtClean="0"/>
               <a:t>Click to edit Master text styles</a:t>
             </a:r>
+            <a:endParaRPr lang="en-US" smtClean="0"/>
           </a:p>
           <a:p>
             <a:pPr lvl="1"/>
@@ -7047,6 +6791,7 @@
               <a:rPr lang="en-US" smtClean="0"/>
               <a:t>Second level</a:t>
             </a:r>
+            <a:endParaRPr lang="en-US" smtClean="0"/>
           </a:p>
           <a:p>
             <a:pPr lvl="2"/>
@@ -7054,6 +6799,7 @@
               <a:rPr lang="en-US" smtClean="0"/>
               <a:t>Third level</a:t>
             </a:r>
+            <a:endParaRPr lang="en-US" smtClean="0"/>
           </a:p>
           <a:p>
             <a:pPr lvl="3"/>
@@ -7061,6 +6807,7 @@
               <a:rPr lang="en-US" smtClean="0"/>
               <a:t>Fourth level</a:t>
             </a:r>
+            <a:endParaRPr lang="en-US" smtClean="0"/>
           </a:p>
           <a:p>
             <a:pPr lvl="4"/>
@@ -7097,6 +6844,7 @@
               <a:rPr lang="en-US" smtClean="0"/>
               <a:t>Click to edit Master text styles</a:t>
             </a:r>
+            <a:endParaRPr lang="en-US" smtClean="0"/>
           </a:p>
           <a:p>
             <a:pPr lvl="1"/>
@@ -7104,6 +6852,7 @@
               <a:rPr lang="en-US" smtClean="0"/>
               <a:t>Second level</a:t>
             </a:r>
+            <a:endParaRPr lang="en-US" smtClean="0"/>
           </a:p>
           <a:p>
             <a:pPr lvl="2"/>
@@ -7111,6 +6860,7 @@
               <a:rPr lang="en-US" smtClean="0"/>
               <a:t>Third level</a:t>
             </a:r>
+            <a:endParaRPr lang="en-US" smtClean="0"/>
           </a:p>
           <a:p>
             <a:pPr lvl="3"/>
@@ -7118,6 +6868,7 @@
               <a:rPr lang="en-US" smtClean="0"/>
               <a:t>Fourth level</a:t>
             </a:r>
+            <a:endParaRPr lang="en-US" smtClean="0"/>
           </a:p>
           <a:p>
             <a:pPr lvl="4"/>
@@ -7146,7 +6897,6 @@
           <a:p>
             <a:fld id="{E642AE0A-37F8-43B6-8A56-4BDD2B51FA78}" type="datetimeFigureOut">
               <a:rPr lang="en-US" smtClean="0"/>
-              <a:t>9/1/2023</a:t>
             </a:fld>
             <a:endParaRPr lang="en-US"/>
           </a:p>
@@ -7188,18 +6938,12 @@
           <a:p>
             <a:fld id="{7B6A1755-7084-4254-A2EF-6950312A7CC7}" type="slidenum">
               <a:rPr lang="en-US" smtClean="0"/>
-              <a:t>‹#›</a:t>
             </a:fld>
             <a:endParaRPr lang="en-US"/>
           </a:p>
         </p:txBody>
       </p:sp>
     </p:spTree>
-    <p:extLst>
-      <p:ext uri="{BB962C8B-B14F-4D97-AF65-F5344CB8AC3E}">
-        <p14:creationId xmlns:p14="http://schemas.microsoft.com/office/powerpoint/2010/main" val="4105802160"/>
-      </p:ext>
-    </p:extLst>
   </p:cSld>
   <p:clrMapOvr>
     <a:masterClrMapping/>
@@ -7320,6 +7064,7 @@
               <a:rPr lang="en-US" smtClean="0"/>
               <a:t>Click to edit Master text styles</a:t>
             </a:r>
+            <a:endParaRPr lang="en-US" smtClean="0"/>
           </a:p>
         </p:txBody>
       </p:sp>
@@ -7348,6 +7093,7 @@
               <a:rPr lang="en-US" smtClean="0"/>
               <a:t>Click to edit Master text styles</a:t>
             </a:r>
+            <a:endParaRPr lang="en-US" smtClean="0"/>
           </a:p>
           <a:p>
             <a:pPr lvl="1"/>
@@ -7355,6 +7101,7 @@
               <a:rPr lang="en-US" smtClean="0"/>
               <a:t>Second level</a:t>
             </a:r>
+            <a:endParaRPr lang="en-US" smtClean="0"/>
           </a:p>
           <a:p>
             <a:pPr lvl="2"/>
@@ -7362,6 +7109,7 @@
               <a:rPr lang="en-US" smtClean="0"/>
               <a:t>Third level</a:t>
             </a:r>
+            <a:endParaRPr lang="en-US" smtClean="0"/>
           </a:p>
           <a:p>
             <a:pPr lvl="3"/>
@@ -7369,6 +7117,7 @@
               <a:rPr lang="en-US" smtClean="0"/>
               <a:t>Fourth level</a:t>
             </a:r>
+            <a:endParaRPr lang="en-US" smtClean="0"/>
           </a:p>
           <a:p>
             <a:pPr lvl="4"/>
@@ -7448,6 +7197,7 @@
               <a:rPr lang="en-US" smtClean="0"/>
               <a:t>Click to edit Master text styles</a:t>
             </a:r>
+            <a:endParaRPr lang="en-US" smtClean="0"/>
           </a:p>
         </p:txBody>
       </p:sp>
@@ -7476,6 +7226,7 @@
               <a:rPr lang="en-US" smtClean="0"/>
               <a:t>Click to edit Master text styles</a:t>
             </a:r>
+            <a:endParaRPr lang="en-US" smtClean="0"/>
           </a:p>
           <a:p>
             <a:pPr lvl="1"/>
@@ -7483,6 +7234,7 @@
               <a:rPr lang="en-US" smtClean="0"/>
               <a:t>Second level</a:t>
             </a:r>
+            <a:endParaRPr lang="en-US" smtClean="0"/>
           </a:p>
           <a:p>
             <a:pPr lvl="2"/>
@@ -7490,6 +7242,7 @@
               <a:rPr lang="en-US" smtClean="0"/>
               <a:t>Third level</a:t>
             </a:r>
+            <a:endParaRPr lang="en-US" smtClean="0"/>
           </a:p>
           <a:p>
             <a:pPr lvl="3"/>
@@ -7497,6 +7250,7 @@
               <a:rPr lang="en-US" smtClean="0"/>
               <a:t>Fourth level</a:t>
             </a:r>
+            <a:endParaRPr lang="en-US" smtClean="0"/>
           </a:p>
           <a:p>
             <a:pPr lvl="4"/>
@@ -7525,7 +7279,6 @@
           <a:p>
             <a:fld id="{E642AE0A-37F8-43B6-8A56-4BDD2B51FA78}" type="datetimeFigureOut">
               <a:rPr lang="en-US" smtClean="0"/>
-              <a:t>9/1/2023</a:t>
             </a:fld>
             <a:endParaRPr lang="en-US"/>
           </a:p>
@@ -7567,18 +7320,12 @@
           <a:p>
             <a:fld id="{7B6A1755-7084-4254-A2EF-6950312A7CC7}" type="slidenum">
               <a:rPr lang="en-US" smtClean="0"/>
-              <a:t>‹#›</a:t>
             </a:fld>
             <a:endParaRPr lang="en-US"/>
           </a:p>
         </p:txBody>
       </p:sp>
     </p:spTree>
-    <p:extLst>
-      <p:ext uri="{BB962C8B-B14F-4D97-AF65-F5344CB8AC3E}">
-        <p14:creationId xmlns:p14="http://schemas.microsoft.com/office/powerpoint/2010/main" val="1479522725"/>
-      </p:ext>
-    </p:extLst>
   </p:cSld>
   <p:clrMapOvr>
     <a:masterClrMapping/>
@@ -7643,7 +7390,6 @@
           <a:p>
             <a:fld id="{E642AE0A-37F8-43B6-8A56-4BDD2B51FA78}" type="datetimeFigureOut">
               <a:rPr lang="en-US" smtClean="0"/>
-              <a:t>9/1/2023</a:t>
             </a:fld>
             <a:endParaRPr lang="en-US"/>
           </a:p>
@@ -7685,18 +7431,12 @@
           <a:p>
             <a:fld id="{7B6A1755-7084-4254-A2EF-6950312A7CC7}" type="slidenum">
               <a:rPr lang="en-US" smtClean="0"/>
-              <a:t>‹#›</a:t>
             </a:fld>
             <a:endParaRPr lang="en-US"/>
           </a:p>
         </p:txBody>
       </p:sp>
     </p:spTree>
-    <p:extLst>
-      <p:ext uri="{BB962C8B-B14F-4D97-AF65-F5344CB8AC3E}">
-        <p14:creationId xmlns:p14="http://schemas.microsoft.com/office/powerpoint/2010/main" val="758294348"/>
-      </p:ext>
-    </p:extLst>
   </p:cSld>
   <p:clrMapOvr>
     <a:masterClrMapping/>
@@ -7705,7 +7445,7 @@
 </file>
 
 <file path=ppt/slideLayouts/slideLayout7.xml><?xml version="1.0" encoding="utf-8"?>
-<p:sldLayout xmlns:a="http://schemas.openxmlformats.org/drawingml/2006/main" xmlns:r="http://schemas.openxmlformats.org/officeDocument/2006/relationships" xmlns:p="http://schemas.openxmlformats.org/presentationml/2006/main" showMasterSp="0" type="blank" preserve="1">
+<p:sldLayout xmlns:a="http://schemas.openxmlformats.org/drawingml/2006/main" xmlns:r="http://schemas.openxmlformats.org/officeDocument/2006/relationships" xmlns:p="http://schemas.openxmlformats.org/presentationml/2006/main" type="blank" preserve="1" showMasterSp="0">
   <p:cSld name="Blank">
     <p:spTree>
       <p:nvGrpSpPr>
@@ -7814,7 +7554,6 @@
           <a:p>
             <a:fld id="{E642AE0A-37F8-43B6-8A56-4BDD2B51FA78}" type="datetimeFigureOut">
               <a:rPr lang="en-US" smtClean="0"/>
-              <a:t>9/1/2023</a:t>
             </a:fld>
             <a:endParaRPr lang="en-US"/>
           </a:p>
@@ -7864,18 +7603,12 @@
           <a:p>
             <a:fld id="{7B6A1755-7084-4254-A2EF-6950312A7CC7}" type="slidenum">
               <a:rPr lang="en-US" smtClean="0"/>
-              <a:t>‹#›</a:t>
             </a:fld>
             <a:endParaRPr lang="en-US"/>
           </a:p>
         </p:txBody>
       </p:sp>
     </p:spTree>
-    <p:extLst>
-      <p:ext uri="{BB962C8B-B14F-4D97-AF65-F5344CB8AC3E}">
-        <p14:creationId xmlns:p14="http://schemas.microsoft.com/office/powerpoint/2010/main" val="1742958787"/>
-      </p:ext>
-    </p:extLst>
   </p:cSld>
   <p:clrMapOvr>
     <a:masterClrMapping/>
@@ -7884,7 +7617,7 @@
 </file>
 
 <file path=ppt/slideLayouts/slideLayout8.xml><?xml version="1.0" encoding="utf-8"?>
-<p:sldLayout xmlns:a="http://schemas.openxmlformats.org/drawingml/2006/main" xmlns:r="http://schemas.openxmlformats.org/officeDocument/2006/relationships" xmlns:p="http://schemas.openxmlformats.org/presentationml/2006/main" showMasterSp="0" type="objTx" preserve="1">
+<p:sldLayout xmlns:a="http://schemas.openxmlformats.org/drawingml/2006/main" xmlns:r="http://schemas.openxmlformats.org/officeDocument/2006/relationships" xmlns:p="http://schemas.openxmlformats.org/presentationml/2006/main" type="objTx" preserve="1" showMasterSp="0">
   <p:cSld name="Content with Caption">
     <p:spTree>
       <p:nvGrpSpPr>
@@ -8039,6 +7772,7 @@
               <a:rPr lang="en-US" smtClean="0"/>
               <a:t>Click to edit Master text styles</a:t>
             </a:r>
+            <a:endParaRPr lang="en-US" smtClean="0"/>
           </a:p>
           <a:p>
             <a:pPr lvl="1"/>
@@ -8046,6 +7780,7 @@
               <a:rPr lang="en-US" smtClean="0"/>
               <a:t>Second level</a:t>
             </a:r>
+            <a:endParaRPr lang="en-US" smtClean="0"/>
           </a:p>
           <a:p>
             <a:pPr lvl="2"/>
@@ -8053,6 +7788,7 @@
               <a:rPr lang="en-US" smtClean="0"/>
               <a:t>Third level</a:t>
             </a:r>
+            <a:endParaRPr lang="en-US" smtClean="0"/>
           </a:p>
           <a:p>
             <a:pPr lvl="3"/>
@@ -8060,6 +7796,7 @@
               <a:rPr lang="en-US" smtClean="0"/>
               <a:t>Fourth level</a:t>
             </a:r>
+            <a:endParaRPr lang="en-US" smtClean="0"/>
           </a:p>
           <a:p>
             <a:pPr lvl="4"/>
@@ -8139,6 +7876,7 @@
               <a:rPr lang="en-US" smtClean="0"/>
               <a:t>Click to edit Master text styles</a:t>
             </a:r>
+            <a:endParaRPr lang="en-US" smtClean="0"/>
           </a:p>
         </p:txBody>
       </p:sp>
@@ -8168,7 +7906,6 @@
           <a:p>
             <a:fld id="{E642AE0A-37F8-43B6-8A56-4BDD2B51FA78}" type="datetimeFigureOut">
               <a:rPr lang="en-US" smtClean="0"/>
-              <a:t>9/1/2023</a:t>
             </a:fld>
             <a:endParaRPr lang="en-US"/>
           </a:p>
@@ -8231,18 +7968,12 @@
           <a:p>
             <a:fld id="{7B6A1755-7084-4254-A2EF-6950312A7CC7}" type="slidenum">
               <a:rPr lang="en-US" smtClean="0"/>
-              <a:t>‹#›</a:t>
             </a:fld>
             <a:endParaRPr lang="en-US"/>
           </a:p>
         </p:txBody>
       </p:sp>
     </p:spTree>
-    <p:extLst>
-      <p:ext uri="{BB962C8B-B14F-4D97-AF65-F5344CB8AC3E}">
-        <p14:creationId xmlns:p14="http://schemas.microsoft.com/office/powerpoint/2010/main" val="2489951698"/>
-      </p:ext>
-    </p:extLst>
   </p:cSld>
   <p:clrMapOvr>
     <a:masterClrMapping/>
@@ -8251,7 +7982,7 @@
 </file>
 
 <file path=ppt/slideLayouts/slideLayout9.xml><?xml version="1.0" encoding="utf-8"?>
-<p:sldLayout xmlns:a="http://schemas.openxmlformats.org/drawingml/2006/main" xmlns:r="http://schemas.openxmlformats.org/officeDocument/2006/relationships" xmlns:p="http://schemas.openxmlformats.org/presentationml/2006/main" showMasterSp="0" type="picTx" preserve="1">
+<p:sldLayout xmlns:a="http://schemas.openxmlformats.org/drawingml/2006/main" xmlns:r="http://schemas.openxmlformats.org/officeDocument/2006/relationships" xmlns:p="http://schemas.openxmlformats.org/presentationml/2006/main" type="picTx" preserve="1" showMasterSp="0">
   <p:cSld name="Picture with Caption">
     <p:spTree>
       <p:nvGrpSpPr>
@@ -8525,6 +8256,7 @@
               <a:rPr lang="en-US" smtClean="0"/>
               <a:t>Click to edit Master text styles</a:t>
             </a:r>
+            <a:endParaRPr lang="en-US" smtClean="0"/>
           </a:p>
         </p:txBody>
       </p:sp>
@@ -8545,7 +8277,6 @@
           <a:p>
             <a:fld id="{E642AE0A-37F8-43B6-8A56-4BDD2B51FA78}" type="datetimeFigureOut">
               <a:rPr lang="en-US" smtClean="0"/>
-              <a:t>9/1/2023</a:t>
             </a:fld>
             <a:endParaRPr lang="en-US"/>
           </a:p>
@@ -8587,18 +8318,12 @@
           <a:p>
             <a:fld id="{7B6A1755-7084-4254-A2EF-6950312A7CC7}" type="slidenum">
               <a:rPr lang="en-US" smtClean="0"/>
-              <a:t>‹#›</a:t>
             </a:fld>
             <a:endParaRPr lang="en-US"/>
           </a:p>
         </p:txBody>
       </p:sp>
     </p:spTree>
-    <p:extLst>
-      <p:ext uri="{BB962C8B-B14F-4D97-AF65-F5344CB8AC3E}">
-        <p14:creationId xmlns:p14="http://schemas.microsoft.com/office/powerpoint/2010/main" val="2506344288"/>
-      </p:ext>
-    </p:extLst>
   </p:cSld>
   <p:clrMapOvr>
     <a:masterClrMapping/>
@@ -8767,6 +8492,7 @@
               <a:rPr lang="en-US" smtClean="0"/>
               <a:t>Click to edit Master text styles</a:t>
             </a:r>
+            <a:endParaRPr lang="en-US" smtClean="0"/>
           </a:p>
           <a:p>
             <a:pPr lvl="1"/>
@@ -8774,6 +8500,7 @@
               <a:rPr lang="en-US" smtClean="0"/>
               <a:t>Second level</a:t>
             </a:r>
+            <a:endParaRPr lang="en-US" smtClean="0"/>
           </a:p>
           <a:p>
             <a:pPr lvl="2"/>
@@ -8781,6 +8508,7 @@
               <a:rPr lang="en-US" smtClean="0"/>
               <a:t>Third level</a:t>
             </a:r>
+            <a:endParaRPr lang="en-US" smtClean="0"/>
           </a:p>
           <a:p>
             <a:pPr lvl="3"/>
@@ -8788,6 +8516,7 @@
               <a:rPr lang="en-US" smtClean="0"/>
               <a:t>Fourth level</a:t>
             </a:r>
+            <a:endParaRPr lang="en-US" smtClean="0"/>
           </a:p>
           <a:p>
             <a:pPr lvl="4"/>
@@ -8832,7 +8561,6 @@
           <a:p>
             <a:fld id="{E642AE0A-37F8-43B6-8A56-4BDD2B51FA78}" type="datetimeFigureOut">
               <a:rPr lang="en-US" smtClean="0"/>
-              <a:t>9/1/2023</a:t>
             </a:fld>
             <a:endParaRPr lang="en-US"/>
           </a:p>
@@ -8906,7 +8634,6 @@
           <a:p>
             <a:fld id="{7B6A1755-7084-4254-A2EF-6950312A7CC7}" type="slidenum">
               <a:rPr lang="en-US" smtClean="0"/>
-              <a:t>‹#›</a:t>
             </a:fld>
             <a:endParaRPr lang="en-US"/>
           </a:p>
@@ -8951,25 +8678,20 @@
         </p:style>
       </p:cxnSp>
     </p:spTree>
-    <p:extLst>
-      <p:ext uri="{BB962C8B-B14F-4D97-AF65-F5344CB8AC3E}">
-        <p14:creationId xmlns:p14="http://schemas.microsoft.com/office/powerpoint/2010/main" val="595273450"/>
-      </p:ext>
-    </p:extLst>
   </p:cSld>
   <p:clrMap bg1="lt1" tx1="dk1" bg2="lt2" tx2="dk2" accent1="accent1" accent2="accent2" accent3="accent3" accent4="accent4" accent5="accent5" accent6="accent6" hlink="hlink" folHlink="folHlink"/>
   <p:sldLayoutIdLst>
-    <p:sldLayoutId id="2147483673" r:id="rId1"/>
-    <p:sldLayoutId id="2147483674" r:id="rId2"/>
-    <p:sldLayoutId id="2147483675" r:id="rId3"/>
-    <p:sldLayoutId id="2147483676" r:id="rId4"/>
-    <p:sldLayoutId id="2147483677" r:id="rId5"/>
-    <p:sldLayoutId id="2147483678" r:id="rId6"/>
-    <p:sldLayoutId id="2147483679" r:id="rId7"/>
-    <p:sldLayoutId id="2147483680" r:id="rId8"/>
-    <p:sldLayoutId id="2147483681" r:id="rId9"/>
-    <p:sldLayoutId id="2147483682" r:id="rId10"/>
-    <p:sldLayoutId id="2147483683" r:id="rId11"/>
+    <p:sldLayoutId id="2147483649" r:id="rId1"/>
+    <p:sldLayoutId id="2147483650" r:id="rId2"/>
+    <p:sldLayoutId id="2147483651" r:id="rId3"/>
+    <p:sldLayoutId id="2147483652" r:id="rId4"/>
+    <p:sldLayoutId id="2147483653" r:id="rId5"/>
+    <p:sldLayoutId id="2147483654" r:id="rId6"/>
+    <p:sldLayoutId id="2147483655" r:id="rId7"/>
+    <p:sldLayoutId id="2147483656" r:id="rId8"/>
+    <p:sldLayoutId id="2147483657" r:id="rId9"/>
+    <p:sldLayoutId id="2147483658" r:id="rId10"/>
+    <p:sldLayoutId id="2147483659" r:id="rId11"/>
   </p:sldLayoutIdLst>
   <p:txStyles>
     <p:titleStyle>
@@ -9023,7 +8745,7 @@
           <a:cs typeface="+mn-cs"/>
         </a:defRPr>
       </a:lvl1pPr>
-      <a:lvl2pPr marL="384048" indent="-182880" algn="l" defTabSz="914400" rtl="0" eaLnBrk="1" latinLnBrk="0" hangingPunct="1">
+      <a:lvl2pPr marL="384175" indent="-182880" algn="l" defTabSz="914400" rtl="0" eaLnBrk="1" latinLnBrk="0" hangingPunct="1">
         <a:lnSpc>
           <a:spcPct val="90000"/>
         </a:lnSpc>
@@ -9036,7 +8758,7 @@
         <a:buClr>
           <a:schemeClr val="accent1"/>
         </a:buClr>
-        <a:buFont typeface="Calibri" pitchFamily="34" charset="0"/>
+        <a:buFont typeface="Calibri" panose="020F0502020204030204" pitchFamily="34" charset="0"/>
         <a:buChar char="◦"/>
         <a:defRPr sz="1800" kern="1200">
           <a:solidFill>
@@ -9050,7 +8772,7 @@
           <a:cs typeface="+mn-cs"/>
         </a:defRPr>
       </a:lvl2pPr>
-      <a:lvl3pPr marL="566928" indent="-182880" algn="l" defTabSz="914400" rtl="0" eaLnBrk="1" latinLnBrk="0" hangingPunct="1">
+      <a:lvl3pPr marL="567055" indent="-182880" algn="l" defTabSz="914400" rtl="0" eaLnBrk="1" latinLnBrk="0" hangingPunct="1">
         <a:lnSpc>
           <a:spcPct val="90000"/>
         </a:lnSpc>
@@ -9063,7 +8785,7 @@
         <a:buClr>
           <a:schemeClr val="accent1"/>
         </a:buClr>
-        <a:buFont typeface="Calibri" pitchFamily="34" charset="0"/>
+        <a:buFont typeface="Calibri" panose="020F0502020204030204" pitchFamily="34" charset="0"/>
         <a:buChar char="◦"/>
         <a:defRPr sz="1400" kern="1200">
           <a:solidFill>
@@ -9077,7 +8799,7 @@
           <a:cs typeface="+mn-cs"/>
         </a:defRPr>
       </a:lvl3pPr>
-      <a:lvl4pPr marL="749808" indent="-182880" algn="l" defTabSz="914400" rtl="0" eaLnBrk="1" latinLnBrk="0" hangingPunct="1">
+      <a:lvl4pPr marL="749935" indent="-182880" algn="l" defTabSz="914400" rtl="0" eaLnBrk="1" latinLnBrk="0" hangingPunct="1">
         <a:lnSpc>
           <a:spcPct val="90000"/>
         </a:lnSpc>
@@ -9090,7 +8812,7 @@
         <a:buClr>
           <a:schemeClr val="accent1"/>
         </a:buClr>
-        <a:buFont typeface="Calibri" pitchFamily="34" charset="0"/>
+        <a:buFont typeface="Calibri" panose="020F0502020204030204" pitchFamily="34" charset="0"/>
         <a:buChar char="◦"/>
         <a:defRPr sz="1400" kern="1200">
           <a:solidFill>
@@ -9104,7 +8826,7 @@
           <a:cs typeface="+mn-cs"/>
         </a:defRPr>
       </a:lvl4pPr>
-      <a:lvl5pPr marL="932688" indent="-182880" algn="l" defTabSz="914400" rtl="0" eaLnBrk="1" latinLnBrk="0" hangingPunct="1">
+      <a:lvl5pPr marL="932815" indent="-182880" algn="l" defTabSz="914400" rtl="0" eaLnBrk="1" latinLnBrk="0" hangingPunct="1">
         <a:lnSpc>
           <a:spcPct val="90000"/>
         </a:lnSpc>
@@ -9117,7 +8839,7 @@
         <a:buClr>
           <a:schemeClr val="accent1"/>
         </a:buClr>
-        <a:buFont typeface="Calibri" pitchFamily="34" charset="0"/>
+        <a:buFont typeface="Calibri" panose="020F0502020204030204" pitchFamily="34" charset="0"/>
         <a:buChar char="◦"/>
         <a:defRPr sz="1400" kern="1200">
           <a:solidFill>
@@ -9131,7 +8853,7 @@
           <a:cs typeface="+mn-cs"/>
         </a:defRPr>
       </a:lvl5pPr>
-      <a:lvl6pPr marL="1100000" indent="-228600" algn="l" defTabSz="914400" rtl="0" eaLnBrk="1" latinLnBrk="0" hangingPunct="1">
+      <a:lvl6pPr marL="1099820" indent="-228600" algn="l" defTabSz="914400" rtl="0" eaLnBrk="1" latinLnBrk="0" hangingPunct="1">
         <a:lnSpc>
           <a:spcPct val="90000"/>
         </a:lnSpc>
@@ -9144,7 +8866,7 @@
         <a:buClr>
           <a:schemeClr val="accent1"/>
         </a:buClr>
-        <a:buFont typeface="Calibri" pitchFamily="34" charset="0"/>
+        <a:buFont typeface="Calibri" panose="020F0502020204030204" pitchFamily="34" charset="0"/>
         <a:buChar char="◦"/>
         <a:defRPr sz="1400" kern="1200">
           <a:solidFill>
@@ -9158,7 +8880,7 @@
           <a:cs typeface="+mn-cs"/>
         </a:defRPr>
       </a:lvl6pPr>
-      <a:lvl7pPr marL="1300000" indent="-228600" algn="l" defTabSz="914400" rtl="0" eaLnBrk="1" latinLnBrk="0" hangingPunct="1">
+      <a:lvl7pPr marL="1299845" indent="-228600" algn="l" defTabSz="914400" rtl="0" eaLnBrk="1" latinLnBrk="0" hangingPunct="1">
         <a:lnSpc>
           <a:spcPct val="90000"/>
         </a:lnSpc>
@@ -9171,7 +8893,7 @@
         <a:buClr>
           <a:schemeClr val="accent1"/>
         </a:buClr>
-        <a:buFont typeface="Calibri" pitchFamily="34" charset="0"/>
+        <a:buFont typeface="Calibri" panose="020F0502020204030204" pitchFamily="34" charset="0"/>
         <a:buChar char="◦"/>
         <a:defRPr sz="1400" kern="1200">
           <a:solidFill>
@@ -9185,7 +8907,7 @@
           <a:cs typeface="+mn-cs"/>
         </a:defRPr>
       </a:lvl7pPr>
-      <a:lvl8pPr marL="1500000" indent="-228600" algn="l" defTabSz="914400" rtl="0" eaLnBrk="1" latinLnBrk="0" hangingPunct="1">
+      <a:lvl8pPr marL="1499870" indent="-228600" algn="l" defTabSz="914400" rtl="0" eaLnBrk="1" latinLnBrk="0" hangingPunct="1">
         <a:lnSpc>
           <a:spcPct val="90000"/>
         </a:lnSpc>
@@ -9198,7 +8920,7 @@
         <a:buClr>
           <a:schemeClr val="accent1"/>
         </a:buClr>
-        <a:buFont typeface="Calibri" pitchFamily="34" charset="0"/>
+        <a:buFont typeface="Calibri" panose="020F0502020204030204" pitchFamily="34" charset="0"/>
         <a:buChar char="◦"/>
         <a:defRPr sz="1400" kern="1200">
           <a:solidFill>
@@ -9212,7 +8934,7 @@
           <a:cs typeface="+mn-cs"/>
         </a:defRPr>
       </a:lvl8pPr>
-      <a:lvl9pPr marL="1700000" indent="-228600" algn="l" defTabSz="914400" rtl="0" eaLnBrk="1" latinLnBrk="0" hangingPunct="1">
+      <a:lvl9pPr marL="1699895" indent="-228600" algn="l" defTabSz="914400" rtl="0" eaLnBrk="1" latinLnBrk="0" hangingPunct="1">
         <a:lnSpc>
           <a:spcPct val="90000"/>
         </a:lnSpc>
@@ -9225,7 +8947,7 @@
         <a:buClr>
           <a:schemeClr val="accent1"/>
         </a:buClr>
-        <a:buFont typeface="Calibri" pitchFamily="34" charset="0"/>
+        <a:buFont typeface="Calibri" panose="020F0502020204030204" pitchFamily="34" charset="0"/>
         <a:buChar char="◦"/>
         <a:defRPr sz="1400" kern="1200">
           <a:solidFill>
@@ -9426,11 +9148,6 @@
         </p:txBody>
       </p:sp>
     </p:spTree>
-    <p:extLst>
-      <p:ext uri="{BB962C8B-B14F-4D97-AF65-F5344CB8AC3E}">
-        <p14:creationId xmlns:p14="http://schemas.microsoft.com/office/powerpoint/2010/main" val="2129827896"/>
-      </p:ext>
-    </p:extLst>
   </p:cSld>
   <p:clrMapOvr>
     <a:masterClrMapping/>
@@ -9640,15 +9357,11 @@
               <a:rPr lang="ru-RU" sz="3200" dirty="0" smtClean="0"/>
               <a:t>Описывает семантическую структуру страницы для представления (в браузере).</a:t>
             </a:r>
+            <a:endParaRPr lang="ru-RU" sz="3200" dirty="0" smtClean="0"/>
           </a:p>
         </p:txBody>
       </p:sp>
     </p:spTree>
-    <p:extLst>
-      <p:ext uri="{BB962C8B-B14F-4D97-AF65-F5344CB8AC3E}">
-        <p14:creationId xmlns:p14="http://schemas.microsoft.com/office/powerpoint/2010/main" val="1698158595"/>
-      </p:ext>
-    </p:extLst>
   </p:cSld>
   <p:clrMapOvr>
     <a:masterClrMapping/>
@@ -9798,15 +9511,11 @@
               <a:rPr lang="ru-RU" sz="3200" dirty="0" smtClean="0"/>
               <a:t> – строит визуальное представление страницы (сами теги при этом не отображаются).</a:t>
             </a:r>
+            <a:endParaRPr lang="ru-RU" sz="3200" dirty="0" smtClean="0"/>
           </a:p>
         </p:txBody>
       </p:sp>
     </p:spTree>
-    <p:extLst>
-      <p:ext uri="{BB962C8B-B14F-4D97-AF65-F5344CB8AC3E}">
-        <p14:creationId xmlns:p14="http://schemas.microsoft.com/office/powerpoint/2010/main" val="132045852"/>
-      </p:ext>
-    </p:extLst>
   </p:cSld>
   <p:clrMapOvr>
     <a:masterClrMapping/>
@@ -9927,6 +9636,7 @@
               <a:rPr lang="ru-RU" sz="3200" dirty="0" smtClean="0"/>
               <a:t>.</a:t>
             </a:r>
+            <a:endParaRPr lang="ru-RU" sz="3200" dirty="0" smtClean="0"/>
           </a:p>
           <a:p>
             <a:r>
@@ -9937,6 +9647,7 @@
               <a:rPr lang="ru-RU" sz="3200" dirty="0" smtClean="0"/>
               <a:t>: форматирование научной и технической документации.</a:t>
             </a:r>
+            <a:endParaRPr lang="ru-RU" sz="3200" dirty="0" smtClean="0"/>
           </a:p>
           <a:p>
             <a:r>
@@ -9971,6 +9682,7 @@
               <a:rPr lang="ru-RU" sz="3200" dirty="0" smtClean="0"/>
               <a:t>.</a:t>
             </a:r>
+            <a:endParaRPr lang="ru-RU" sz="3200" dirty="0" smtClean="0"/>
           </a:p>
           <a:p>
             <a:r>
@@ -10018,7 +9730,7 @@
           <p:nvPr/>
         </p:nvPicPr>
         <p:blipFill>
-          <a:blip r:embed="rId3">
+          <a:blip r:embed="rId1">
             <a:extLst>
               <a:ext uri="{28A0092B-C50C-407E-A947-70E740481C1C}">
                 <a14:useLocalDpi xmlns:a14="http://schemas.microsoft.com/office/drawing/2010/main" val="0"/>
@@ -10040,11 +9752,6 @@
         </p:spPr>
       </p:pic>
     </p:spTree>
-    <p:extLst>
-      <p:ext uri="{BB962C8B-B14F-4D97-AF65-F5344CB8AC3E}">
-        <p14:creationId xmlns:p14="http://schemas.microsoft.com/office/powerpoint/2010/main" val="2088155309"/>
-      </p:ext>
-    </p:extLst>
   </p:cSld>
   <p:clrMapOvr>
     <a:masterClrMapping/>
@@ -10173,6 +9880,7 @@
               <a:rPr lang="ru-RU" sz="3200" dirty="0" smtClean="0"/>
               <a:t>.</a:t>
             </a:r>
+            <a:endParaRPr lang="ru-RU" sz="3200" dirty="0" smtClean="0"/>
           </a:p>
           <a:p>
             <a:endParaRPr lang="ru-RU" sz="3200" dirty="0" smtClean="0"/>
@@ -10198,15 +9906,11 @@
               <a:rPr lang="ru-RU" sz="3200" dirty="0" smtClean="0"/>
               <a:t>в сентябре 1995. Основные нововведения: формы, таблицы, карты изображений.</a:t>
             </a:r>
+            <a:endParaRPr lang="ru-RU" sz="3200" dirty="0" smtClean="0"/>
           </a:p>
         </p:txBody>
       </p:sp>
     </p:spTree>
-    <p:extLst>
-      <p:ext uri="{BB962C8B-B14F-4D97-AF65-F5344CB8AC3E}">
-        <p14:creationId xmlns:p14="http://schemas.microsoft.com/office/powerpoint/2010/main" val="2705134952"/>
-      </p:ext>
-    </p:extLst>
   </p:cSld>
   <p:clrMapOvr>
     <a:masterClrMapping/>
@@ -10335,6 +10039,7 @@
               <a:rPr lang="ru-RU" sz="3200" dirty="0" smtClean="0"/>
               <a:t>-Ли.</a:t>
             </a:r>
+            <a:endParaRPr lang="ru-RU" sz="3200" dirty="0" smtClean="0"/>
           </a:p>
           <a:p>
             <a:pPr>
@@ -10408,15 +10113,11 @@
               <a:rPr lang="ru-RU" sz="3200" dirty="0" smtClean="0"/>
               <a:t>.</a:t>
             </a:r>
+            <a:endParaRPr lang="ru-RU" sz="3200" dirty="0" smtClean="0"/>
           </a:p>
         </p:txBody>
       </p:sp>
     </p:spTree>
-    <p:extLst>
-      <p:ext uri="{BB962C8B-B14F-4D97-AF65-F5344CB8AC3E}">
-        <p14:creationId xmlns:p14="http://schemas.microsoft.com/office/powerpoint/2010/main" val="1911849237"/>
-      </p:ext>
-    </p:extLst>
   </p:cSld>
   <p:clrMapOvr>
     <a:masterClrMapping/>
@@ -10672,11 +10373,6 @@
         </p:txBody>
       </p:sp>
     </p:spTree>
-    <p:extLst>
-      <p:ext uri="{BB962C8B-B14F-4D97-AF65-F5344CB8AC3E}">
-        <p14:creationId xmlns:p14="http://schemas.microsoft.com/office/powerpoint/2010/main" val="364297889"/>
-      </p:ext>
-    </p:extLst>
   </p:cSld>
   <p:clrMapOvr>
     <a:masterClrMapping/>
@@ -10821,6 +10517,7 @@
               <a:rPr lang="ru-RU" sz="3200" dirty="0" smtClean="0"/>
               <a:t>.</a:t>
             </a:r>
+            <a:endParaRPr lang="ru-RU" sz="3200" dirty="0" smtClean="0"/>
           </a:p>
           <a:p>
             <a:pPr>
@@ -10894,6 +10591,7 @@
               <a:rPr lang="ru-RU" sz="3200" dirty="0" smtClean="0"/>
               <a:t>.</a:t>
             </a:r>
+            <a:endParaRPr lang="ru-RU" sz="3200" dirty="0" smtClean="0"/>
           </a:p>
           <a:p>
             <a:pPr>
@@ -10951,15 +10649,11 @@
               <a:rPr lang="ru-RU" sz="3200" dirty="0" smtClean="0"/>
               <a:t>пользователей.</a:t>
             </a:r>
+            <a:endParaRPr lang="ru-RU" sz="3200" dirty="0" smtClean="0"/>
           </a:p>
         </p:txBody>
       </p:sp>
     </p:spTree>
-    <p:extLst>
-      <p:ext uri="{BB962C8B-B14F-4D97-AF65-F5344CB8AC3E}">
-        <p14:creationId xmlns:p14="http://schemas.microsoft.com/office/powerpoint/2010/main" val="2752779500"/>
-      </p:ext>
-    </p:extLst>
   </p:cSld>
   <p:clrMapOvr>
     <a:masterClrMapping/>
@@ -11118,6 +10812,7 @@
               <a:rPr lang="en-US" sz="3200" dirty="0" smtClean="0"/>
               <a:t>  </a:t>
             </a:r>
+            <a:endParaRPr lang="en-US" sz="3200" dirty="0" smtClean="0"/>
           </a:p>
           <a:p>
             <a:pPr>
@@ -11134,7 +10829,7 @@
             </a:r>
             <a:r>
               <a:rPr lang="ru-RU" sz="3200" u="sng" dirty="0">
-                <a:hlinkClick r:id="rId2"/>
+                <a:hlinkClick r:id="rId1"/>
               </a:rPr>
               <a:t>подписали соглашение</a:t>
             </a:r>
@@ -11157,6 +10852,7 @@
               <a:rPr lang="ru-RU" sz="3200" dirty="0" smtClean="0"/>
               <a:t>В целом, стандарты совпадают. Небольшие различия:</a:t>
             </a:r>
+            <a:endParaRPr lang="ru-RU" sz="3200" dirty="0" smtClean="0"/>
           </a:p>
           <a:p>
             <a:pPr>
@@ -11169,19 +10865,19 @@
             </a:pPr>
             <a:r>
               <a:rPr lang="en-US" sz="3200" dirty="0" smtClean="0">
-                <a:hlinkClick r:id="rId3"/>
+                <a:hlinkClick r:id="rId2"/>
               </a:rPr>
               <a:t>http</a:t>
             </a:r>
             <a:r>
               <a:rPr lang="en-US" sz="3200" dirty="0">
-                <a:hlinkClick r:id="rId3"/>
+                <a:hlinkClick r:id="rId2"/>
               </a:rPr>
               <a:t>://developer.telerik.com/featured/w3c-vs-whatwg-html5-specs-differences-documented</a:t>
             </a:r>
             <a:r>
               <a:rPr lang="en-US" sz="3200" dirty="0" smtClean="0">
-                <a:hlinkClick r:id="rId3"/>
+                <a:hlinkClick r:id="rId2"/>
               </a:rPr>
               <a:t>/</a:t>
             </a:r>
@@ -11198,18 +10894,18 @@
             </a:pPr>
             <a:r>
               <a:rPr lang="en-US" sz="3200" smtClean="0">
-                <a:hlinkClick r:id="rId4"/>
+                <a:hlinkClick r:id="rId3"/>
               </a:rPr>
               <a:t>http</a:t>
             </a:r>
             <a:r>
               <a:rPr lang="en-US" sz="3200" dirty="0">
-                <a:hlinkClick r:id="rId4"/>
+                <a:hlinkClick r:id="rId3"/>
               </a:rPr>
               <a:t>://www.w3.org/wiki/HTML/W3C-WHATWG-Differences</a:t>
             </a:r>
             <a:endParaRPr lang="ru-RU" sz="3200" dirty="0">
-              <a:hlinkClick r:id="rId3"/>
+              <a:hlinkClick r:id="rId2"/>
             </a:endParaRPr>
           </a:p>
           <a:p>
@@ -11226,11 +10922,6 @@
         </p:txBody>
       </p:sp>
     </p:spTree>
-    <p:extLst>
-      <p:ext uri="{BB962C8B-B14F-4D97-AF65-F5344CB8AC3E}">
-        <p14:creationId xmlns:p14="http://schemas.microsoft.com/office/powerpoint/2010/main" val="3473783739"/>
-      </p:ext>
-    </p:extLst>
   </p:cSld>
   <p:clrMapOvr>
     <a:masterClrMapping/>
@@ -11335,6 +11026,7 @@
               <a:rPr lang="ru-RU" sz="3200" dirty="0" smtClean="0"/>
               <a:t>Новые элементы (мультимедиа, структура страницы), новые атрибуты. </a:t>
             </a:r>
+            <a:endParaRPr lang="ru-RU" sz="3200" dirty="0" smtClean="0"/>
           </a:p>
           <a:p>
             <a:pPr>
@@ -11365,11 +11057,6 @@
         </p:txBody>
       </p:sp>
     </p:spTree>
-    <p:extLst>
-      <p:ext uri="{BB962C8B-B14F-4D97-AF65-F5344CB8AC3E}">
-        <p14:creationId xmlns:p14="http://schemas.microsoft.com/office/powerpoint/2010/main" val="2124397423"/>
-      </p:ext>
-    </p:extLst>
   </p:cSld>
   <p:clrMapOvr>
     <a:masterClrMapping/>
@@ -11477,6 +11164,7 @@
               <a:rPr lang="ru-RU" sz="3200" dirty="0" smtClean="0"/>
               <a:t>-элементов.</a:t>
             </a:r>
+            <a:endParaRPr lang="ru-RU" sz="3200" dirty="0" smtClean="0"/>
           </a:p>
           <a:p>
             <a:endParaRPr lang="ru-RU" sz="3200" dirty="0" smtClean="0"/>
@@ -11486,6 +11174,7 @@
               <a:rPr lang="ru-RU" sz="3200" dirty="0" smtClean="0"/>
               <a:t>Кроме элементов (с содержимым) – комментарии, пробельные символы.</a:t>
             </a:r>
+            <a:endParaRPr lang="ru-RU" sz="3200" dirty="0" smtClean="0"/>
           </a:p>
           <a:p>
             <a:endParaRPr lang="ru-RU" sz="3200" dirty="0" smtClean="0"/>
@@ -11550,11 +11239,6 @@
         </p:txBody>
       </p:sp>
     </p:spTree>
-    <p:extLst>
-      <p:ext uri="{BB962C8B-B14F-4D97-AF65-F5344CB8AC3E}">
-        <p14:creationId xmlns:p14="http://schemas.microsoft.com/office/powerpoint/2010/main" val="999750953"/>
-      </p:ext>
-    </p:extLst>
   </p:cSld>
   <p:clrMapOvr>
     <a:masterClrMapping/>
@@ -11654,6 +11338,11 @@
               </a:rPr>
               <a:t>HTML – история, версии</a:t>
             </a:r>
+            <a:endParaRPr lang="ru-RU" sz="3600" b="1" dirty="0">
+              <a:solidFill>
+                <a:srgbClr val="FF0000"/>
+              </a:solidFill>
+            </a:endParaRPr>
           </a:p>
           <a:p>
             <a:pPr marL="514350" lvl="0" indent="-514350">
@@ -11671,6 +11360,11 @@
               </a:rPr>
               <a:t>Синтаксис HTML</a:t>
             </a:r>
+            <a:endParaRPr lang="ru-RU" sz="3600" b="1" dirty="0">
+              <a:solidFill>
+                <a:srgbClr val="FF0000"/>
+              </a:solidFill>
+            </a:endParaRPr>
           </a:p>
           <a:p>
             <a:pPr marL="514350" lvl="0" indent="-514350">
@@ -11688,6 +11382,11 @@
               </a:rPr>
               <a:t>HTML и XML. XHTML</a:t>
             </a:r>
+            <a:endParaRPr lang="ru-RU" sz="3600" b="1" dirty="0">
+              <a:solidFill>
+                <a:srgbClr val="FF0000"/>
+              </a:solidFill>
+            </a:endParaRPr>
           </a:p>
           <a:p>
             <a:pPr marL="514350" lvl="0" indent="-514350">
@@ -11705,6 +11404,11 @@
               </a:rPr>
               <a:t>Глобальные атрибуты и атрибуты событий</a:t>
             </a:r>
+            <a:endParaRPr lang="ru-RU" sz="3600" b="1" dirty="0">
+              <a:solidFill>
+                <a:srgbClr val="FF0000"/>
+              </a:solidFill>
+            </a:endParaRPr>
           </a:p>
           <a:p>
             <a:pPr marL="514350" lvl="0" indent="-514350">
@@ -11722,6 +11426,11 @@
               </a:rPr>
               <a:t>Структура HTML-документа</a:t>
             </a:r>
+            <a:endParaRPr lang="ru-RU" sz="3600" b="1" dirty="0">
+              <a:solidFill>
+                <a:srgbClr val="FF0000"/>
+              </a:solidFill>
+            </a:endParaRPr>
           </a:p>
           <a:p>
             <a:pPr marL="514350" lvl="0" indent="-514350">
@@ -11739,15 +11448,15 @@
               </a:rPr>
               <a:t>Метаданные документа</a:t>
             </a:r>
+            <a:endParaRPr lang="ru-RU" sz="3600" b="1" dirty="0">
+              <a:solidFill>
+                <a:srgbClr val="FF0000"/>
+              </a:solidFill>
+            </a:endParaRPr>
           </a:p>
         </p:txBody>
       </p:sp>
     </p:spTree>
-    <p:extLst>
-      <p:ext uri="{BB962C8B-B14F-4D97-AF65-F5344CB8AC3E}">
-        <p14:creationId xmlns:p14="http://schemas.microsoft.com/office/powerpoint/2010/main" val="1594573717"/>
-      </p:ext>
-    </p:extLst>
   </p:cSld>
   <p:clrMapOvr>
     <a:masterClrMapping/>
@@ -12529,11 +12238,6 @@
         </p:txBody>
       </p:sp>
     </p:spTree>
-    <p:extLst>
-      <p:ext uri="{BB962C8B-B14F-4D97-AF65-F5344CB8AC3E}">
-        <p14:creationId xmlns:p14="http://schemas.microsoft.com/office/powerpoint/2010/main" val="73139082"/>
-      </p:ext>
-    </p:extLst>
   </p:cSld>
   <p:clrMapOvr>
     <a:masterClrMapping/>
@@ -12589,10 +12293,6 @@
               <a:rPr lang="ru-RU" dirty="0" smtClean="0"/>
               <a:t>Синтаксис </a:t>
             </a:r>
-            <a:r>
-              <a:rPr lang="en-US" dirty="0" smtClean="0"/>
-              <a:t/>
-            </a:r>
             <a:br>
               <a:rPr lang="en-US" dirty="0" smtClean="0"/>
             </a:br>
@@ -12611,9 +12311,11 @@
           <p:nvPr/>
         </p:nvPicPr>
         <p:blipFill rotWithShape="1">
-          <a:blip r:embed="rId2"/>
+          <a:blip r:embed="rId1"/>
           <a:srcRect l="23558" t="17939" r="51442" b="38339"/>
-          <a:stretch/>
+          <a:stretch>
+            <a:fillRect/>
+          </a:stretch>
         </p:blipFill>
         <p:spPr bwMode="auto">
           <a:xfrm>
@@ -12626,19 +12328,9 @@
           <a:ln>
             <a:noFill/>
           </a:ln>
-          <a:extLst>
-            <a:ext uri="{53640926-AAD7-44D8-BBD7-CCE9431645EC}">
-              <a14:shadowObscured xmlns:a14="http://schemas.microsoft.com/office/drawing/2010/main"/>
-            </a:ext>
-          </a:extLst>
         </p:spPr>
       </p:pic>
     </p:spTree>
-    <p:extLst>
-      <p:ext uri="{BB962C8B-B14F-4D97-AF65-F5344CB8AC3E}">
-        <p14:creationId xmlns:p14="http://schemas.microsoft.com/office/powerpoint/2010/main" val="1245009400"/>
-      </p:ext>
-    </p:extLst>
   </p:cSld>
   <p:clrMapOvr>
     <a:masterClrMapping/>
@@ -12785,6 +12477,7 @@
               <a:rPr lang="ru-RU" sz="3200" dirty="0" smtClean="0"/>
               <a:t>.</a:t>
             </a:r>
+            <a:endParaRPr lang="ru-RU" sz="3200" dirty="0" smtClean="0"/>
           </a:p>
           <a:p>
             <a:r>
@@ -12807,15 +12500,11 @@
               <a:rPr lang="ru-RU" sz="3200" dirty="0" smtClean="0"/>
               <a:t>HTML.</a:t>
             </a:r>
+            <a:endParaRPr lang="ru-RU" sz="3200" dirty="0" smtClean="0"/>
           </a:p>
         </p:txBody>
       </p:sp>
     </p:spTree>
-    <p:extLst>
-      <p:ext uri="{BB962C8B-B14F-4D97-AF65-F5344CB8AC3E}">
-        <p14:creationId xmlns:p14="http://schemas.microsoft.com/office/powerpoint/2010/main" val="4228241969"/>
-      </p:ext>
-    </p:extLst>
   </p:cSld>
   <p:clrMapOvr>
     <a:masterClrMapping/>
@@ -12971,6 +12660,7 @@
               <a:rPr lang="ru-RU" sz="3200" dirty="0" smtClean="0"/>
               <a:t>).</a:t>
             </a:r>
+            <a:endParaRPr lang="ru-RU" sz="3200" dirty="0" smtClean="0"/>
           </a:p>
           <a:p>
             <a:r>
@@ -13049,6 +12739,7 @@
               <a:rPr lang="ru-RU" sz="3200" dirty="0"/>
               <a:t>.</a:t>
             </a:r>
+            <a:endParaRPr lang="ru-RU" sz="3200" dirty="0"/>
           </a:p>
           <a:p>
             <a:endParaRPr lang="ru-RU" sz="3200" b="1" dirty="0" smtClean="0"/>
@@ -13122,15 +12813,11 @@
               <a:rPr lang="ru-RU" sz="3200" dirty="0" smtClean="0"/>
               <a:t>.</a:t>
             </a:r>
+            <a:endParaRPr lang="ru-RU" sz="3200" dirty="0" smtClean="0"/>
           </a:p>
         </p:txBody>
       </p:sp>
     </p:spTree>
-    <p:extLst>
-      <p:ext uri="{BB962C8B-B14F-4D97-AF65-F5344CB8AC3E}">
-        <p14:creationId xmlns:p14="http://schemas.microsoft.com/office/powerpoint/2010/main" val="568178329"/>
-      </p:ext>
-    </p:extLst>
   </p:cSld>
   <p:clrMapOvr>
     <a:masterClrMapping/>
@@ -13230,6 +12917,7 @@
               <a:rPr lang="ru-RU" sz="3200" dirty="0" smtClean="0"/>
               <a:t>.</a:t>
             </a:r>
+            <a:endParaRPr lang="ru-RU" sz="3200" dirty="0" smtClean="0"/>
           </a:p>
           <a:p>
             <a:endParaRPr lang="ru-RU" sz="3200" dirty="0"/>
@@ -13340,11 +13028,6 @@
         </p:txBody>
       </p:sp>
     </p:spTree>
-    <p:extLst>
-      <p:ext uri="{BB962C8B-B14F-4D97-AF65-F5344CB8AC3E}">
-        <p14:creationId xmlns:p14="http://schemas.microsoft.com/office/powerpoint/2010/main" val="509920015"/>
-      </p:ext>
-    </p:extLst>
   </p:cSld>
   <p:clrMapOvr>
     <a:masterClrMapping/>
@@ -13440,6 +13123,7 @@
               <a:rPr lang="en-US" sz="3200" dirty="0" smtClean="0"/>
               <a:t>.</a:t>
             </a:r>
+            <a:endParaRPr lang="en-US" sz="3200" dirty="0" smtClean="0"/>
           </a:p>
           <a:p>
             <a:endParaRPr lang="en-US" sz="3200" dirty="0"/>
@@ -13485,6 +13169,7 @@
               <a:rPr lang="ru-RU" sz="3200" dirty="0" smtClean="0"/>
               <a:t>курсив.</a:t>
             </a:r>
+            <a:endParaRPr lang="ru-RU" sz="3200" dirty="0" smtClean="0"/>
           </a:p>
           <a:p>
             <a:r>
@@ -13672,11 +13357,6 @@
         </p:txBody>
       </p:sp>
     </p:spTree>
-    <p:extLst>
-      <p:ext uri="{BB962C8B-B14F-4D97-AF65-F5344CB8AC3E}">
-        <p14:creationId xmlns:p14="http://schemas.microsoft.com/office/powerpoint/2010/main" val="4035746615"/>
-      </p:ext>
-    </p:extLst>
   </p:cSld>
   <p:clrMapOvr>
     <a:masterClrMapping/>
@@ -13768,6 +13448,7 @@
               <a:rPr lang="ru-RU" sz="3200" dirty="0" smtClean="0"/>
               <a:t>.</a:t>
             </a:r>
+            <a:endParaRPr lang="ru-RU" sz="3200" dirty="0" smtClean="0"/>
           </a:p>
           <a:p>
             <a:r>
@@ -13782,6 +13463,7 @@
               <a:rPr lang="ru-RU" sz="3200" dirty="0" smtClean="0"/>
               <a:t>строки.</a:t>
             </a:r>
+            <a:endParaRPr lang="ru-RU" sz="3200" dirty="0" smtClean="0"/>
           </a:p>
           <a:p>
             <a:endParaRPr lang="ru-RU" sz="3200" dirty="0" smtClean="0"/>
@@ -13799,15 +13481,11 @@
               <a:rPr lang="ru-RU" sz="3200" dirty="0" smtClean="0"/>
               <a:t>.</a:t>
             </a:r>
+            <a:endParaRPr lang="ru-RU" sz="3200" dirty="0" smtClean="0"/>
           </a:p>
         </p:txBody>
       </p:sp>
     </p:spTree>
-    <p:extLst>
-      <p:ext uri="{BB962C8B-B14F-4D97-AF65-F5344CB8AC3E}">
-        <p14:creationId xmlns:p14="http://schemas.microsoft.com/office/powerpoint/2010/main" val="3516281287"/>
-      </p:ext>
-    </p:extLst>
   </p:cSld>
   <p:clrMapOvr>
     <a:masterClrMapping/>
@@ -13907,6 +13585,7 @@
               <a:rPr lang="ru-RU" sz="3200" dirty="0" smtClean="0"/>
               <a:t>.</a:t>
             </a:r>
+            <a:endParaRPr lang="ru-RU" sz="3200" dirty="0" smtClean="0"/>
           </a:p>
           <a:p>
             <a:r>
@@ -13937,6 +13616,7 @@
               <a:rPr lang="ru-RU" sz="3200" dirty="0" smtClean="0"/>
               <a:t>кавычки.</a:t>
             </a:r>
+            <a:endParaRPr lang="ru-RU" sz="3200" dirty="0" smtClean="0"/>
           </a:p>
           <a:p>
             <a:endParaRPr lang="ru-RU" sz="3200" dirty="0" smtClean="0"/>
@@ -13967,11 +13647,6 @@
         </p:txBody>
       </p:sp>
     </p:spTree>
-    <p:extLst>
-      <p:ext uri="{BB962C8B-B14F-4D97-AF65-F5344CB8AC3E}">
-        <p14:creationId xmlns:p14="http://schemas.microsoft.com/office/powerpoint/2010/main" val="3385422402"/>
-      </p:ext>
-    </p:extLst>
   </p:cSld>
   <p:clrMapOvr>
     <a:masterClrMapping/>
@@ -14075,6 +13750,7 @@
               <a:rPr lang="ru-RU" sz="3200" dirty="0" smtClean="0"/>
               <a:t>только имя атрибута.</a:t>
             </a:r>
+            <a:endParaRPr lang="ru-RU" sz="3200" dirty="0" smtClean="0"/>
           </a:p>
           <a:p>
             <a:endParaRPr lang="ru-RU" sz="3200" dirty="0" smtClean="0"/>
@@ -14100,15 +13776,11 @@
               <a:rPr lang="ru-RU" sz="3200" dirty="0" smtClean="0"/>
               <a:t>.</a:t>
             </a:r>
+            <a:endParaRPr lang="ru-RU" sz="3200" dirty="0" smtClean="0"/>
           </a:p>
         </p:txBody>
       </p:sp>
     </p:spTree>
-    <p:extLst>
-      <p:ext uri="{BB962C8B-B14F-4D97-AF65-F5344CB8AC3E}">
-        <p14:creationId xmlns:p14="http://schemas.microsoft.com/office/powerpoint/2010/main" val="3548858982"/>
-      </p:ext>
-    </p:extLst>
   </p:cSld>
   <p:clrMapOvr>
     <a:masterClrMapping/>
@@ -14236,6 +13908,7 @@
               <a:rPr lang="ru-RU" sz="3200" dirty="0" smtClean="0"/>
               <a:t>.</a:t>
             </a:r>
+            <a:endParaRPr lang="ru-RU" sz="3200" dirty="0" smtClean="0"/>
           </a:p>
           <a:p>
             <a:endParaRPr lang="ru-RU" sz="3200" dirty="0"/>
@@ -14273,11 +13946,6 @@
         </p:txBody>
       </p:sp>
     </p:spTree>
-    <p:extLst>
-      <p:ext uri="{BB962C8B-B14F-4D97-AF65-F5344CB8AC3E}">
-        <p14:creationId xmlns:p14="http://schemas.microsoft.com/office/powerpoint/2010/main" val="68445599"/>
-      </p:ext>
-    </p:extLst>
   </p:cSld>
   <p:clrMapOvr>
     <a:masterClrMapping/>
@@ -14361,7 +14029,7 @@
           </p:nvPr>
         </p:nvPicPr>
         <p:blipFill>
-          <a:blip r:embed="rId2" cstate="print">
+          <a:blip r:embed="rId1" cstate="print">
             <a:extLst>
               <a:ext uri="{28A0092B-C50C-407E-A947-70E740481C1C}">
                 <a14:useLocalDpi xmlns:a14="http://schemas.microsoft.com/office/drawing/2010/main" val="0"/>
@@ -14393,7 +14061,7 @@
           <p:nvPr/>
         </p:nvPicPr>
         <p:blipFill>
-          <a:blip r:embed="rId3" cstate="print">
+          <a:blip r:embed="rId2" cstate="print">
             <a:extLst>
               <a:ext uri="{28A0092B-C50C-407E-A947-70E740481C1C}">
                 <a14:useLocalDpi xmlns:a14="http://schemas.microsoft.com/office/drawing/2010/main" val="0"/>
@@ -14428,7 +14096,7 @@
           <p:nvPr/>
         </p:nvPicPr>
         <p:blipFill>
-          <a:blip r:embed="rId4" cstate="print">
+          <a:blip r:embed="rId3" cstate="print">
             <a:extLst>
               <a:ext uri="{28A0092B-C50C-407E-A947-70E740481C1C}">
                 <a14:useLocalDpi xmlns:a14="http://schemas.microsoft.com/office/drawing/2010/main" val="0"/>
@@ -14455,11 +14123,6 @@
         </p:spPr>
       </p:pic>
     </p:spTree>
-    <p:extLst>
-      <p:ext uri="{BB962C8B-B14F-4D97-AF65-F5344CB8AC3E}">
-        <p14:creationId xmlns:p14="http://schemas.microsoft.com/office/powerpoint/2010/main" val="230325101"/>
-      </p:ext>
-    </p:extLst>
   </p:cSld>
   <p:clrMapOvr>
     <a:masterClrMapping/>
@@ -14603,15 +14266,11 @@
               <a:rPr lang="ru-RU" sz="3200" dirty="0" smtClean="0"/>
               <a:t>Браузеры игнорируют текст комментариев при рендеринге документа.</a:t>
             </a:r>
+            <a:endParaRPr lang="ru-RU" sz="3200" dirty="0" smtClean="0"/>
           </a:p>
         </p:txBody>
       </p:sp>
     </p:spTree>
-    <p:extLst>
-      <p:ext uri="{BB962C8B-B14F-4D97-AF65-F5344CB8AC3E}">
-        <p14:creationId xmlns:p14="http://schemas.microsoft.com/office/powerpoint/2010/main" val="3671046274"/>
-      </p:ext>
-    </p:extLst>
   </p:cSld>
   <p:clrMapOvr>
     <a:masterClrMapping/>
@@ -14712,6 +14371,7 @@
               <a:rPr lang="ru-RU" sz="3200" dirty="0" smtClean="0"/>
               <a:t>документа специальными последовательностями.</a:t>
             </a:r>
+            <a:endParaRPr lang="ru-RU" sz="3200" dirty="0" smtClean="0"/>
           </a:p>
           <a:p>
             <a:endParaRPr lang="ru-RU" sz="3200" dirty="0" smtClean="0"/>
@@ -14721,6 +14381,7 @@
               <a:rPr lang="ru-RU" sz="3200" dirty="0" smtClean="0"/>
               <a:t>Причины две:</a:t>
             </a:r>
+            <a:endParaRPr lang="ru-RU" sz="3200" dirty="0" smtClean="0"/>
           </a:p>
           <a:p>
             <a:r>
@@ -14747,6 +14408,7 @@
               <a:rPr lang="en-US" sz="3200" dirty="0" smtClean="0"/>
               <a:t>").</a:t>
             </a:r>
+            <a:endParaRPr lang="en-US" sz="3200" dirty="0" smtClean="0"/>
           </a:p>
           <a:p>
             <a:r>
@@ -14757,15 +14419,11 @@
               <a:rPr lang="ru-RU" sz="3200" dirty="0" smtClean="0"/>
               <a:t> Эти символы отсутствуют на английской клавиатуре.</a:t>
             </a:r>
+            <a:endParaRPr lang="ru-RU" sz="3200" dirty="0" smtClean="0"/>
           </a:p>
         </p:txBody>
       </p:sp>
     </p:spTree>
-    <p:extLst>
-      <p:ext uri="{BB962C8B-B14F-4D97-AF65-F5344CB8AC3E}">
-        <p14:creationId xmlns:p14="http://schemas.microsoft.com/office/powerpoint/2010/main" val="3260822952"/>
-      </p:ext>
-    </p:extLst>
   </p:cSld>
   <p:clrMapOvr>
     <a:masterClrMapping/>
@@ -14855,6 +14513,7 @@
               <a:rPr lang="ru-RU" sz="3200" dirty="0" smtClean="0"/>
               <a:t>Спец. последовательности имеют такой вид:</a:t>
             </a:r>
+            <a:endParaRPr lang="ru-RU" sz="3200" dirty="0" smtClean="0"/>
           </a:p>
           <a:p>
             <a:pPr>
@@ -14892,6 +14551,13 @@
               </a:rPr>
               <a:t>;</a:t>
             </a:r>
+            <a:endParaRPr lang="ru-RU" sz="3200" dirty="0" smtClean="0">
+              <a:solidFill>
+                <a:srgbClr val="FF0000"/>
+              </a:solidFill>
+              <a:latin typeface="Consolas" panose="020B0609020204030204" pitchFamily="49" charset="0"/>
+              <a:cs typeface="Consolas" panose="020B0609020204030204" pitchFamily="49" charset="0"/>
+            </a:endParaRPr>
           </a:p>
           <a:p>
             <a:pPr>
@@ -14903,6 +14569,7 @@
               <a:rPr lang="ru-RU" sz="3200" dirty="0" smtClean="0"/>
               <a:t>или</a:t>
             </a:r>
+            <a:endParaRPr lang="ru-RU" sz="3200" dirty="0" smtClean="0"/>
           </a:p>
           <a:p>
             <a:pPr>
@@ -14940,6 +14607,13 @@
               </a:rPr>
               <a:t>;</a:t>
             </a:r>
+            <a:endParaRPr lang="ru-RU" sz="3200" dirty="0">
+              <a:solidFill>
+                <a:srgbClr val="FF0000"/>
+              </a:solidFill>
+              <a:latin typeface="Consolas" panose="020B0609020204030204" pitchFamily="49" charset="0"/>
+              <a:cs typeface="Consolas" panose="020B0609020204030204" pitchFamily="49" charset="0"/>
+            </a:endParaRPr>
           </a:p>
           <a:p>
             <a:pPr>
@@ -15013,15 +14687,11 @@
               <a:rPr lang="ru-RU" sz="3200" dirty="0" smtClean="0"/>
               <a:t>и записывается как шестнадцатеричное число.</a:t>
             </a:r>
+            <a:endParaRPr lang="ru-RU" sz="3200" dirty="0" smtClean="0"/>
           </a:p>
         </p:txBody>
       </p:sp>
     </p:spTree>
-    <p:extLst>
-      <p:ext uri="{BB962C8B-B14F-4D97-AF65-F5344CB8AC3E}">
-        <p14:creationId xmlns:p14="http://schemas.microsoft.com/office/powerpoint/2010/main" val="453540407"/>
-      </p:ext>
-    </p:extLst>
   </p:cSld>
   <p:clrMapOvr>
     <a:masterClrMapping/>
@@ -15155,6 +14825,7 @@
               <a:rPr lang="ru-RU" sz="3200" dirty="0" smtClean="0"/>
               <a:t>		неразрывный пробел</a:t>
             </a:r>
+            <a:endParaRPr lang="ru-RU" sz="3200" dirty="0" smtClean="0"/>
           </a:p>
           <a:p>
             <a:pPr lvl="0" fontAlgn="ctr">
@@ -15383,6 +15054,7 @@
               <a:rPr lang="en-US" sz="3200" dirty="0" smtClean="0"/>
               <a:t>&gt;</a:t>
             </a:r>
+            <a:endParaRPr lang="en-US" sz="3200" dirty="0" smtClean="0"/>
           </a:p>
           <a:p>
             <a:pPr fontAlgn="ctr"/>
@@ -15539,11 +15211,6 @@
         </p:txBody>
       </p:sp>
     </p:spTree>
-    <p:extLst>
-      <p:ext uri="{BB962C8B-B14F-4D97-AF65-F5344CB8AC3E}">
-        <p14:creationId xmlns:p14="http://schemas.microsoft.com/office/powerpoint/2010/main" val="1861686903"/>
-      </p:ext>
-    </p:extLst>
   </p:cSld>
   <p:clrMapOvr>
     <a:masterClrMapping/>
@@ -15606,6 +15273,7 @@
               <a:rPr lang="en-US" dirty="0"/>
               <a:t>XML</a:t>
             </a:r>
+            <a:endParaRPr lang="en-US" dirty="0"/>
           </a:p>
         </p:txBody>
       </p:sp>
@@ -15646,6 +15314,7 @@
               <a:rPr lang="ru-RU" sz="3200" dirty="0" smtClean="0"/>
               <a:t> существует определённое сходство:</a:t>
             </a:r>
+            <a:endParaRPr lang="ru-RU" sz="3200" dirty="0" smtClean="0"/>
           </a:p>
           <a:p>
             <a:r>
@@ -15668,6 +15337,7 @@
               <a:rPr lang="ru-RU" sz="3200" dirty="0" smtClean="0"/>
               <a:t>.</a:t>
             </a:r>
+            <a:endParaRPr lang="ru-RU" sz="3200" dirty="0" smtClean="0"/>
           </a:p>
           <a:p>
             <a:r>
@@ -15690,6 +15360,7 @@
               <a:rPr lang="ru-RU" sz="3200" dirty="0" smtClean="0"/>
               <a:t>.</a:t>
             </a:r>
+            <a:endParaRPr lang="ru-RU" sz="3200" dirty="0" smtClean="0"/>
           </a:p>
           <a:p>
             <a:r>
@@ -15712,6 +15383,7 @@
               <a:rPr lang="ru-RU" sz="3200" dirty="0" smtClean="0"/>
               <a:t>.</a:t>
             </a:r>
+            <a:endParaRPr lang="ru-RU" sz="3200" dirty="0" smtClean="0"/>
           </a:p>
           <a:p>
             <a:r>
@@ -15743,11 +15415,6 @@
         </p:txBody>
       </p:sp>
     </p:spTree>
-    <p:extLst>
-      <p:ext uri="{BB962C8B-B14F-4D97-AF65-F5344CB8AC3E}">
-        <p14:creationId xmlns:p14="http://schemas.microsoft.com/office/powerpoint/2010/main" val="1870144555"/>
-      </p:ext>
-    </p:extLst>
   </p:cSld>
   <p:clrMapOvr>
     <a:masterClrMapping/>
@@ -15882,6 +15549,7 @@
               <a:rPr lang="ru-RU" sz="3200" dirty="0" smtClean="0"/>
               <a:t> нет</a:t>
             </a:r>
+            <a:endParaRPr lang="ru-RU" sz="3200" dirty="0" smtClean="0"/>
           </a:p>
           <a:p>
             <a:pPr>
@@ -15908,6 +15576,7 @@
               <a:rPr lang="ru-RU" sz="3200" dirty="0" smtClean="0"/>
               <a:t>существуют теги, которые не нужно закрывать</a:t>
             </a:r>
+            <a:endParaRPr lang="ru-RU" sz="3200" dirty="0" smtClean="0"/>
           </a:p>
           <a:p>
             <a:pPr>
@@ -15970,15 +15639,11 @@
               <a:rPr lang="ru-RU" sz="3200" dirty="0"/>
               <a:t>(указывается только имя)</a:t>
             </a:r>
+            <a:endParaRPr lang="ru-RU" sz="3200" dirty="0"/>
           </a:p>
         </p:txBody>
       </p:sp>
     </p:spTree>
-    <p:extLst>
-      <p:ext uri="{BB962C8B-B14F-4D97-AF65-F5344CB8AC3E}">
-        <p14:creationId xmlns:p14="http://schemas.microsoft.com/office/powerpoint/2010/main" val="2923087522"/>
-      </p:ext>
-    </p:extLst>
   </p:cSld>
   <p:clrMapOvr>
     <a:masterClrMapping/>
@@ -16029,6 +15694,7 @@
               <a:rPr lang="en-US" dirty="0"/>
               <a:t>XHTML</a:t>
             </a:r>
+            <a:endParaRPr lang="en-US" dirty="0"/>
           </a:p>
         </p:txBody>
       </p:sp>
@@ -16315,11 +15981,6 @@
         </p:txBody>
       </p:sp>
     </p:spTree>
-    <p:extLst>
-      <p:ext uri="{BB962C8B-B14F-4D97-AF65-F5344CB8AC3E}">
-        <p14:creationId xmlns:p14="http://schemas.microsoft.com/office/powerpoint/2010/main" val="2117428432"/>
-      </p:ext>
-    </p:extLst>
   </p:cSld>
   <p:clrMapOvr>
     <a:masterClrMapping/>
@@ -16444,6 +16105,7 @@
               <a:rPr lang="ru-RU" sz="3200" dirty="0" smtClean="0"/>
               <a:t>эффекта).</a:t>
             </a:r>
+            <a:endParaRPr lang="ru-RU" sz="3200" dirty="0" smtClean="0"/>
           </a:p>
           <a:p>
             <a:endParaRPr lang="ru-RU" sz="1600" dirty="0" smtClean="0"/>
@@ -16577,15 +16239,11 @@
               <a:rPr lang="ru-RU" sz="3200" dirty="0" smtClean="0"/>
               <a:t>.</a:t>
             </a:r>
+            <a:endParaRPr lang="ru-RU" sz="3200" dirty="0" smtClean="0"/>
           </a:p>
         </p:txBody>
       </p:sp>
     </p:spTree>
-    <p:extLst>
-      <p:ext uri="{BB962C8B-B14F-4D97-AF65-F5344CB8AC3E}">
-        <p14:creationId xmlns:p14="http://schemas.microsoft.com/office/powerpoint/2010/main" val="1148319044"/>
-      </p:ext>
-    </p:extLst>
   </p:cSld>
   <p:clrMapOvr>
     <a:masterClrMapping/>
@@ -16702,6 +16360,13 @@
               </a:rPr>
               <a:t>"</a:t>
             </a:r>
+            <a:endParaRPr lang="en-US" sz="2800" dirty="0" smtClean="0">
+              <a:solidFill>
+                <a:srgbClr val="0000FF"/>
+              </a:solidFill>
+              <a:latin typeface="Consolas" panose="020B0609020204030204" pitchFamily="49" charset="0"/>
+              <a:cs typeface="Consolas" panose="020B0609020204030204" pitchFamily="49" charset="0"/>
+            </a:endParaRPr>
           </a:p>
           <a:p>
             <a:pPr lvl="0">
@@ -17075,11 +16740,6 @@
         </p:txBody>
       </p:sp>
     </p:spTree>
-    <p:extLst>
-      <p:ext uri="{BB962C8B-B14F-4D97-AF65-F5344CB8AC3E}">
-        <p14:creationId xmlns:p14="http://schemas.microsoft.com/office/powerpoint/2010/main" val="3565090181"/>
-      </p:ext>
-    </p:extLst>
   </p:cSld>
   <p:clrMapOvr>
     <a:masterClrMapping/>
@@ -17250,6 +16910,7 @@
               <a:rPr lang="ru-RU" sz="3200" dirty="0" smtClean="0"/>
               <a:t>.</a:t>
             </a:r>
+            <a:endParaRPr lang="ru-RU" sz="3200" dirty="0" smtClean="0"/>
           </a:p>
           <a:p>
             <a:r>
@@ -17532,11 +17193,6 @@
         </p:txBody>
       </p:sp>
     </p:spTree>
-    <p:extLst>
-      <p:ext uri="{BB962C8B-B14F-4D97-AF65-F5344CB8AC3E}">
-        <p14:creationId xmlns:p14="http://schemas.microsoft.com/office/powerpoint/2010/main" val="2498222473"/>
-      </p:ext>
-    </p:extLst>
   </p:cSld>
   <p:clrMapOvr>
     <a:masterClrMapping/>
@@ -17579,7 +17235,7 @@
           </p:nvPr>
         </p:nvPicPr>
         <p:blipFill>
-          <a:blip r:embed="rId2">
+          <a:blip r:embed="rId1">
             <a:extLst>
               <a:ext uri="{28A0092B-C50C-407E-A947-70E740481C1C}">
                 <a14:useLocalDpi xmlns:a14="http://schemas.microsoft.com/office/drawing/2010/main" val="0"/>
@@ -17648,7 +17304,7 @@
           <p:nvPr/>
         </p:nvPicPr>
         <p:blipFill>
-          <a:blip r:embed="rId3">
+          <a:blip r:embed="rId2">
             <a:extLst>
               <a:ext uri="{28A0092B-C50C-407E-A947-70E740481C1C}">
                 <a14:useLocalDpi xmlns:a14="http://schemas.microsoft.com/office/drawing/2010/main" val="0"/>
@@ -17683,7 +17339,7 @@
           <p:nvPr/>
         </p:nvPicPr>
         <p:blipFill>
-          <a:blip r:embed="rId4" cstate="print">
+          <a:blip r:embed="rId3" cstate="print">
             <a:extLst>
               <a:ext uri="{28A0092B-C50C-407E-A947-70E740481C1C}">
                 <a14:useLocalDpi xmlns:a14="http://schemas.microsoft.com/office/drawing/2010/main" val="0"/>
@@ -17718,7 +17374,7 @@
           <p:nvPr/>
         </p:nvPicPr>
         <p:blipFill>
-          <a:blip r:embed="rId5" cstate="print">
+          <a:blip r:embed="rId4" cstate="print">
             <a:extLst>
               <a:ext uri="{28A0092B-C50C-407E-A947-70E740481C1C}">
                 <a14:useLocalDpi xmlns:a14="http://schemas.microsoft.com/office/drawing/2010/main" val="0"/>
@@ -17745,11 +17401,6 @@
         </p:spPr>
       </p:pic>
     </p:spTree>
-    <p:extLst>
-      <p:ext uri="{BB962C8B-B14F-4D97-AF65-F5344CB8AC3E}">
-        <p14:creationId xmlns:p14="http://schemas.microsoft.com/office/powerpoint/2010/main" val="3852519620"/>
-      </p:ext>
-    </p:extLst>
   </p:cSld>
   <p:clrMapOvr>
     <a:masterClrMapping/>
@@ -17898,6 +17549,7 @@
               <a:rPr lang="ru-RU" sz="3200" dirty="0" smtClean="0"/>
               <a:t>).</a:t>
             </a:r>
+            <a:endParaRPr lang="ru-RU" sz="3200" dirty="0" smtClean="0"/>
           </a:p>
           <a:p>
             <a:endParaRPr lang="ru-RU" sz="3200" dirty="0"/>
@@ -18076,11 +17728,6 @@
         </p:txBody>
       </p:sp>
     </p:spTree>
-    <p:extLst>
-      <p:ext uri="{BB962C8B-B14F-4D97-AF65-F5344CB8AC3E}">
-        <p14:creationId xmlns:p14="http://schemas.microsoft.com/office/powerpoint/2010/main" val="2260160102"/>
-      </p:ext>
-    </p:extLst>
   </p:cSld>
   <p:clrMapOvr>
     <a:masterClrMapping/>
@@ -18360,11 +18007,6 @@
         </p:txBody>
       </p:sp>
     </p:spTree>
-    <p:extLst>
-      <p:ext uri="{BB962C8B-B14F-4D97-AF65-F5344CB8AC3E}">
-        <p14:creationId xmlns:p14="http://schemas.microsoft.com/office/powerpoint/2010/main" val="814115706"/>
-      </p:ext>
-    </p:extLst>
   </p:cSld>
   <p:clrMapOvr>
     <a:masterClrMapping/>
@@ -18513,6 +18155,7 @@
               <a:rPr lang="ru-RU" sz="3200" dirty="0" smtClean="0"/>
               <a:t>). Значением должен быть или единственный символ (цифра, латинская буква) или одиночные символы, записанные через пробел.</a:t>
             </a:r>
+            <a:endParaRPr lang="ru-RU" sz="3200" dirty="0" smtClean="0"/>
           </a:p>
           <a:p>
             <a:endParaRPr lang="ru-RU" sz="2800" dirty="0" smtClean="0">
@@ -18659,11 +18302,6 @@
         </p:txBody>
       </p:sp>
     </p:spTree>
-    <p:extLst>
-      <p:ext uri="{BB962C8B-B14F-4D97-AF65-F5344CB8AC3E}">
-        <p14:creationId xmlns:p14="http://schemas.microsoft.com/office/powerpoint/2010/main" val="1864383160"/>
-      </p:ext>
-    </p:extLst>
   </p:cSld>
   <p:clrMapOvr>
     <a:masterClrMapping/>
@@ -19001,11 +18639,6 @@
         </p:style>
       </p:cxnSp>
     </p:spTree>
-    <p:extLst>
-      <p:ext uri="{BB962C8B-B14F-4D97-AF65-F5344CB8AC3E}">
-        <p14:creationId xmlns:p14="http://schemas.microsoft.com/office/powerpoint/2010/main" val="3584728010"/>
-      </p:ext>
-    </p:extLst>
   </p:cSld>
   <p:clrMapOvr>
     <a:masterClrMapping/>
@@ -19434,14 +19067,14 @@
           <p:nvPr/>
         </p:nvPicPr>
         <p:blipFill>
-          <a:blip r:embed="rId3"/>
+          <a:blip r:embed="rId1"/>
           <a:stretch>
             <a:fillRect/>
           </a:stretch>
         </p:blipFill>
         <p:spPr>
           <a:xfrm>
-            <a:off x="1088488" y="4202219"/>
+            <a:off x="6329143" y="4547024"/>
             <a:ext cx="4572000" cy="1666875"/>
           </a:xfrm>
           <a:prstGeom prst="rect">
@@ -19450,11 +19083,6 @@
         </p:spPr>
       </p:pic>
     </p:spTree>
-    <p:extLst>
-      <p:ext uri="{BB962C8B-B14F-4D97-AF65-F5344CB8AC3E}">
-        <p14:creationId xmlns:p14="http://schemas.microsoft.com/office/powerpoint/2010/main" val="1402500544"/>
-      </p:ext>
-    </p:extLst>
   </p:cSld>
   <p:clrMapOvr>
     <a:masterClrMapping/>
@@ -19628,6 +19256,14 @@
               </a:rPr>
               <a:t>.</a:t>
             </a:r>
+            <a:endParaRPr lang="ru-RU" sz="3200" dirty="0">
+              <a:solidFill>
+                <a:prstClr val="black">
+                  <a:lumMod val="75000"/>
+                  <a:lumOff val="25000"/>
+                </a:prstClr>
+              </a:solidFill>
+            </a:endParaRPr>
           </a:p>
           <a:p>
             <a:endParaRPr lang="ru-RU" sz="2800" dirty="0" smtClean="0">
@@ -19828,11 +19464,6 @@
         </p:style>
       </p:cxnSp>
     </p:spTree>
-    <p:extLst>
-      <p:ext uri="{BB962C8B-B14F-4D97-AF65-F5344CB8AC3E}">
-        <p14:creationId xmlns:p14="http://schemas.microsoft.com/office/powerpoint/2010/main" val="373669212"/>
-      </p:ext>
-    </p:extLst>
   </p:cSld>
   <p:clrMapOvr>
     <a:masterClrMapping/>
@@ -19895,6 +19526,7 @@
               <a:rPr lang="en-US" dirty="0"/>
               <a:t>HTML5)</a:t>
             </a:r>
+            <a:endParaRPr lang="en-US" dirty="0"/>
           </a:p>
         </p:txBody>
       </p:sp>
@@ -20121,11 +19753,6 @@
         </p:style>
       </p:cxnSp>
     </p:spTree>
-    <p:extLst>
-      <p:ext uri="{BB962C8B-B14F-4D97-AF65-F5344CB8AC3E}">
-        <p14:creationId xmlns:p14="http://schemas.microsoft.com/office/powerpoint/2010/main" val="4101419077"/>
-      </p:ext>
-    </p:extLst>
   </p:cSld>
   <p:clrMapOvr>
     <a:masterClrMapping/>
@@ -20188,6 +19815,7 @@
               <a:rPr lang="en-US" dirty="0"/>
               <a:t>HTML5)</a:t>
             </a:r>
+            <a:endParaRPr lang="en-US" dirty="0"/>
           </a:p>
         </p:txBody>
       </p:sp>
@@ -20303,6 +19931,7 @@
               <a:rPr lang="ru-RU" sz="3200" dirty="0" smtClean="0"/>
               <a:t>или использовать атрибут как логический.</a:t>
             </a:r>
+            <a:endParaRPr lang="ru-RU" sz="3200" dirty="0" smtClean="0"/>
           </a:p>
           <a:p>
             <a:endParaRPr lang="ru-RU" sz="3200" dirty="0" smtClean="0"/>
@@ -20459,11 +20088,6 @@
         </p:style>
       </p:cxnSp>
     </p:spTree>
-    <p:extLst>
-      <p:ext uri="{BB962C8B-B14F-4D97-AF65-F5344CB8AC3E}">
-        <p14:creationId xmlns:p14="http://schemas.microsoft.com/office/powerpoint/2010/main" val="1893136747"/>
-      </p:ext>
-    </p:extLst>
   </p:cSld>
   <p:clrMapOvr>
     <a:masterClrMapping/>
@@ -20526,6 +20150,7 @@
               <a:rPr lang="en-US" dirty="0"/>
               <a:t>HTML5)</a:t>
             </a:r>
+            <a:endParaRPr lang="en-US" dirty="0"/>
           </a:p>
         </p:txBody>
       </p:sp>
@@ -20603,6 +20228,7 @@
               <a:rPr lang="en-US" sz="3200" dirty="0" smtClean="0"/>
               <a:t>.</a:t>
             </a:r>
+            <a:endParaRPr lang="en-US" sz="3200" dirty="0" smtClean="0"/>
           </a:p>
           <a:p>
             <a:r>
@@ -20714,11 +20340,6 @@
         </p:style>
       </p:cxnSp>
     </p:spTree>
-    <p:extLst>
-      <p:ext uri="{BB962C8B-B14F-4D97-AF65-F5344CB8AC3E}">
-        <p14:creationId xmlns:p14="http://schemas.microsoft.com/office/powerpoint/2010/main" val="1355364033"/>
-      </p:ext>
-    </p:extLst>
   </p:cSld>
   <p:clrMapOvr>
     <a:masterClrMapping/>
@@ -20781,6 +20402,7 @@
               <a:rPr lang="en-US" dirty="0"/>
               <a:t>HTML5)</a:t>
             </a:r>
+            <a:endParaRPr lang="en-US" dirty="0"/>
           </a:p>
         </p:txBody>
       </p:sp>
@@ -20841,6 +20463,13 @@
               </a:rPr>
               <a:t>"</a:t>
             </a:r>
+            <a:endParaRPr lang="en-US" sz="2800" dirty="0" smtClean="0">
+              <a:solidFill>
+                <a:srgbClr val="0000FF"/>
+              </a:solidFill>
+              <a:latin typeface="Consolas" panose="020B0609020204030204" pitchFamily="49" charset="0"/>
+              <a:cs typeface="Consolas" panose="020B0609020204030204" pitchFamily="49" charset="0"/>
+            </a:endParaRPr>
           </a:p>
           <a:p>
             <a:r>
@@ -20875,6 +20504,7 @@
               <a:rPr lang="ru-RU" sz="3200" dirty="0" smtClean="0"/>
               <a:t>).</a:t>
             </a:r>
+            <a:endParaRPr lang="ru-RU" sz="3200" dirty="0" smtClean="0"/>
           </a:p>
           <a:p>
             <a:endParaRPr lang="ru-RU" sz="3200" dirty="0"/>
@@ -20912,11 +20542,6 @@
         </p:style>
       </p:cxnSp>
     </p:spTree>
-    <p:extLst>
-      <p:ext uri="{BB962C8B-B14F-4D97-AF65-F5344CB8AC3E}">
-        <p14:creationId xmlns:p14="http://schemas.microsoft.com/office/powerpoint/2010/main" val="1792539190"/>
-      </p:ext>
-    </p:extLst>
   </p:cSld>
   <p:clrMapOvr>
     <a:masterClrMapping/>
@@ -21000,13 +20625,13 @@
             </a:pPr>
             <a:r>
               <a:rPr lang="en-US" sz="3200" dirty="0">
-                <a:hlinkClick r:id="rId3"/>
+                <a:hlinkClick r:id="rId1"/>
               </a:rPr>
               <a:t>http://webref.ru</a:t>
             </a:r>
             <a:r>
               <a:rPr lang="en-US" sz="3200" dirty="0" smtClean="0">
-                <a:hlinkClick r:id="rId3"/>
+                <a:hlinkClick r:id="rId1"/>
               </a:rPr>
               <a:t>/</a:t>
             </a:r>
@@ -21034,19 +20659,19 @@
             </a:pPr>
             <a:r>
               <a:rPr lang="en-US" sz="3200" dirty="0">
-                <a:hlinkClick r:id="rId4"/>
+                <a:hlinkClick r:id="rId2"/>
               </a:rPr>
               <a:t>http://caniuse.com</a:t>
             </a:r>
             <a:r>
               <a:rPr lang="en-US" sz="3200" dirty="0" smtClean="0">
-                <a:hlinkClick r:id="rId4"/>
+                <a:hlinkClick r:id="rId2"/>
               </a:rPr>
               <a:t>/</a:t>
             </a:r>
             <a:r>
               <a:rPr lang="ru-RU" sz="3200" dirty="0" smtClean="0">
-                <a:hlinkClick r:id="rId4"/>
+                <a:hlinkClick r:id="rId2"/>
               </a:rPr>
               <a:t> </a:t>
             </a:r>
@@ -21054,6 +20679,7 @@
               <a:rPr lang="ru-RU" sz="3200" dirty="0" smtClean="0"/>
               <a:t>– доступность возможностей</a:t>
             </a:r>
+            <a:endParaRPr lang="ru-RU" sz="3200" dirty="0" smtClean="0"/>
           </a:p>
           <a:p>
             <a:pPr marL="514350" indent="-514350">
@@ -21061,13 +20687,13 @@
             </a:pPr>
             <a:r>
               <a:rPr lang="en-US" sz="3200" dirty="0">
-                <a:hlinkClick r:id="rId5"/>
+                <a:hlinkClick r:id="rId3"/>
               </a:rPr>
               <a:t>https://</a:t>
             </a:r>
             <a:r>
               <a:rPr lang="en-US" sz="3200" dirty="0" smtClean="0">
-                <a:hlinkClick r:id="rId5"/>
+                <a:hlinkClick r:id="rId3"/>
               </a:rPr>
               <a:t>developer.mozilla.org/en-US/docs/Web/Guide</a:t>
             </a:r>
@@ -21087,6 +20713,7 @@
               <a:rPr lang="en-US" sz="3200" dirty="0" smtClean="0"/>
               <a:t>Mozilla</a:t>
             </a:r>
+            <a:endParaRPr lang="en-US" sz="3200" dirty="0" smtClean="0"/>
           </a:p>
           <a:p>
             <a:pPr marL="514350" indent="-514350">
@@ -21095,13 +20722,13 @@
             </a:pPr>
             <a:r>
               <a:rPr lang="en-US" sz="3200" dirty="0">
-                <a:hlinkClick r:id="rId6"/>
+                <a:hlinkClick r:id="rId4"/>
               </a:rPr>
               <a:t>https://developers.whatwg.org</a:t>
             </a:r>
             <a:r>
               <a:rPr lang="en-US" sz="3200" dirty="0" smtClean="0">
-                <a:hlinkClick r:id="rId6"/>
+                <a:hlinkClick r:id="rId4"/>
               </a:rPr>
               <a:t>/</a:t>
             </a:r>
@@ -21133,13 +20760,13 @@
             </a:pPr>
             <a:r>
               <a:rPr lang="en-US" sz="3200" dirty="0">
-                <a:hlinkClick r:id="rId7"/>
+                <a:hlinkClick r:id="rId5"/>
               </a:rPr>
               <a:t>http://</a:t>
             </a:r>
             <a:r>
               <a:rPr lang="en-US" sz="3200" dirty="0" smtClean="0">
-                <a:hlinkClick r:id="rId7"/>
+                <a:hlinkClick r:id="rId5"/>
               </a:rPr>
               <a:t>www.skilledup.com/articles/best-html-books</a:t>
             </a:r>
@@ -21160,11 +20787,6 @@
         </p:txBody>
       </p:sp>
     </p:spTree>
-    <p:extLst>
-      <p:ext uri="{BB962C8B-B14F-4D97-AF65-F5344CB8AC3E}">
-        <p14:creationId xmlns:p14="http://schemas.microsoft.com/office/powerpoint/2010/main" val="525944069"/>
-      </p:ext>
-    </p:extLst>
   </p:cSld>
   <p:clrMapOvr>
     <a:masterClrMapping/>
@@ -21227,6 +20849,7 @@
               <a:rPr lang="en-US" dirty="0"/>
               <a:t>HTML5)</a:t>
             </a:r>
+            <a:endParaRPr lang="en-US" dirty="0"/>
           </a:p>
         </p:txBody>
       </p:sp>
@@ -21292,6 +20915,13 @@
               </a:rPr>
               <a:t>"</a:t>
             </a:r>
+            <a:endParaRPr lang="en-US" sz="2800" dirty="0" smtClean="0">
+              <a:solidFill>
+                <a:srgbClr val="0000FF"/>
+              </a:solidFill>
+              <a:latin typeface="Consolas" panose="020B0609020204030204" pitchFamily="49" charset="0"/>
+              <a:cs typeface="Consolas" panose="020B0609020204030204" pitchFamily="49" charset="0"/>
+            </a:endParaRPr>
           </a:p>
           <a:p>
             <a:r>
@@ -21332,6 +20962,7 @@
               <a:rPr lang="en-US" sz="3200" dirty="0" smtClean="0"/>
               <a:t>JavaScript.</a:t>
             </a:r>
+            <a:endParaRPr lang="en-US" sz="3200" dirty="0" smtClean="0"/>
           </a:p>
           <a:p>
             <a:r>
@@ -21342,6 +20973,7 @@
               <a:rPr lang="ru-RU" sz="3200" dirty="0" smtClean="0"/>
               <a:t> атрибута не должно содержать символов в верхнем регистре.</a:t>
             </a:r>
+            <a:endParaRPr lang="ru-RU" sz="3200" dirty="0" smtClean="0"/>
           </a:p>
           <a:p>
             <a:r>
@@ -21478,11 +21110,6 @@
         </p:style>
       </p:cxnSp>
     </p:spTree>
-    <p:extLst>
-      <p:ext uri="{BB962C8B-B14F-4D97-AF65-F5344CB8AC3E}">
-        <p14:creationId xmlns:p14="http://schemas.microsoft.com/office/powerpoint/2010/main" val="1905816404"/>
-      </p:ext>
-    </p:extLst>
   </p:cSld>
   <p:clrMapOvr>
     <a:masterClrMapping/>
@@ -21553,11 +21180,6 @@
           </p:cNvGraphicFramePr>
           <p:nvPr>
             <p:ph idx="1"/>
-            <p:extLst>
-              <p:ext uri="{D42A27DB-BD31-4B8C-83A1-F6EECF244321}">
-                <p14:modId xmlns:p14="http://schemas.microsoft.com/office/powerpoint/2010/main" val="2002383107"/>
-              </p:ext>
-            </p:extLst>
           </p:nvPr>
         </p:nvGraphicFramePr>
         <p:xfrm>
@@ -21571,20 +21193,8 @@
                 <a:tableStyleId>{5940675A-B579-460E-94D1-54222C63F5DA}</a:tableStyleId>
               </a:tblPr>
               <a:tblGrid>
-                <a:gridCol w="5029200">
-                  <a:extLst>
-                    <a:ext uri="{9D8B030D-6E8A-4147-A177-3AD203B41FA5}">
-                      <a16:colId xmlns="" xmlns:a16="http://schemas.microsoft.com/office/drawing/2014/main" val="20000"/>
-                    </a:ext>
-                  </a:extLst>
-                </a:gridCol>
-                <a:gridCol w="5029200">
-                  <a:extLst>
-                    <a:ext uri="{9D8B030D-6E8A-4147-A177-3AD203B41FA5}">
-                      <a16:colId xmlns="" xmlns:a16="http://schemas.microsoft.com/office/drawing/2014/main" val="20001"/>
-                    </a:ext>
-                  </a:extLst>
-                </a:gridCol>
+                <a:gridCol w="5029200"/>
+                <a:gridCol w="5029200"/>
               </a:tblGrid>
               <a:tr h="370840">
                 <a:tc>
@@ -21657,11 +21267,6 @@
                   </a:txBody>
                   <a:tcPr anchor="ctr"/>
                 </a:tc>
-                <a:extLst>
-                  <a:ext uri="{0D108BD9-81ED-4DB2-BD59-A6C34878D82A}">
-                    <a16:rowId xmlns="" xmlns:a16="http://schemas.microsoft.com/office/drawing/2014/main" val="10000"/>
-                  </a:ext>
-                </a:extLst>
               </a:tr>
               <a:tr h="370840">
                 <a:tc>
@@ -21718,7 +21323,6 @@
                         <a:buSzTx/>
                         <a:buFontTx/>
                         <a:buNone/>
-                        <a:tabLst/>
                         <a:defRPr/>
                       </a:pPr>
                       <a:r>
@@ -21735,6 +21339,17 @@
                         </a:rPr>
                         <a:t>spellcheck</a:t>
                       </a:r>
+                      <a:endParaRPr lang="en-US" sz="3200" kern="1200" spc="-50" baseline="0" dirty="0" smtClean="0">
+                        <a:solidFill>
+                          <a:schemeClr val="tx1">
+                            <a:lumMod val="75000"/>
+                            <a:lumOff val="25000"/>
+                          </a:schemeClr>
+                        </a:solidFill>
+                        <a:latin typeface="+mj-lt"/>
+                        <a:ea typeface="+mj-ea"/>
+                        <a:cs typeface="+mj-cs"/>
+                      </a:endParaRPr>
                     </a:p>
                   </a:txBody>
                   <a:tcPr anchor="ctr">
@@ -21746,11 +21361,6 @@
                     </a:solidFill>
                   </a:tcPr>
                 </a:tc>
-                <a:extLst>
-                  <a:ext uri="{0D108BD9-81ED-4DB2-BD59-A6C34878D82A}">
-                    <a16:rowId xmlns="" xmlns:a16="http://schemas.microsoft.com/office/drawing/2014/main" val="10001"/>
-                  </a:ext>
-                </a:extLst>
               </a:tr>
               <a:tr h="370840">
                 <a:tc>
@@ -21844,11 +21454,6 @@
                   </a:txBody>
                   <a:tcPr anchor="ctr"/>
                 </a:tc>
-                <a:extLst>
-                  <a:ext uri="{0D108BD9-81ED-4DB2-BD59-A6C34878D82A}">
-                    <a16:rowId xmlns="" xmlns:a16="http://schemas.microsoft.com/office/drawing/2014/main" val="10002"/>
-                  </a:ext>
-                </a:extLst>
               </a:tr>
               <a:tr h="370840">
                 <a:tc>
@@ -21921,11 +21526,6 @@
                   </a:txBody>
                   <a:tcPr anchor="ctr"/>
                 </a:tc>
-                <a:extLst>
-                  <a:ext uri="{0D108BD9-81ED-4DB2-BD59-A6C34878D82A}">
-                    <a16:rowId xmlns="" xmlns:a16="http://schemas.microsoft.com/office/drawing/2014/main" val="10003"/>
-                  </a:ext>
-                </a:extLst>
               </a:tr>
               <a:tr h="370840">
                 <a:tc>
@@ -22005,11 +21605,6 @@
                   </a:txBody>
                   <a:tcPr anchor="ctr"/>
                 </a:tc>
-                <a:extLst>
-                  <a:ext uri="{0D108BD9-81ED-4DB2-BD59-A6C34878D82A}">
-                    <a16:rowId xmlns="" xmlns:a16="http://schemas.microsoft.com/office/drawing/2014/main" val="10004"/>
-                  </a:ext>
-                </a:extLst>
               </a:tr>
               <a:tr h="370840">
                 <a:tc>
@@ -22031,7 +21626,6 @@
                         <a:buSzTx/>
                         <a:buFontTx/>
                         <a:buNone/>
-                        <a:tabLst/>
                         <a:defRPr/>
                       </a:pPr>
                       <a:r>
@@ -22105,22 +21699,12 @@
                     </a:solidFill>
                   </a:tcPr>
                 </a:tc>
-                <a:extLst>
-                  <a:ext uri="{0D108BD9-81ED-4DB2-BD59-A6C34878D82A}">
-                    <a16:rowId xmlns="" xmlns:a16="http://schemas.microsoft.com/office/drawing/2014/main" val="10005"/>
-                  </a:ext>
-                </a:extLst>
               </a:tr>
             </a:tbl>
           </a:graphicData>
         </a:graphic>
       </p:graphicFrame>
     </p:spTree>
-    <p:extLst>
-      <p:ext uri="{BB962C8B-B14F-4D97-AF65-F5344CB8AC3E}">
-        <p14:creationId xmlns:p14="http://schemas.microsoft.com/office/powerpoint/2010/main" val="957496434"/>
-      </p:ext>
-    </p:extLst>
   </p:cSld>
   <p:clrMapOvr>
     <a:masterClrMapping/>
@@ -22535,15 +22119,11 @@
               <a:rPr lang="en-US" sz="3200" dirty="0" smtClean="0"/>
               <a:t>)</a:t>
             </a:r>
+            <a:endParaRPr lang="en-US" sz="3200" dirty="0" smtClean="0"/>
           </a:p>
         </p:txBody>
       </p:sp>
     </p:spTree>
-    <p:extLst>
-      <p:ext uri="{BB962C8B-B14F-4D97-AF65-F5344CB8AC3E}">
-        <p14:creationId xmlns:p14="http://schemas.microsoft.com/office/powerpoint/2010/main" val="2632377776"/>
-      </p:ext>
-    </p:extLst>
   </p:cSld>
   <p:clrMapOvr>
     <a:masterClrMapping/>
@@ -22625,6 +22205,7 @@
               <a:rPr lang="en-US" sz="3200" dirty="0" smtClean="0"/>
               <a:t>&gt;</a:t>
             </a:r>
+            <a:endParaRPr lang="en-US" sz="3200" dirty="0" smtClean="0"/>
           </a:p>
           <a:p>
             <a:r>
@@ -22651,6 +22232,7 @@
               <a:rPr lang="en-US" sz="3200" dirty="0" smtClean="0"/>
               <a:t>&gt;</a:t>
             </a:r>
+            <a:endParaRPr lang="en-US" sz="3200" dirty="0" smtClean="0"/>
           </a:p>
           <a:p>
             <a:r>
@@ -22681,6 +22263,7 @@
               <a:rPr lang="en-US" sz="3200" dirty="0" smtClean="0"/>
               <a:t>&gt;</a:t>
             </a:r>
+            <a:endParaRPr lang="en-US" sz="3200" dirty="0" smtClean="0"/>
           </a:p>
           <a:p>
             <a:r>
@@ -22707,6 +22290,7 @@
               <a:rPr lang="en-US" sz="3200" dirty="0" smtClean="0"/>
               <a:t>&gt;</a:t>
             </a:r>
+            <a:endParaRPr lang="en-US" sz="3200" dirty="0" smtClean="0"/>
           </a:p>
           <a:p>
             <a:r>
@@ -22760,6 +22344,7 @@
               <a:rPr lang="en-US" sz="3200" dirty="0" smtClean="0"/>
               <a:t>&gt;</a:t>
             </a:r>
+            <a:endParaRPr lang="en-US" sz="3200" dirty="0" smtClean="0"/>
           </a:p>
           <a:p>
             <a:r>
@@ -22827,11 +22412,6 @@
         </p:txBody>
       </p:sp>
     </p:spTree>
-    <p:extLst>
-      <p:ext uri="{BB962C8B-B14F-4D97-AF65-F5344CB8AC3E}">
-        <p14:creationId xmlns:p14="http://schemas.microsoft.com/office/powerpoint/2010/main" val="3237211918"/>
-      </p:ext>
-    </p:extLst>
   </p:cSld>
   <p:clrMapOvr>
     <a:masterClrMapping/>
@@ -22947,6 +22527,12 @@
               </a:rPr>
               <a:t>" &gt;</a:t>
             </a:r>
+            <a:endParaRPr lang="en-US" sz="2200" dirty="0">
+              <a:solidFill>
+                <a:srgbClr val="2E3D4C"/>
+              </a:solidFill>
+              <a:latin typeface="Trebuchet MS" panose="020B0603020202020204" pitchFamily="34" charset="0"/>
+            </a:endParaRPr>
           </a:p>
           <a:p>
             <a:r>
@@ -22958,6 +22544,12 @@
               </a:rPr>
               <a:t>&lt;h1 itemprop="summary"&gt;</a:t>
             </a:r>
+            <a:endParaRPr lang="en-US" sz="2200" dirty="0">
+              <a:solidFill>
+                <a:srgbClr val="2E3D4C"/>
+              </a:solidFill>
+              <a:latin typeface="Trebuchet MS" panose="020B0603020202020204" pitchFamily="34" charset="0"/>
+            </a:endParaRPr>
           </a:p>
           <a:p>
             <a:r>
@@ -22987,6 +22579,12 @@
               </a:rPr>
               <a:t>h1&gt;</a:t>
             </a:r>
+            <a:endParaRPr lang="en-US" sz="2200" dirty="0">
+              <a:solidFill>
+                <a:srgbClr val="2E3D4C"/>
+              </a:solidFill>
+              <a:latin typeface="Trebuchet MS" panose="020B0603020202020204" pitchFamily="34" charset="0"/>
+            </a:endParaRPr>
           </a:p>
           <a:p>
             <a:r>
@@ -22998,6 +22596,12 @@
               </a:rPr>
               <a:t>&lt;p&gt;</a:t>
             </a:r>
+            <a:endParaRPr lang="en-US" sz="2200" dirty="0">
+              <a:solidFill>
+                <a:srgbClr val="2E3D4C"/>
+              </a:solidFill>
+              <a:latin typeface="Trebuchet MS" panose="020B0603020202020204" pitchFamily="34" charset="0"/>
+            </a:endParaRPr>
           </a:p>
           <a:p>
             <a:r>
@@ -23063,6 +22667,12 @@
               </a:rPr>
               <a:t>"&gt;</a:t>
             </a:r>
+            <a:endParaRPr lang="en-US" sz="2200" dirty="0">
+              <a:solidFill>
+                <a:srgbClr val="2E3D4C"/>
+              </a:solidFill>
+              <a:latin typeface="Trebuchet MS" panose="020B0603020202020204" pitchFamily="34" charset="0"/>
+            </a:endParaRPr>
           </a:p>
           <a:p>
             <a:r>
@@ -23110,6 +22720,12 @@
               </a:rPr>
               <a:t>span&gt;</a:t>
             </a:r>
+            <a:endParaRPr lang="en-US" sz="2200" dirty="0">
+              <a:solidFill>
+                <a:srgbClr val="2E3D4C"/>
+              </a:solidFill>
+              <a:latin typeface="Trebuchet MS" panose="020B0603020202020204" pitchFamily="34" charset="0"/>
+            </a:endParaRPr>
           </a:p>
           <a:p>
             <a:r>
@@ -23157,6 +22773,12 @@
               </a:rPr>
               <a:t>="2012-03-14T19:00-08: 00"&gt;</a:t>
             </a:r>
+            <a:endParaRPr lang="en-US" sz="2200" dirty="0">
+              <a:solidFill>
+                <a:srgbClr val="2E3D4C"/>
+              </a:solidFill>
+              <a:latin typeface="Trebuchet MS" panose="020B0603020202020204" pitchFamily="34" charset="0"/>
+            </a:endParaRPr>
           </a:p>
           <a:p>
             <a:r>
@@ -23195,6 +22817,12 @@
               </a:rPr>
               <a:t>г Начало концерта: 19.00</a:t>
             </a:r>
+            <a:endParaRPr lang="ru-RU" sz="2200" dirty="0">
+              <a:solidFill>
+                <a:srgbClr val="2E3D4C"/>
+              </a:solidFill>
+              <a:latin typeface="Trebuchet MS" panose="020B0603020202020204" pitchFamily="34" charset="0"/>
+            </a:endParaRPr>
           </a:p>
           <a:p>
             <a:r>
@@ -23215,6 +22843,12 @@
               </a:rPr>
               <a:t>time&gt;</a:t>
             </a:r>
+            <a:endParaRPr lang="en-US" sz="2200" dirty="0">
+              <a:solidFill>
+                <a:srgbClr val="2E3D4C"/>
+              </a:solidFill>
+              <a:latin typeface="Trebuchet MS" panose="020B0603020202020204" pitchFamily="34" charset="0"/>
+            </a:endParaRPr>
           </a:p>
           <a:p>
             <a:r>
@@ -23226,6 +22860,12 @@
               </a:rPr>
               <a:t>&lt;span itemprop="location"&gt;</a:t>
             </a:r>
+            <a:endParaRPr lang="en-US" sz="2200" dirty="0">
+              <a:solidFill>
+                <a:srgbClr val="2E3D4C"/>
+              </a:solidFill>
+              <a:latin typeface="Trebuchet MS" panose="020B0603020202020204" pitchFamily="34" charset="0"/>
+            </a:endParaRPr>
           </a:p>
           <a:p>
             <a:r>
@@ -23237,6 +22877,12 @@
               </a:rPr>
               <a:t>Санкт-Петербург (ДК им. Горького) пл. Стачек, д. 4.</a:t>
             </a:r>
+            <a:endParaRPr lang="ru-RU" sz="2200" dirty="0">
+              <a:solidFill>
+                <a:srgbClr val="2E3D4C"/>
+              </a:solidFill>
+              <a:latin typeface="Trebuchet MS" panose="020B0603020202020204" pitchFamily="34" charset="0"/>
+            </a:endParaRPr>
           </a:p>
           <a:p>
             <a:r>
@@ -23257,6 +22903,12 @@
               </a:rPr>
               <a:t>span&gt;</a:t>
             </a:r>
+            <a:endParaRPr lang="en-US" sz="2200" dirty="0">
+              <a:solidFill>
+                <a:srgbClr val="2E3D4C"/>
+              </a:solidFill>
+              <a:latin typeface="Trebuchet MS" panose="020B0603020202020204" pitchFamily="34" charset="0"/>
+            </a:endParaRPr>
           </a:p>
           <a:p>
             <a:r>
@@ -23358,6 +23010,12 @@
               </a:rPr>
               <a:t>" &gt;</a:t>
             </a:r>
+            <a:endParaRPr lang="en-US" sz="2200" dirty="0">
+              <a:solidFill>
+                <a:srgbClr val="2E3D4C"/>
+              </a:solidFill>
+              <a:latin typeface="Trebuchet MS" panose="020B0603020202020204" pitchFamily="34" charset="0"/>
+            </a:endParaRPr>
           </a:p>
           <a:p>
             <a:r>
@@ -23378,6 +23036,12 @@
               </a:rPr>
               <a:t>a&gt;</a:t>
             </a:r>
+            <a:endParaRPr lang="en-US" sz="2200" dirty="0">
+              <a:solidFill>
+                <a:srgbClr val="2E3D4C"/>
+              </a:solidFill>
+              <a:latin typeface="Trebuchet MS" panose="020B0603020202020204" pitchFamily="34" charset="0"/>
+            </a:endParaRPr>
           </a:p>
           <a:p>
             <a:r>
@@ -23389,6 +23053,12 @@
               </a:rPr>
               <a:t>&lt;/p&gt;</a:t>
             </a:r>
+            <a:endParaRPr lang="en-US" sz="2200" dirty="0">
+              <a:solidFill>
+                <a:srgbClr val="2E3D4C"/>
+              </a:solidFill>
+              <a:latin typeface="Trebuchet MS" panose="020B0603020202020204" pitchFamily="34" charset="0"/>
+            </a:endParaRPr>
           </a:p>
           <a:p>
             <a:r>
@@ -23545,6 +23215,12 @@
               </a:rPr>
               <a:t>photo”=&gt;”joe. gif”,</a:t>
             </a:r>
+            <a:endParaRPr lang="en-US" dirty="0">
+              <a:solidFill>
+                <a:srgbClr val="2E3D4C"/>
+              </a:solidFill>
+              <a:latin typeface="Trebuchet MS" panose="020B0603020202020204" pitchFamily="34" charset="0"/>
+            </a:endParaRPr>
           </a:p>
           <a:p>
             <a:r>
@@ -23594,11 +23270,6 @@
         </p:txBody>
       </p:sp>
     </p:spTree>
-    <p:extLst>
-      <p:ext uri="{BB962C8B-B14F-4D97-AF65-F5344CB8AC3E}">
-        <p14:creationId xmlns:p14="http://schemas.microsoft.com/office/powerpoint/2010/main" val="2831470644"/>
-      </p:ext>
-    </p:extLst>
   </p:cSld>
   <p:clrMapOvr>
     <a:masterClrMapping/>
@@ -23715,6 +23386,7 @@
               <a:rPr lang="ru-RU" sz="3200" dirty="0" smtClean="0"/>
               <a:t>.</a:t>
             </a:r>
+            <a:endParaRPr lang="ru-RU" sz="3200" dirty="0" smtClean="0"/>
           </a:p>
           <a:p>
             <a:endParaRPr lang="ru-RU" sz="3200" dirty="0"/>
@@ -23729,11 +23401,6 @@
         </p:txBody>
       </p:sp>
     </p:spTree>
-    <p:extLst>
-      <p:ext uri="{BB962C8B-B14F-4D97-AF65-F5344CB8AC3E}">
-        <p14:creationId xmlns:p14="http://schemas.microsoft.com/office/powerpoint/2010/main" val="1436616942"/>
-      </p:ext>
-    </p:extLst>
   </p:cSld>
   <p:clrMapOvr>
     <a:masterClrMapping/>
@@ -23796,7 +23463,6 @@
           </p:cNvGraphicFramePr>
           <p:nvPr>
             <p:ph idx="1"/>
-            <p:extLst/>
           </p:nvPr>
         </p:nvGraphicFramePr>
         <p:xfrm>
@@ -23810,34 +23476,10 @@
                 <a:tableStyleId>{5940675A-B579-460E-94D1-54222C63F5DA}</a:tableStyleId>
               </a:tblPr>
               <a:tblGrid>
-                <a:gridCol w="2514679">
-                  <a:extLst>
-                    <a:ext uri="{9D8B030D-6E8A-4147-A177-3AD203B41FA5}">
-                      <a16:colId xmlns="" xmlns:a16="http://schemas.microsoft.com/office/drawing/2014/main" val="20000"/>
-                    </a:ext>
-                  </a:extLst>
-                </a:gridCol>
-                <a:gridCol w="2514679">
-                  <a:extLst>
-                    <a:ext uri="{9D8B030D-6E8A-4147-A177-3AD203B41FA5}">
-                      <a16:colId xmlns="" xmlns:a16="http://schemas.microsoft.com/office/drawing/2014/main" val="20001"/>
-                    </a:ext>
-                  </a:extLst>
-                </a:gridCol>
-                <a:gridCol w="2514679">
-                  <a:extLst>
-                    <a:ext uri="{9D8B030D-6E8A-4147-A177-3AD203B41FA5}">
-                      <a16:colId xmlns="" xmlns:a16="http://schemas.microsoft.com/office/drawing/2014/main" val="20002"/>
-                    </a:ext>
-                  </a:extLst>
-                </a:gridCol>
-                <a:gridCol w="2514679">
-                  <a:extLst>
-                    <a:ext uri="{9D8B030D-6E8A-4147-A177-3AD203B41FA5}">
-                      <a16:colId xmlns="" xmlns:a16="http://schemas.microsoft.com/office/drawing/2014/main" val="20003"/>
-                    </a:ext>
-                  </a:extLst>
-                </a:gridCol>
+                <a:gridCol w="2514679"/>
+                <a:gridCol w="2514679"/>
+                <a:gridCol w="2514679"/>
+                <a:gridCol w="2514679"/>
               </a:tblGrid>
               <a:tr h="338376">
                 <a:tc>
@@ -24046,11 +23688,6 @@
                     </a:solidFill>
                   </a:tcPr>
                 </a:tc>
-                <a:extLst>
-                  <a:ext uri="{0D108BD9-81ED-4DB2-BD59-A6C34878D82A}">
-                    <a16:rowId xmlns="" xmlns:a16="http://schemas.microsoft.com/office/drawing/2014/main" val="10000"/>
-                  </a:ext>
-                </a:extLst>
               </a:tr>
               <a:tr h="338376">
                 <a:tc>
@@ -24259,11 +23896,6 @@
                     </a:solidFill>
                   </a:tcPr>
                 </a:tc>
-                <a:extLst>
-                  <a:ext uri="{0D108BD9-81ED-4DB2-BD59-A6C34878D82A}">
-                    <a16:rowId xmlns="" xmlns:a16="http://schemas.microsoft.com/office/drawing/2014/main" val="10001"/>
-                  </a:ext>
-                </a:extLst>
               </a:tr>
               <a:tr h="338376">
                 <a:tc>
@@ -24472,11 +24104,6 @@
                     <a:noFill/>
                   </a:tcPr>
                 </a:tc>
-                <a:extLst>
-                  <a:ext uri="{0D108BD9-81ED-4DB2-BD59-A6C34878D82A}">
-                    <a16:rowId xmlns="" xmlns:a16="http://schemas.microsoft.com/office/drawing/2014/main" val="10002"/>
-                  </a:ext>
-                </a:extLst>
               </a:tr>
               <a:tr h="338376">
                 <a:tc>
@@ -24685,11 +24312,6 @@
                     </a:solidFill>
                   </a:tcPr>
                 </a:tc>
-                <a:extLst>
-                  <a:ext uri="{0D108BD9-81ED-4DB2-BD59-A6C34878D82A}">
-                    <a16:rowId xmlns="" xmlns:a16="http://schemas.microsoft.com/office/drawing/2014/main" val="10003"/>
-                  </a:ext>
-                </a:extLst>
               </a:tr>
               <a:tr h="338376">
                 <a:tc>
@@ -24903,11 +24525,6 @@
                     </a:solidFill>
                   </a:tcPr>
                 </a:tc>
-                <a:extLst>
-                  <a:ext uri="{0D108BD9-81ED-4DB2-BD59-A6C34878D82A}">
-                    <a16:rowId xmlns="" xmlns:a16="http://schemas.microsoft.com/office/drawing/2014/main" val="10004"/>
-                  </a:ext>
-                </a:extLst>
               </a:tr>
               <a:tr h="338376">
                 <a:tc>
@@ -25111,11 +24728,6 @@
                     <a:noFill/>
                   </a:tcPr>
                 </a:tc>
-                <a:extLst>
-                  <a:ext uri="{0D108BD9-81ED-4DB2-BD59-A6C34878D82A}">
-                    <a16:rowId xmlns="" xmlns:a16="http://schemas.microsoft.com/office/drawing/2014/main" val="10005"/>
-                  </a:ext>
-                </a:extLst>
               </a:tr>
               <a:tr h="338376">
                 <a:tc>
@@ -25324,11 +24936,6 @@
                     </a:solidFill>
                   </a:tcPr>
                 </a:tc>
-                <a:extLst>
-                  <a:ext uri="{0D108BD9-81ED-4DB2-BD59-A6C34878D82A}">
-                    <a16:rowId xmlns="" xmlns:a16="http://schemas.microsoft.com/office/drawing/2014/main" val="10006"/>
-                  </a:ext>
-                </a:extLst>
               </a:tr>
               <a:tr h="338376">
                 <a:tc>
@@ -25547,11 +25154,6 @@
                     </a:solidFill>
                   </a:tcPr>
                 </a:tc>
-                <a:extLst>
-                  <a:ext uri="{0D108BD9-81ED-4DB2-BD59-A6C34878D82A}">
-                    <a16:rowId xmlns="" xmlns:a16="http://schemas.microsoft.com/office/drawing/2014/main" val="10007"/>
-                  </a:ext>
-                </a:extLst>
               </a:tr>
               <a:tr h="338376">
                 <a:tc>
@@ -25765,11 +25367,6 @@
                     </a:solidFill>
                   </a:tcPr>
                 </a:tc>
-                <a:extLst>
-                  <a:ext uri="{0D108BD9-81ED-4DB2-BD59-A6C34878D82A}">
-                    <a16:rowId xmlns="" xmlns:a16="http://schemas.microsoft.com/office/drawing/2014/main" val="10008"/>
-                  </a:ext>
-                </a:extLst>
               </a:tr>
               <a:tr h="338376">
                 <a:tc>
@@ -25988,11 +25585,6 @@
                     </a:solidFill>
                   </a:tcPr>
                 </a:tc>
-                <a:extLst>
-                  <a:ext uri="{0D108BD9-81ED-4DB2-BD59-A6C34878D82A}">
-                    <a16:rowId xmlns="" xmlns:a16="http://schemas.microsoft.com/office/drawing/2014/main" val="10009"/>
-                  </a:ext>
-                </a:extLst>
               </a:tr>
               <a:tr h="338376">
                 <a:tc>
@@ -26201,11 +25793,6 @@
                     </a:solidFill>
                   </a:tcPr>
                 </a:tc>
-                <a:extLst>
-                  <a:ext uri="{0D108BD9-81ED-4DB2-BD59-A6C34878D82A}">
-                    <a16:rowId xmlns="" xmlns:a16="http://schemas.microsoft.com/office/drawing/2014/main" val="10010"/>
-                  </a:ext>
-                </a:extLst>
               </a:tr>
               <a:tr h="338376">
                 <a:tc>
@@ -26405,11 +25992,6 @@
                     <a:noFill/>
                   </a:tcPr>
                 </a:tc>
-                <a:extLst>
-                  <a:ext uri="{0D108BD9-81ED-4DB2-BD59-A6C34878D82A}">
-                    <a16:rowId xmlns="" xmlns:a16="http://schemas.microsoft.com/office/drawing/2014/main" val="10011"/>
-                  </a:ext>
-                </a:extLst>
               </a:tr>
               <a:tr h="338376">
                 <a:tc>
@@ -26609,22 +26191,12 @@
                     <a:noFill/>
                   </a:tcPr>
                 </a:tc>
-                <a:extLst>
-                  <a:ext uri="{0D108BD9-81ED-4DB2-BD59-A6C34878D82A}">
-                    <a16:rowId xmlns="" xmlns:a16="http://schemas.microsoft.com/office/drawing/2014/main" val="10012"/>
-                  </a:ext>
-                </a:extLst>
               </a:tr>
             </a:tbl>
           </a:graphicData>
         </a:graphic>
       </p:graphicFrame>
     </p:spTree>
-    <p:extLst>
-      <p:ext uri="{BB962C8B-B14F-4D97-AF65-F5344CB8AC3E}">
-        <p14:creationId xmlns:p14="http://schemas.microsoft.com/office/powerpoint/2010/main" val="3077260039"/>
-      </p:ext>
-    </p:extLst>
   </p:cSld>
   <p:clrMapOvr>
     <a:masterClrMapping/>
@@ -26729,6 +26301,7 @@
               <a:rPr lang="ru-RU" sz="3200" dirty="0" smtClean="0"/>
               <a:t> на следующей структуре:</a:t>
             </a:r>
+            <a:endParaRPr lang="ru-RU" sz="3200" dirty="0" smtClean="0"/>
           </a:p>
           <a:p>
             <a:pPr>
@@ -26833,6 +26406,7 @@
               <a:rPr lang="ru-RU" sz="3000" dirty="0" smtClean="0"/>
               <a:t>)</a:t>
             </a:r>
+            <a:endParaRPr lang="ru-RU" sz="3000" dirty="0" smtClean="0"/>
           </a:p>
           <a:p>
             <a:pPr lvl="1">
@@ -26875,6 +26449,7 @@
               <a:rPr lang="ru-RU" sz="3000" dirty="0"/>
               <a:t>).</a:t>
             </a:r>
+            <a:endParaRPr lang="ru-RU" sz="3000" dirty="0"/>
           </a:p>
           <a:p>
             <a:r>
@@ -26914,11 +26489,6 @@
         </p:txBody>
       </p:sp>
     </p:spTree>
-    <p:extLst>
-      <p:ext uri="{BB962C8B-B14F-4D97-AF65-F5344CB8AC3E}">
-        <p14:creationId xmlns:p14="http://schemas.microsoft.com/office/powerpoint/2010/main" val="2828827441"/>
-      </p:ext>
-    </p:extLst>
   </p:cSld>
   <p:clrMapOvr>
     <a:masterClrMapping/>
@@ -27554,6 +27124,15 @@
               </a:rPr>
               <a:t>бывает? Вообще-то, бывает!</a:t>
             </a:r>
+            <a:endParaRPr lang="ru-RU" sz="2800" dirty="0" smtClean="0">
+              <a:solidFill>
+                <a:srgbClr val="000000"/>
+              </a:solidFill>
+              <a:highlight>
+                <a:srgbClr val="FFFFFF"/>
+              </a:highlight>
+              <a:latin typeface="Consolas" panose="020B0609020204030204" pitchFamily="49" charset="0"/>
+            </a:endParaRPr>
           </a:p>
           <a:p>
             <a:pPr>
@@ -27686,11 +27265,6 @@
         </p:txBody>
       </p:sp>
     </p:spTree>
-    <p:extLst>
-      <p:ext uri="{BB962C8B-B14F-4D97-AF65-F5344CB8AC3E}">
-        <p14:creationId xmlns:p14="http://schemas.microsoft.com/office/powerpoint/2010/main" val="3157565134"/>
-      </p:ext>
-    </p:extLst>
   </p:cSld>
   <p:clrMapOvr>
     <a:masterClrMapping/>
@@ -28196,11 +27770,6 @@
         </p:txBody>
       </p:sp>
     </p:spTree>
-    <p:extLst>
-      <p:ext uri="{BB962C8B-B14F-4D97-AF65-F5344CB8AC3E}">
-        <p14:creationId xmlns:p14="http://schemas.microsoft.com/office/powerpoint/2010/main" val="3308538607"/>
-      </p:ext>
-    </p:extLst>
   </p:cSld>
   <p:clrMapOvr>
     <a:masterClrMapping/>
@@ -28285,7 +27854,7 @@
             </a:pPr>
             <a:r>
               <a:rPr lang="en-US" sz="3200" dirty="0">
-                <a:hlinkClick r:id="rId3"/>
+                <a:hlinkClick r:id="rId1"/>
               </a:rPr>
               <a:t>https://ru.wikipedia.org/wiki/HTML</a:t>
             </a:r>
@@ -28298,7 +27867,7 @@
             </a:pPr>
             <a:r>
               <a:rPr lang="en-US" sz="3200" dirty="0">
-                <a:hlinkClick r:id="rId4"/>
+                <a:hlinkClick r:id="rId2"/>
               </a:rPr>
               <a:t>http://ruseller.com/htmlshpora.php?id=1</a:t>
             </a:r>
@@ -28311,85 +27880,85 @@
             </a:pPr>
             <a:r>
               <a:rPr lang="en-US" sz="3200" dirty="0">
-                <a:hlinkClick r:id="rId5"/>
+                <a:hlinkClick r:id="rId3"/>
               </a:rPr>
               <a:t>http</a:t>
             </a:r>
             <a:r>
               <a:rPr lang="ru-RU" sz="3200" dirty="0">
-                <a:hlinkClick r:id="rId5"/>
+                <a:hlinkClick r:id="rId3"/>
               </a:rPr>
               <a:t>://</a:t>
             </a:r>
             <a:r>
               <a:rPr lang="en-US" sz="3200" dirty="0">
-                <a:hlinkClick r:id="rId5"/>
+                <a:hlinkClick r:id="rId3"/>
               </a:rPr>
               <a:t>www</a:t>
             </a:r>
             <a:r>
               <a:rPr lang="ru-RU" sz="3200" dirty="0">
-                <a:hlinkClick r:id="rId5"/>
+                <a:hlinkClick r:id="rId3"/>
               </a:rPr>
               <a:t>.</a:t>
             </a:r>
             <a:r>
               <a:rPr lang="en-US" sz="3200" dirty="0">
-                <a:hlinkClick r:id="rId5"/>
+                <a:hlinkClick r:id="rId3"/>
               </a:rPr>
               <a:t>w</a:t>
             </a:r>
             <a:r>
               <a:rPr lang="ru-RU" sz="3200" dirty="0">
-                <a:hlinkClick r:id="rId5"/>
+                <a:hlinkClick r:id="rId3"/>
               </a:rPr>
               <a:t>3</a:t>
             </a:r>
             <a:r>
               <a:rPr lang="en-US" sz="3200" dirty="0">
-                <a:hlinkClick r:id="rId5"/>
+                <a:hlinkClick r:id="rId3"/>
               </a:rPr>
               <a:t>schools</a:t>
             </a:r>
             <a:r>
               <a:rPr lang="ru-RU" sz="3200" dirty="0">
-                <a:hlinkClick r:id="rId5"/>
+                <a:hlinkClick r:id="rId3"/>
               </a:rPr>
               <a:t>.</a:t>
             </a:r>
             <a:r>
               <a:rPr lang="en-US" sz="3200" dirty="0">
-                <a:hlinkClick r:id="rId5"/>
+                <a:hlinkClick r:id="rId3"/>
               </a:rPr>
               <a:t>com</a:t>
             </a:r>
             <a:r>
               <a:rPr lang="ru-RU" sz="3200" dirty="0">
-                <a:hlinkClick r:id="rId5"/>
+                <a:hlinkClick r:id="rId3"/>
               </a:rPr>
               <a:t>/</a:t>
             </a:r>
             <a:r>
               <a:rPr lang="en-US" sz="3200" dirty="0">
-                <a:hlinkClick r:id="rId5"/>
+                <a:hlinkClick r:id="rId3"/>
               </a:rPr>
               <a:t>tags</a:t>
             </a:r>
             <a:r>
               <a:rPr lang="ru-RU" sz="3200" dirty="0">
-                <a:hlinkClick r:id="rId5"/>
+                <a:hlinkClick r:id="rId3"/>
               </a:rPr>
               <a:t>/</a:t>
             </a:r>
             <a:r>
               <a:rPr lang="en-US" sz="3200" dirty="0">
-                <a:hlinkClick r:id="rId5"/>
+                <a:hlinkClick r:id="rId3"/>
               </a:rPr>
               <a:t>default</a:t>
             </a:r>
             <a:r>
               <a:rPr lang="ru-RU" sz="3200" dirty="0" smtClean="0">
-                <a:hlinkClick r:id="rId5"/>
+                <a:hlinkClick r:id="rId3"/>
               </a:rPr>
               <a:t>...</a:t>
             </a:r>
@@ -28402,13 +27971,13 @@
             </a:pPr>
             <a:r>
               <a:rPr lang="en-US" sz="3200" dirty="0">
-                <a:hlinkClick r:id="rId6"/>
+                <a:hlinkClick r:id="rId4"/>
               </a:rPr>
               <a:t>http://</a:t>
             </a:r>
             <a:r>
               <a:rPr lang="en-US" sz="3200" dirty="0" smtClean="0">
-                <a:hlinkClick r:id="rId6"/>
+                <a:hlinkClick r:id="rId4"/>
               </a:rPr>
               <a:t>uroki-html.ru/html/html_meta.php</a:t>
             </a:r>
@@ -28421,13 +27990,13 @@
             </a:pPr>
             <a:r>
               <a:rPr lang="en-US" sz="3200" dirty="0">
-                <a:hlinkClick r:id="rId7"/>
+                <a:hlinkClick r:id="rId5"/>
               </a:rPr>
               <a:t>https://</a:t>
             </a:r>
             <a:r>
               <a:rPr lang="en-US" sz="3200" dirty="0" smtClean="0">
-                <a:hlinkClick r:id="rId7"/>
+                <a:hlinkClick r:id="rId5"/>
               </a:rPr>
               <a:t>www.netmarketshare.com/browser-market-share.aspx?qprid=0&amp;qpcustomd=0&amp;qpct=3</a:t>
             </a:r>
@@ -28440,7 +28009,7 @@
             </a:pPr>
             <a:r>
               <a:rPr lang="en-US" sz="3200" dirty="0">
-                <a:hlinkClick r:id="rId8"/>
+                <a:hlinkClick r:id="rId6"/>
               </a:rPr>
               <a:t>https://html5book.ru/css-grid/</a:t>
             </a:r>
@@ -28482,11 +28051,6 @@
         </p:txBody>
       </p:sp>
     </p:spTree>
-    <p:extLst>
-      <p:ext uri="{BB962C8B-B14F-4D97-AF65-F5344CB8AC3E}">
-        <p14:creationId xmlns:p14="http://schemas.microsoft.com/office/powerpoint/2010/main" val="2441849031"/>
-      </p:ext>
-    </p:extLst>
   </p:cSld>
   <p:clrMapOvr>
     <a:masterClrMapping/>
@@ -28699,6 +28263,15 @@
               </a:rPr>
               <a:t>&gt;</a:t>
             </a:r>
+            <a:endParaRPr lang="ru-RU" sz="2800" dirty="0">
+              <a:solidFill>
+                <a:srgbClr val="0000FF"/>
+              </a:solidFill>
+              <a:highlight>
+                <a:srgbClr val="FFFFFF"/>
+              </a:highlight>
+              <a:latin typeface="Consolas" panose="020B0609020204030204" pitchFamily="49" charset="0"/>
+            </a:endParaRPr>
           </a:p>
           <a:p>
             <a:endParaRPr lang="ru-RU" sz="1600" dirty="0" smtClean="0"/>
@@ -28730,19 +28303,19 @@
             </a:r>
             <a:r>
               <a:rPr lang="en-US" sz="3200" dirty="0" smtClean="0">
-                <a:hlinkClick r:id="rId3"/>
+                <a:hlinkClick r:id="rId1"/>
               </a:rPr>
               <a:t>http</a:t>
             </a:r>
             <a:r>
               <a:rPr lang="en-US" sz="3200" dirty="0">
-                <a:hlinkClick r:id="rId3"/>
+                <a:hlinkClick r:id="rId1"/>
               </a:rPr>
               <a:t>://</a:t>
             </a:r>
             <a:r>
               <a:rPr lang="en-US" sz="3200" dirty="0" smtClean="0">
-                <a:hlinkClick r:id="rId3"/>
+                <a:hlinkClick r:id="rId1"/>
               </a:rPr>
               <a:t>webdesign.about.com/od/dtds/qt/tipdoctypelist.htm</a:t>
             </a:r>
@@ -28753,15 +28326,11 @@
               <a:rPr lang="ru-RU" sz="3200" dirty="0" smtClean="0"/>
               <a:t> </a:t>
             </a:r>
+            <a:endParaRPr lang="ru-RU" sz="3200" dirty="0" smtClean="0"/>
           </a:p>
         </p:txBody>
       </p:sp>
     </p:spTree>
-    <p:extLst>
-      <p:ext uri="{BB962C8B-B14F-4D97-AF65-F5344CB8AC3E}">
-        <p14:creationId xmlns:p14="http://schemas.microsoft.com/office/powerpoint/2010/main" val="3484953010"/>
-      </p:ext>
-    </p:extLst>
   </p:cSld>
   <p:clrMapOvr>
     <a:masterClrMapping/>
@@ -28890,6 +28459,7 @@
               <a:rPr lang="ru-RU" sz="2400" dirty="0" smtClean="0"/>
               <a:t>:</a:t>
             </a:r>
+            <a:endParaRPr lang="ru-RU" sz="2400" dirty="0" smtClean="0"/>
           </a:p>
           <a:p>
             <a:pPr marL="0" lvl="0" indent="0">
@@ -29101,6 +28671,7 @@
               <a:rPr lang="en-US" sz="2400" dirty="0"/>
               <a:t>HTML.</a:t>
             </a:r>
+            <a:endParaRPr lang="en-US" sz="2400" dirty="0"/>
           </a:p>
           <a:p>
             <a:pPr marL="0" indent="0">
@@ -29264,6 +28835,15 @@
               </a:rPr>
               <a:t>"http://www.w3.org/TR/html4/loose.dtd"&gt;</a:t>
             </a:r>
+            <a:endParaRPr lang="en-US" sz="1800" dirty="0">
+              <a:solidFill>
+                <a:srgbClr val="0000FF"/>
+              </a:solidFill>
+              <a:highlight>
+                <a:srgbClr val="FFFFFF"/>
+              </a:highlight>
+              <a:latin typeface="Consolas" panose="020B0609020204030204" pitchFamily="49" charset="0"/>
+            </a:endParaRPr>
           </a:p>
           <a:p>
             <a:pPr lvl="0">
@@ -29311,6 +28891,7 @@
               <a:rPr lang="ru-RU" sz="2400" dirty="0"/>
               <a:t>для создания наборов фреймов.</a:t>
             </a:r>
+            <a:endParaRPr lang="ru-RU" sz="2400" dirty="0"/>
           </a:p>
           <a:p>
             <a:pPr marL="0" indent="0">
@@ -29487,11 +29068,6 @@
         </p:txBody>
       </p:sp>
     </p:spTree>
-    <p:extLst>
-      <p:ext uri="{BB962C8B-B14F-4D97-AF65-F5344CB8AC3E}">
-        <p14:creationId xmlns:p14="http://schemas.microsoft.com/office/powerpoint/2010/main" val="1845444132"/>
-      </p:ext>
-    </p:extLst>
   </p:cSld>
   <p:clrMapOvr>
     <a:masterClrMapping/>
@@ -29648,11 +29224,7 @@
             </a:r>
             <a:r>
               <a:rPr lang="ru-RU" sz="3200" dirty="0" smtClean="0"/>
-              <a:t>с </a:t>
-            </a:r>
-            <a:r>
-              <a:rPr lang="ru-RU" sz="3200" dirty="0" smtClean="0"/>
-              <a:t>указанием на </a:t>
+              <a:t>с указанием на </a:t>
             </a:r>
             <a:r>
               <a:rPr lang="ru-RU" sz="3200" i="1" dirty="0" smtClean="0"/>
@@ -29672,19 +29244,19 @@
             </a:r>
             <a:r>
               <a:rPr lang="en-US" sz="2800" dirty="0" smtClean="0">
-                <a:hlinkClick r:id="rId3"/>
+                <a:hlinkClick r:id="rId1"/>
               </a:rPr>
               <a:t>http</a:t>
             </a:r>
             <a:r>
               <a:rPr lang="en-US" sz="2800" dirty="0">
-                <a:hlinkClick r:id="rId3"/>
+                <a:hlinkClick r:id="rId1"/>
               </a:rPr>
               <a:t>://www.html5rocks.com/ru/tutorials/appcache/beginner</a:t>
             </a:r>
             <a:r>
               <a:rPr lang="en-US" sz="2800" dirty="0" smtClean="0">
-                <a:hlinkClick r:id="rId3"/>
+                <a:hlinkClick r:id="rId1"/>
               </a:rPr>
               <a:t>/</a:t>
             </a:r>
@@ -29692,6 +29264,7 @@
               <a:rPr lang="ru-RU" sz="3200" dirty="0" smtClean="0"/>
               <a:t>).</a:t>
             </a:r>
+            <a:endParaRPr lang="ru-RU" sz="3200" dirty="0" smtClean="0"/>
           </a:p>
           <a:p>
             <a:pPr lvl="0">
@@ -29767,13 +29340,13 @@
             </a:r>
             <a:r>
               <a:rPr lang="en-US" sz="2800" dirty="0">
-                <a:hlinkClick r:id="rId4"/>
+                <a:hlinkClick r:id="rId2"/>
               </a:rPr>
               <a:t>http://</a:t>
             </a:r>
             <a:r>
               <a:rPr lang="en-US" sz="2800" dirty="0" smtClean="0">
-                <a:hlinkClick r:id="rId4"/>
+                <a:hlinkClick r:id="rId2"/>
               </a:rPr>
               <a:t>www.w3.org/International/questions/qa-lang-why.en.php</a:t>
             </a:r>
@@ -29781,6 +29354,7 @@
               <a:rPr lang="ru-RU" sz="3200" dirty="0" smtClean="0"/>
               <a:t>):</a:t>
             </a:r>
+            <a:endParaRPr lang="ru-RU" sz="3200" dirty="0" smtClean="0"/>
           </a:p>
           <a:p>
             <a:pPr lvl="0">
@@ -29891,11 +29465,6 @@
         </p:txBody>
       </p:sp>
     </p:spTree>
-    <p:extLst>
-      <p:ext uri="{BB962C8B-B14F-4D97-AF65-F5344CB8AC3E}">
-        <p14:creationId xmlns:p14="http://schemas.microsoft.com/office/powerpoint/2010/main" val="1079402243"/>
-      </p:ext>
-    </p:extLst>
   </p:cSld>
   <p:clrMapOvr>
     <a:masterClrMapping/>
@@ -30022,6 +29591,7 @@
               <a:rPr lang="ru-RU" sz="3200" dirty="0" smtClean="0"/>
               <a:t> (заголовок, ссылки на внешние стилевые файлы и скрипты, и тому подобное).</a:t>
             </a:r>
+            <a:endParaRPr lang="ru-RU" sz="3200" dirty="0" smtClean="0"/>
           </a:p>
           <a:p>
             <a:pPr>
@@ -30203,15 +29773,11 @@
               <a:rPr lang="ru-RU" sz="3200" dirty="0" smtClean="0"/>
               <a:t>опциональны.</a:t>
             </a:r>
+            <a:endParaRPr lang="ru-RU" sz="3200" dirty="0" smtClean="0"/>
           </a:p>
         </p:txBody>
       </p:sp>
     </p:spTree>
-    <p:extLst>
-      <p:ext uri="{BB962C8B-B14F-4D97-AF65-F5344CB8AC3E}">
-        <p14:creationId xmlns:p14="http://schemas.microsoft.com/office/powerpoint/2010/main" val="884274549"/>
-      </p:ext>
-    </p:extLst>
   </p:cSld>
   <p:clrMapOvr>
     <a:masterClrMapping/>
@@ -30330,6 +29896,7 @@
               <a:rPr lang="ru-RU" sz="3200" dirty="0" smtClean="0"/>
               <a:t>устанавливает заголовок (имя) документа. Содержимое элемента – строка, которая отображается как заголовок окна или вкладки:</a:t>
             </a:r>
+            <a:endParaRPr lang="ru-RU" sz="3200" dirty="0" smtClean="0"/>
           </a:p>
           <a:p>
             <a:pPr>
@@ -30701,7 +30268,7 @@
             </a:endParaRPr>
           </a:p>
           <a:p>
-            <a:pPr marL="201168" lvl="1" indent="0">
+            <a:pPr marL="201295" lvl="1" indent="0">
               <a:lnSpc>
                 <a:spcPct val="100000"/>
               </a:lnSpc>
@@ -30733,11 +30300,6 @@
         </p:txBody>
       </p:sp>
     </p:spTree>
-    <p:extLst>
-      <p:ext uri="{BB962C8B-B14F-4D97-AF65-F5344CB8AC3E}">
-        <p14:creationId xmlns:p14="http://schemas.microsoft.com/office/powerpoint/2010/main" val="866877145"/>
-      </p:ext>
-    </p:extLst>
   </p:cSld>
   <p:clrMapOvr>
     <a:masterClrMapping/>
@@ -30852,6 +30414,7 @@
               <a:rPr lang="ru-RU" sz="3200" dirty="0" smtClean="0"/>
               <a:t> выполняет две задачи:</a:t>
             </a:r>
+            <a:endParaRPr lang="ru-RU" sz="3200" dirty="0" smtClean="0"/>
           </a:p>
           <a:p>
             <a:pPr>
@@ -30918,6 +30481,7 @@
               <a:rPr lang="ru-RU" sz="2800" dirty="0" smtClean="0"/>
               <a:t> </a:t>
             </a:r>
+            <a:endParaRPr lang="ru-RU" sz="2800" dirty="0" smtClean="0"/>
           </a:p>
           <a:p>
             <a:pPr>
@@ -30982,9 +30546,7 @@
           <p:cNvGraphicFramePr>
             <a:graphicFrameLocks noGrp="1"/>
           </p:cNvGraphicFramePr>
-          <p:nvPr>
-            <p:extLst/>
-          </p:nvPr>
+          <p:nvPr/>
         </p:nvGraphicFramePr>
         <p:xfrm>
           <a:off x="1482763" y="4222974"/>
@@ -30997,20 +30559,8 @@
                 <a:tableStyleId>{5C22544A-7EE6-4342-B048-85BDC9FD1C3A}</a:tableStyleId>
               </a:tblPr>
               <a:tblGrid>
-                <a:gridCol w="1197630">
-                  <a:extLst>
-                    <a:ext uri="{9D8B030D-6E8A-4147-A177-3AD203B41FA5}">
-                      <a16:colId xmlns="" xmlns:a16="http://schemas.microsoft.com/office/drawing/2014/main" val="20000"/>
-                    </a:ext>
-                  </a:extLst>
-                </a:gridCol>
-                <a:gridCol w="8095184">
-                  <a:extLst>
-                    <a:ext uri="{9D8B030D-6E8A-4147-A177-3AD203B41FA5}">
-                      <a16:colId xmlns="" xmlns:a16="http://schemas.microsoft.com/office/drawing/2014/main" val="20001"/>
-                    </a:ext>
-                  </a:extLst>
-                </a:gridCol>
+                <a:gridCol w="1197630"/>
+                <a:gridCol w="8095184"/>
               </a:tblGrid>
               <a:tr h="370840">
                 <a:tc>
@@ -31032,7 +30582,6 @@
                         <a:buSzTx/>
                         <a:buFontTx/>
                         <a:buNone/>
-                        <a:tabLst/>
                         <a:defRPr/>
                       </a:pPr>
                       <a:r>
@@ -31085,11 +30634,6 @@
                   </a:txBody>
                   <a:tcPr anchor="ctr"/>
                 </a:tc>
-                <a:extLst>
-                  <a:ext uri="{0D108BD9-81ED-4DB2-BD59-A6C34878D82A}">
-                    <a16:rowId xmlns="" xmlns:a16="http://schemas.microsoft.com/office/drawing/2014/main" val="10000"/>
-                  </a:ext>
-                </a:extLst>
               </a:tr>
               <a:tr h="370840">
                 <a:tc>
@@ -31111,7 +30655,6 @@
                         <a:buSzTx/>
                         <a:buFontTx/>
                         <a:buNone/>
-                        <a:tabLst/>
                         <a:defRPr/>
                       </a:pPr>
                       <a:r>
@@ -31167,11 +30710,6 @@
                   </a:txBody>
                   <a:tcPr anchor="ctr"/>
                 </a:tc>
-                <a:extLst>
-                  <a:ext uri="{0D108BD9-81ED-4DB2-BD59-A6C34878D82A}">
-                    <a16:rowId xmlns="" xmlns:a16="http://schemas.microsoft.com/office/drawing/2014/main" val="10001"/>
-                  </a:ext>
-                </a:extLst>
               </a:tr>
               <a:tr h="370840">
                 <a:tc>
@@ -31193,7 +30731,6 @@
                         <a:buSzTx/>
                         <a:buFontTx/>
                         <a:buNone/>
-                        <a:tabLst/>
                         <a:defRPr/>
                       </a:pPr>
                       <a:r>
@@ -31249,7 +30786,6 @@
                         <a:buSzTx/>
                         <a:buFontTx/>
                         <a:buNone/>
-                        <a:tabLst/>
                         <a:defRPr/>
                       </a:pPr>
                       <a:r>
@@ -31261,11 +30797,6 @@
                   </a:txBody>
                   <a:tcPr anchor="ctr"/>
                 </a:tc>
-                <a:extLst>
-                  <a:ext uri="{0D108BD9-81ED-4DB2-BD59-A6C34878D82A}">
-                    <a16:rowId xmlns="" xmlns:a16="http://schemas.microsoft.com/office/drawing/2014/main" val="10002"/>
-                  </a:ext>
-                </a:extLst>
               </a:tr>
               <a:tr h="370840">
                 <a:tc>
@@ -31287,7 +30818,6 @@
                         <a:buSzTx/>
                         <a:buFontTx/>
                         <a:buNone/>
-                        <a:tabLst/>
                         <a:defRPr/>
                       </a:pPr>
                       <a:r>
@@ -31339,11 +30869,6 @@
                   </a:txBody>
                   <a:tcPr anchor="ctr"/>
                 </a:tc>
-                <a:extLst>
-                  <a:ext uri="{0D108BD9-81ED-4DB2-BD59-A6C34878D82A}">
-                    <a16:rowId xmlns="" xmlns:a16="http://schemas.microsoft.com/office/drawing/2014/main" val="10003"/>
-                  </a:ext>
-                </a:extLst>
               </a:tr>
               <a:tr h="370840">
                 <a:tc>
@@ -31365,7 +30890,6 @@
                         <a:buSzTx/>
                         <a:buFontTx/>
                         <a:buNone/>
-                        <a:tabLst/>
                         <a:defRPr/>
                       </a:pPr>
                       <a:r>
@@ -31410,22 +30934,12 @@
                   </a:txBody>
                   <a:tcPr anchor="ctr"/>
                 </a:tc>
-                <a:extLst>
-                  <a:ext uri="{0D108BD9-81ED-4DB2-BD59-A6C34878D82A}">
-                    <a16:rowId xmlns="" xmlns:a16="http://schemas.microsoft.com/office/drawing/2014/main" val="10004"/>
-                  </a:ext>
-                </a:extLst>
               </a:tr>
             </a:tbl>
           </a:graphicData>
         </a:graphic>
       </p:graphicFrame>
     </p:spTree>
-    <p:extLst>
-      <p:ext uri="{BB962C8B-B14F-4D97-AF65-F5344CB8AC3E}">
-        <p14:creationId xmlns:p14="http://schemas.microsoft.com/office/powerpoint/2010/main" val="1270926949"/>
-      </p:ext>
-    </p:extLst>
   </p:cSld>
   <p:clrMapOvr>
     <a:masterClrMapping/>
@@ -32440,11 +31954,6 @@
         </p:txBody>
       </p:sp>
     </p:spTree>
-    <p:extLst>
-      <p:ext uri="{BB962C8B-B14F-4D97-AF65-F5344CB8AC3E}">
-        <p14:creationId xmlns:p14="http://schemas.microsoft.com/office/powerpoint/2010/main" val="2178055221"/>
-      </p:ext>
-    </p:extLst>
   </p:cSld>
   <p:clrMapOvr>
     <a:masterClrMapping/>
@@ -32642,6 +32151,7 @@
               <a:rPr lang="ru-RU" sz="3200" dirty="0" smtClean="0"/>
               <a:t>описать произвольные метаданные (ключ-значение).</a:t>
             </a:r>
+            <a:endParaRPr lang="ru-RU" sz="3200" dirty="0" smtClean="0"/>
           </a:p>
           <a:p>
             <a:pPr>
@@ -32784,11 +32294,6 @@
         </p:txBody>
       </p:sp>
     </p:spTree>
-    <p:extLst>
-      <p:ext uri="{BB962C8B-B14F-4D97-AF65-F5344CB8AC3E}">
-        <p14:creationId xmlns:p14="http://schemas.microsoft.com/office/powerpoint/2010/main" val="3121207593"/>
-      </p:ext>
-    </p:extLst>
   </p:cSld>
   <p:clrMapOvr>
     <a:masterClrMapping/>
@@ -32927,6 +32432,7 @@
               <a:rPr lang="ru-RU" sz="3200" dirty="0" smtClean="0"/>
               <a:t>:</a:t>
             </a:r>
+            <a:endParaRPr lang="ru-RU" sz="3200" dirty="0" smtClean="0"/>
           </a:p>
           <a:p>
             <a:pPr>
@@ -33224,11 +32730,6 @@
         </p:txBody>
       </p:sp>
     </p:spTree>
-    <p:extLst>
-      <p:ext uri="{BB962C8B-B14F-4D97-AF65-F5344CB8AC3E}">
-        <p14:creationId xmlns:p14="http://schemas.microsoft.com/office/powerpoint/2010/main" val="1512287324"/>
-      </p:ext>
-    </p:extLst>
   </p:cSld>
   <p:clrMapOvr>
     <a:masterClrMapping/>
@@ -33419,6 +32920,7 @@
               <a:rPr lang="ru-RU" sz="3200" dirty="0" smtClean="0"/>
               <a:t> принимает значения из фиксированного набора:</a:t>
             </a:r>
+            <a:endParaRPr lang="ru-RU" sz="3200" dirty="0" smtClean="0"/>
           </a:p>
         </p:txBody>
       </p:sp>
@@ -33428,9 +32930,7 @@
           <p:cNvGraphicFramePr>
             <a:graphicFrameLocks noGrp="1"/>
           </p:cNvGraphicFramePr>
-          <p:nvPr>
-            <p:extLst/>
-          </p:nvPr>
+          <p:nvPr/>
         </p:nvGraphicFramePr>
         <p:xfrm>
           <a:off x="1097278" y="3444240"/>
@@ -33443,20 +32943,8 @@
                 <a:tableStyleId>{5C22544A-7EE6-4342-B048-85BDC9FD1C3A}</a:tableStyleId>
               </a:tblPr>
               <a:tblGrid>
-                <a:gridCol w="2120502">
-                  <a:extLst>
-                    <a:ext uri="{9D8B030D-6E8A-4147-A177-3AD203B41FA5}">
-                      <a16:colId xmlns="" xmlns:a16="http://schemas.microsoft.com/office/drawing/2014/main" val="20000"/>
-                    </a:ext>
-                  </a:extLst>
-                </a:gridCol>
-                <a:gridCol w="7937900">
-                  <a:extLst>
-                    <a:ext uri="{9D8B030D-6E8A-4147-A177-3AD203B41FA5}">
-                      <a16:colId xmlns="" xmlns:a16="http://schemas.microsoft.com/office/drawing/2014/main" val="20001"/>
-                    </a:ext>
-                  </a:extLst>
-                </a:gridCol>
+                <a:gridCol w="2120502"/>
+                <a:gridCol w="7937900"/>
               </a:tblGrid>
               <a:tr h="370840">
                 <a:tc>
@@ -33522,6 +33010,7 @@
                         <a:rPr lang="ru-RU" sz="2000" dirty="0" smtClean="0"/>
                         <a:t> </a:t>
                       </a:r>
+                      <a:endParaRPr lang="ru-RU" sz="2000" dirty="0" smtClean="0"/>
                     </a:p>
                     <a:p>
                       <a:pPr>
@@ -33601,11 +33090,6 @@
                   </a:txBody>
                   <a:tcPr/>
                 </a:tc>
-                <a:extLst>
-                  <a:ext uri="{0D108BD9-81ED-4DB2-BD59-A6C34878D82A}">
-                    <a16:rowId xmlns="" xmlns:a16="http://schemas.microsoft.com/office/drawing/2014/main" val="10000"/>
-                  </a:ext>
-                </a:extLst>
               </a:tr>
               <a:tr h="370840">
                 <a:tc>
@@ -33672,11 +33156,6 @@
                   </a:txBody>
                   <a:tcPr/>
                 </a:tc>
-                <a:extLst>
-                  <a:ext uri="{0D108BD9-81ED-4DB2-BD59-A6C34878D82A}">
-                    <a16:rowId xmlns="" xmlns:a16="http://schemas.microsoft.com/office/drawing/2014/main" val="10001"/>
-                  </a:ext>
-                </a:extLst>
               </a:tr>
               <a:tr h="370840">
                 <a:tc>
@@ -33738,6 +33217,7 @@
                         <a:rPr lang="en-US" sz="2000" dirty="0" smtClean="0"/>
                         <a:t>:</a:t>
                       </a:r>
+                      <a:endParaRPr lang="en-US" sz="2000" dirty="0" smtClean="0"/>
                     </a:p>
                     <a:p>
                       <a:pPr>
@@ -33845,22 +33325,12 @@
                   </a:txBody>
                   <a:tcPr/>
                 </a:tc>
-                <a:extLst>
-                  <a:ext uri="{0D108BD9-81ED-4DB2-BD59-A6C34878D82A}">
-                    <a16:rowId xmlns="" xmlns:a16="http://schemas.microsoft.com/office/drawing/2014/main" val="10002"/>
-                  </a:ext>
-                </a:extLst>
               </a:tr>
             </a:tbl>
           </a:graphicData>
         </a:graphic>
       </p:graphicFrame>
     </p:spTree>
-    <p:extLst>
-      <p:ext uri="{BB962C8B-B14F-4D97-AF65-F5344CB8AC3E}">
-        <p14:creationId xmlns:p14="http://schemas.microsoft.com/office/powerpoint/2010/main" val="324645195"/>
-      </p:ext>
-    </p:extLst>
   </p:cSld>
   <p:clrMapOvr>
     <a:masterClrMapping/>
@@ -33962,19 +33432,19 @@
             </a:r>
             <a:r>
               <a:rPr lang="en-US" sz="3200" dirty="0" smtClean="0">
-                <a:hlinkClick r:id="rId2"/>
+                <a:hlinkClick r:id="rId1"/>
               </a:rPr>
               <a:t>http</a:t>
             </a:r>
             <a:r>
               <a:rPr lang="en-US" sz="3200" dirty="0">
-                <a:hlinkClick r:id="rId2"/>
+                <a:hlinkClick r:id="rId1"/>
               </a:rPr>
               <a:t>://</a:t>
             </a:r>
             <a:r>
               <a:rPr lang="en-US" sz="3200" dirty="0" smtClean="0">
-                <a:hlinkClick r:id="rId2"/>
+                <a:hlinkClick r:id="rId1"/>
               </a:rPr>
               <a:t>www.sublimetext.com/3</a:t>
             </a:r>
@@ -34028,26 +33498,43 @@
               <a:rPr lang="ru-RU" sz="3200" dirty="0" smtClean="0"/>
               <a:t>):</a:t>
             </a:r>
+            <a:endParaRPr lang="ru-RU" sz="3200" dirty="0" smtClean="0"/>
           </a:p>
           <a:p>
             <a:pPr lvl="1"/>
+            <a:r>
+              <a:rPr lang="en-US" sz="3000" dirty="0" smtClean="0">
+                <a:hlinkClick r:id="rId2"/>
+              </a:rPr>
+              <a:t>http</a:t>
+            </a:r>
+            <a:r>
+              <a:rPr lang="en-US" sz="3000" dirty="0">
+                <a:hlinkClick r:id="rId2"/>
+              </a:rPr>
+              <a:t>://htmlsandbox.com</a:t>
+            </a:r>
+            <a:r>
+              <a:rPr lang="en-US" sz="3000" dirty="0" smtClean="0">
+                <a:hlinkClick r:id="rId2"/>
+              </a:rPr>
+              <a:t>/</a:t>
+            </a:r>
+            <a:endParaRPr lang="ru-RU" sz="3000" dirty="0" smtClean="0"/>
+          </a:p>
+          <a:p>
+            <a:pPr lvl="1"/>
+            <a:r>
+              <a:rPr lang="en-US" sz="3000" dirty="0">
+                <a:hlinkClick r:id="rId3"/>
+              </a:rPr>
+              <a:t>https://</a:t>
+            </a:r>
             <a:r>
               <a:rPr lang="en-US" sz="3000" dirty="0" smtClean="0">
                 <a:hlinkClick r:id="rId3"/>
               </a:rPr>
-              <a:t>http</a:t>
-            </a:r>
-            <a:r>
-              <a:rPr lang="en-US" sz="3000" dirty="0">
-                <a:hlinkClick r:id="rId3"/>
-              </a:rPr>
-              <a:t>://htmlsandbox.com</a:t>
-            </a:r>
-            <a:r>
-              <a:rPr lang="en-US" sz="3000" dirty="0" smtClean="0">
-                <a:hlinkClick r:id="rId3"/>
-              </a:rPr>
-              <a:t>/</a:t>
+              <a:t>thimble.webmaker.org/en-US/projects/zoo</a:t>
             </a:r>
             <a:endParaRPr lang="ru-RU" sz="3000" dirty="0" smtClean="0"/>
           </a:p>
@@ -34057,27 +33544,11 @@
               <a:rPr lang="en-US" sz="3000" dirty="0">
                 <a:hlinkClick r:id="rId4"/>
               </a:rPr>
-              <a:t>https://</a:t>
+              <a:t>http://</a:t>
             </a:r>
             <a:r>
               <a:rPr lang="en-US" sz="3000" dirty="0" smtClean="0">
                 <a:hlinkClick r:id="rId4"/>
-              </a:rPr>
-              <a:t>thimble.webmaker.org/en-US/projects/zoo</a:t>
-            </a:r>
-            <a:endParaRPr lang="ru-RU" sz="3000" dirty="0" smtClean="0"/>
-          </a:p>
-          <a:p>
-            <a:pPr lvl="1"/>
-            <a:r>
-              <a:rPr lang="en-US" sz="3000" dirty="0">
-                <a:hlinkClick r:id="rId5"/>
-              </a:rPr>
-              <a:t>http://</a:t>
-            </a:r>
-            <a:r>
-              <a:rPr lang="en-US" sz="3000" dirty="0" smtClean="0">
-                <a:hlinkClick r:id="rId5"/>
               </a:rPr>
               <a:t>jsbin.com/</a:t>
             </a:r>
@@ -34109,11 +33580,6 @@
         </p:txBody>
       </p:sp>
     </p:spTree>
-    <p:extLst>
-      <p:ext uri="{BB962C8B-B14F-4D97-AF65-F5344CB8AC3E}">
-        <p14:creationId xmlns:p14="http://schemas.microsoft.com/office/powerpoint/2010/main" val="1321180341"/>
-      </p:ext>
-    </p:extLst>
   </p:cSld>
   <p:clrMapOvr>
     <a:masterClrMapping/>
@@ -34280,6 +33746,7 @@
               <a:rPr lang="ru-RU" sz="3200" dirty="0" smtClean="0"/>
               <a:t> произвольно, но имеются стандартные соглашения. Приведём некоторые:</a:t>
             </a:r>
+            <a:endParaRPr lang="ru-RU" sz="3200" dirty="0" smtClean="0"/>
           </a:p>
           <a:p>
             <a:pPr>
@@ -34365,6 +33832,7 @@
               <a:rPr lang="ru-RU" sz="3200" dirty="0" smtClean="0"/>
               <a:t> – описание страницы</a:t>
             </a:r>
+            <a:endParaRPr lang="ru-RU" sz="3200" dirty="0" smtClean="0"/>
           </a:p>
           <a:p>
             <a:pPr>
@@ -34409,30 +33877,13 @@
             </a:r>
             <a:r>
               <a:rPr lang="ru-RU" sz="3200" dirty="0" smtClean="0"/>
-              <a:t>– ключевые слова </a:t>
-            </a:r>
-            <a:r>
-              <a:rPr lang="ru-RU" sz="3200" dirty="0" smtClean="0"/>
-              <a:t>(</a:t>
-            </a:r>
-            <a:r>
-              <a:rPr lang="ru-RU" sz="3200" dirty="0" smtClean="0"/>
-              <a:t>не используются</a:t>
-            </a:r>
-            <a:r>
-              <a:rPr lang="ru-RU" sz="3200" dirty="0" smtClean="0"/>
-              <a:t>)</a:t>
+              <a:t>– ключевые слова (не используются)</a:t>
             </a:r>
             <a:endParaRPr lang="ru-RU" sz="3200" dirty="0" smtClean="0"/>
           </a:p>
         </p:txBody>
       </p:sp>
     </p:spTree>
-    <p:extLst>
-      <p:ext uri="{BB962C8B-B14F-4D97-AF65-F5344CB8AC3E}">
-        <p14:creationId xmlns:p14="http://schemas.microsoft.com/office/powerpoint/2010/main" val="3076607919"/>
-      </p:ext>
-    </p:extLst>
   </p:cSld>
   <p:clrMapOvr>
     <a:masterClrMapping/>
@@ -34638,84 +34089,6 @@
               </a:rPr>
               <a:t>/&gt;</a:t>
             </a:r>
-          </a:p>
-          <a:p>
-            <a:pPr fontAlgn="ctr"/>
-            <a:endParaRPr lang="ru-RU" sz="2400" dirty="0" smtClean="0">
-              <a:latin typeface="Arial" panose="020B0604020202020204" pitchFamily="34" charset="0"/>
-            </a:endParaRPr>
-          </a:p>
-          <a:p>
-            <a:pPr fontAlgn="ctr"/>
-            <a:endParaRPr lang="ru-RU" sz="2400" dirty="0">
-              <a:latin typeface="Arial" panose="020B0604020202020204" pitchFamily="34" charset="0"/>
-            </a:endParaRPr>
-          </a:p>
-          <a:p>
-            <a:pPr fontAlgn="ctr"/>
-            <a:r>
-              <a:rPr lang="ru-RU" sz="2400" dirty="0">
-                <a:solidFill>
-                  <a:srgbClr val="000000"/>
-                </a:solidFill>
-                <a:latin typeface="Calibri" panose="020F0502020204030204" pitchFamily="34" charset="0"/>
-              </a:rPr>
-              <a:t>&lt;</a:t>
-            </a:r>
-            <a:r>
-              <a:rPr lang="ru-RU" sz="2400" dirty="0" err="1">
-                <a:solidFill>
-                  <a:srgbClr val="000000"/>
-                </a:solidFill>
-                <a:latin typeface="Calibri" panose="020F0502020204030204" pitchFamily="34" charset="0"/>
-              </a:rPr>
-              <a:t>meta</a:t>
-            </a:r>
-            <a:r>
-              <a:rPr lang="ru-RU" sz="2400" dirty="0">
-                <a:solidFill>
-                  <a:srgbClr val="000000"/>
-                </a:solidFill>
-                <a:latin typeface="Calibri" panose="020F0502020204030204" pitchFamily="34" charset="0"/>
-              </a:rPr>
-              <a:t> </a:t>
-            </a:r>
-            <a:r>
-              <a:rPr lang="ru-RU" sz="2400" dirty="0" err="1">
-                <a:solidFill>
-                  <a:srgbClr val="000000"/>
-                </a:solidFill>
-                <a:latin typeface="Calibri" panose="020F0502020204030204" pitchFamily="34" charset="0"/>
-              </a:rPr>
-              <a:t>name</a:t>
-            </a:r>
-            <a:r>
-              <a:rPr lang="ru-RU" sz="2400" dirty="0">
-                <a:solidFill>
-                  <a:srgbClr val="000000"/>
-                </a:solidFill>
-                <a:latin typeface="Calibri" panose="020F0502020204030204" pitchFamily="34" charset="0"/>
-              </a:rPr>
-              <a:t>="</a:t>
-            </a:r>
-            <a:r>
-              <a:rPr lang="ru-RU" sz="2400" dirty="0" err="1">
-                <a:solidFill>
-                  <a:srgbClr val="000000"/>
-                </a:solidFill>
-                <a:latin typeface="Calibri" panose="020F0502020204030204" pitchFamily="34" charset="0"/>
-              </a:rPr>
-              <a:t>description</a:t>
-            </a:r>
-            <a:r>
-              <a:rPr lang="ru-RU" sz="2400" dirty="0">
-                <a:solidFill>
-                  <a:srgbClr val="000000"/>
-                </a:solidFill>
-                <a:latin typeface="Calibri" panose="020F0502020204030204" pitchFamily="34" charset="0"/>
-              </a:rPr>
-              <a:t>" </a:t>
-            </a:r>
             <a:endParaRPr lang="ru-RU" sz="2400" dirty="0" smtClean="0">
               <a:solidFill>
                 <a:srgbClr val="000000"/>
@@ -34725,48 +34098,127 @@
           </a:p>
           <a:p>
             <a:pPr fontAlgn="ctr"/>
-            <a:r>
-              <a:rPr lang="ru-RU" sz="2400" dirty="0" smtClean="0">
-                <a:solidFill>
-                  <a:srgbClr val="000000"/>
-                </a:solidFill>
-                <a:latin typeface="Calibri" panose="020F0502020204030204" pitchFamily="34" charset="0"/>
-              </a:rPr>
-              <a:t>             </a:t>
-            </a:r>
-            <a:r>
-              <a:rPr lang="ru-RU" sz="2400" dirty="0" err="1" smtClean="0">
-                <a:solidFill>
-                  <a:srgbClr val="000000"/>
-                </a:solidFill>
-                <a:latin typeface="Calibri" panose="020F0502020204030204" pitchFamily="34" charset="0"/>
-              </a:rPr>
-              <a:t>content</a:t>
-            </a:r>
-            <a:r>
-              <a:rPr lang="ru-RU" sz="2400" dirty="0">
-                <a:solidFill>
-                  <a:srgbClr val="000000"/>
-                </a:solidFill>
-                <a:latin typeface="Calibri" panose="020F0502020204030204" pitchFamily="34" charset="0"/>
-              </a:rPr>
-              <a:t>="поисковая оптимизация сайтов в Москве: Почему важны метаданные?" /&gt;</a:t>
-            </a:r>
+            <a:endParaRPr lang="ru-RU" sz="2400" dirty="0" smtClean="0">
+              <a:latin typeface="Arial" panose="020B0604020202020204" pitchFamily="34" charset="0"/>
+            </a:endParaRPr>
+          </a:p>
+          <a:p>
+            <a:pPr fontAlgn="ctr"/>
             <a:endParaRPr lang="ru-RU" sz="2400" dirty="0">
               <a:latin typeface="Arial" panose="020B0604020202020204" pitchFamily="34" charset="0"/>
             </a:endParaRPr>
           </a:p>
           <a:p>
+            <a:pPr fontAlgn="ctr"/>
+            <a:r>
+              <a:rPr lang="ru-RU" sz="2400" dirty="0">
+                <a:solidFill>
+                  <a:srgbClr val="000000"/>
+                </a:solidFill>
+                <a:latin typeface="Calibri" panose="020F0502020204030204" pitchFamily="34" charset="0"/>
+              </a:rPr>
+              <a:t>&lt;</a:t>
+            </a:r>
+            <a:r>
+              <a:rPr lang="ru-RU" sz="2400" dirty="0" err="1">
+                <a:solidFill>
+                  <a:srgbClr val="000000"/>
+                </a:solidFill>
+                <a:latin typeface="Calibri" panose="020F0502020204030204" pitchFamily="34" charset="0"/>
+              </a:rPr>
+              <a:t>meta</a:t>
+            </a:r>
+            <a:r>
+              <a:rPr lang="ru-RU" sz="2400" dirty="0">
+                <a:solidFill>
+                  <a:srgbClr val="000000"/>
+                </a:solidFill>
+                <a:latin typeface="Calibri" panose="020F0502020204030204" pitchFamily="34" charset="0"/>
+              </a:rPr>
+              <a:t> </a:t>
+            </a:r>
+            <a:r>
+              <a:rPr lang="ru-RU" sz="2400" dirty="0" err="1">
+                <a:solidFill>
+                  <a:srgbClr val="000000"/>
+                </a:solidFill>
+                <a:latin typeface="Calibri" panose="020F0502020204030204" pitchFamily="34" charset="0"/>
+              </a:rPr>
+              <a:t>name</a:t>
+            </a:r>
+            <a:r>
+              <a:rPr lang="ru-RU" sz="2400" dirty="0">
+                <a:solidFill>
+                  <a:srgbClr val="000000"/>
+                </a:solidFill>
+                <a:latin typeface="Calibri" panose="020F0502020204030204" pitchFamily="34" charset="0"/>
+              </a:rPr>
+              <a:t>="</a:t>
+            </a:r>
+            <a:r>
+              <a:rPr lang="ru-RU" sz="2400" dirty="0" err="1">
+                <a:solidFill>
+                  <a:srgbClr val="000000"/>
+                </a:solidFill>
+                <a:latin typeface="Calibri" panose="020F0502020204030204" pitchFamily="34" charset="0"/>
+              </a:rPr>
+              <a:t>description</a:t>
+            </a:r>
+            <a:r>
+              <a:rPr lang="ru-RU" sz="2400" dirty="0">
+                <a:solidFill>
+                  <a:srgbClr val="000000"/>
+                </a:solidFill>
+                <a:latin typeface="Calibri" panose="020F0502020204030204" pitchFamily="34" charset="0"/>
+              </a:rPr>
+              <a:t>" </a:t>
+            </a:r>
+            <a:endParaRPr lang="ru-RU" sz="2400" dirty="0" smtClean="0">
+              <a:solidFill>
+                <a:srgbClr val="000000"/>
+              </a:solidFill>
+              <a:latin typeface="Calibri" panose="020F0502020204030204" pitchFamily="34" charset="0"/>
+            </a:endParaRPr>
+          </a:p>
+          <a:p>
+            <a:pPr fontAlgn="ctr"/>
+            <a:r>
+              <a:rPr lang="ru-RU" sz="2400" dirty="0" smtClean="0">
+                <a:solidFill>
+                  <a:srgbClr val="000000"/>
+                </a:solidFill>
+                <a:latin typeface="Calibri" panose="020F0502020204030204" pitchFamily="34" charset="0"/>
+              </a:rPr>
+              <a:t>             </a:t>
+            </a:r>
+            <a:r>
+              <a:rPr lang="ru-RU" sz="2400" dirty="0" err="1" smtClean="0">
+                <a:solidFill>
+                  <a:srgbClr val="000000"/>
+                </a:solidFill>
+                <a:latin typeface="Calibri" panose="020F0502020204030204" pitchFamily="34" charset="0"/>
+              </a:rPr>
+              <a:t>content</a:t>
+            </a:r>
+            <a:r>
+              <a:rPr lang="ru-RU" sz="2400" dirty="0">
+                <a:solidFill>
+                  <a:srgbClr val="000000"/>
+                </a:solidFill>
+                <a:latin typeface="Calibri" panose="020F0502020204030204" pitchFamily="34" charset="0"/>
+              </a:rPr>
+              <a:t>="поисковая оптимизация сайтов в Москве: Почему важны метаданные?" /&gt;</a:t>
+            </a:r>
+            <a:endParaRPr lang="ru-RU" sz="2400" dirty="0">
+              <a:latin typeface="Arial" panose="020B0604020202020204" pitchFamily="34" charset="0"/>
+            </a:endParaRPr>
+          </a:p>
+          <a:p>
             <a:endParaRPr lang="ru-RU" sz="2400" dirty="0"/>
           </a:p>
         </p:txBody>
       </p:sp>
     </p:spTree>
-    <p:extLst>
-      <p:ext uri="{BB962C8B-B14F-4D97-AF65-F5344CB8AC3E}">
-        <p14:creationId xmlns:p14="http://schemas.microsoft.com/office/powerpoint/2010/main" val="4260034492"/>
-      </p:ext>
-    </p:extLst>
   </p:cSld>
   <p:clrMapOvr>
     <a:masterClrMapping/>
@@ -34946,6 +34398,7 @@
               <a:rPr lang="ru-RU" sz="2800" dirty="0" smtClean="0"/>
               <a:t>ресурсу</a:t>
             </a:r>
+            <a:endParaRPr lang="ru-RU" sz="2800" dirty="0" smtClean="0"/>
           </a:p>
           <a:p>
             <a:pPr>
@@ -35230,15 +34683,11 @@
               <a:rPr lang="ru-RU" sz="2800" dirty="0" smtClean="0"/>
               <a:t>MIME-тип подключаемого файла</a:t>
             </a:r>
+            <a:endParaRPr lang="ru-RU" sz="2800" dirty="0" smtClean="0"/>
           </a:p>
         </p:txBody>
       </p:sp>
     </p:spTree>
-    <p:extLst>
-      <p:ext uri="{BB962C8B-B14F-4D97-AF65-F5344CB8AC3E}">
-        <p14:creationId xmlns:p14="http://schemas.microsoft.com/office/powerpoint/2010/main" val="645620101"/>
-      </p:ext>
-    </p:extLst>
   </p:cSld>
   <p:clrMapOvr>
     <a:masterClrMapping/>
@@ -36137,11 +35586,6 @@
         </p:txBody>
       </p:sp>
     </p:spTree>
-    <p:extLst>
-      <p:ext uri="{BB962C8B-B14F-4D97-AF65-F5344CB8AC3E}">
-        <p14:creationId xmlns:p14="http://schemas.microsoft.com/office/powerpoint/2010/main" val="534269802"/>
-      </p:ext>
-    </p:extLst>
   </p:cSld>
   <p:clrMapOvr>
     <a:masterClrMapping/>
@@ -36353,6 +35797,7 @@
               <a:rPr lang="ru-RU" sz="3200" dirty="0" smtClean="0"/>
               <a:t>подключение или внедрение клиентского скрипта;</a:t>
             </a:r>
+            <a:endParaRPr lang="ru-RU" sz="3200" dirty="0" smtClean="0"/>
           </a:p>
           <a:p>
             <a:pPr>
@@ -36424,11 +35869,6 @@
         </p:txBody>
       </p:sp>
     </p:spTree>
-    <p:extLst>
-      <p:ext uri="{BB962C8B-B14F-4D97-AF65-F5344CB8AC3E}">
-        <p14:creationId xmlns:p14="http://schemas.microsoft.com/office/powerpoint/2010/main" val="1822064942"/>
-      </p:ext>
-    </p:extLst>
   </p:cSld>
   <p:clrMapOvr>
     <a:masterClrMapping/>
@@ -36559,6 +35999,7 @@
               <a:rPr lang="ru-RU" sz="3200" b="1" dirty="0" smtClean="0"/>
               <a:t>у этого элемента нет собственных атрибутов (только глобальные).</a:t>
             </a:r>
+            <a:endParaRPr lang="ru-RU" sz="3200" b="1" dirty="0" smtClean="0"/>
           </a:p>
           <a:p>
             <a:pPr>
@@ -36758,11 +36199,6 @@
         </p:txBody>
       </p:sp>
     </p:spTree>
-    <p:extLst>
-      <p:ext uri="{BB962C8B-B14F-4D97-AF65-F5344CB8AC3E}">
-        <p14:creationId xmlns:p14="http://schemas.microsoft.com/office/powerpoint/2010/main" val="1929955851"/>
-      </p:ext>
-    </p:extLst>
   </p:cSld>
   <p:clrMapOvr>
     <a:masterClrMapping/>
@@ -36870,6 +36306,7 @@
               <a:rPr lang="ru-RU" sz="3200" dirty="0" smtClean="0"/>
               <a:t>на соответствие указанному стандарту.</a:t>
             </a:r>
+            <a:endParaRPr lang="ru-RU" sz="3200" dirty="0" smtClean="0"/>
           </a:p>
           <a:p>
             <a:r>
@@ -36884,6 +36321,7 @@
               <a:rPr lang="ru-RU" sz="3200" dirty="0"/>
               <a:t>:</a:t>
             </a:r>
+            <a:endParaRPr lang="ru-RU" sz="3200" dirty="0"/>
           </a:p>
           <a:p>
             <a:pPr marL="514350" indent="-514350">
@@ -36944,11 +36382,6 @@
         </p:txBody>
       </p:sp>
     </p:spTree>
-    <p:extLst>
-      <p:ext uri="{BB962C8B-B14F-4D97-AF65-F5344CB8AC3E}">
-        <p14:creationId xmlns:p14="http://schemas.microsoft.com/office/powerpoint/2010/main" val="1888011346"/>
-      </p:ext>
-    </p:extLst>
   </p:cSld>
   <p:clrMapOvr>
     <a:masterClrMapping/>
@@ -37036,6 +36469,7 @@
               <a:rPr lang="ru-RU" sz="3200" dirty="0" smtClean="0"/>
               <a:t> выполняется при помощи отдельной программы или онлайн-сервиса:</a:t>
             </a:r>
+            <a:endParaRPr lang="ru-RU" sz="3200" dirty="0" smtClean="0"/>
           </a:p>
           <a:p>
             <a:pPr marL="514350" indent="-514350">
@@ -37044,13 +36478,13 @@
             </a:pPr>
             <a:r>
               <a:rPr lang="en-US" sz="3200" dirty="0">
-                <a:hlinkClick r:id="rId2"/>
+                <a:hlinkClick r:id="rId1"/>
               </a:rPr>
               <a:t>http://validator.w3.org</a:t>
             </a:r>
             <a:r>
               <a:rPr lang="en-US" sz="3200" dirty="0" smtClean="0">
-                <a:hlinkClick r:id="rId2"/>
+                <a:hlinkClick r:id="rId1"/>
               </a:rPr>
               <a:t>/</a:t>
             </a:r>
@@ -37063,13 +36497,13 @@
             </a:pPr>
             <a:r>
               <a:rPr lang="en-US" sz="3200" dirty="0">
-                <a:hlinkClick r:id="rId3"/>
+                <a:hlinkClick r:id="rId2"/>
               </a:rPr>
               <a:t>https://html5.validator.nu</a:t>
             </a:r>
             <a:r>
               <a:rPr lang="en-US" sz="3200" dirty="0" smtClean="0">
-                <a:hlinkClick r:id="rId3"/>
+                <a:hlinkClick r:id="rId2"/>
               </a:rPr>
               <a:t>/</a:t>
             </a:r>
@@ -37082,19 +36516,19 @@
             </a:pPr>
             <a:r>
               <a:rPr lang="en-US" sz="3200" dirty="0" smtClean="0">
-                <a:hlinkClick r:id="rId4"/>
+                <a:hlinkClick r:id="rId3"/>
               </a:rPr>
               <a:t>http</a:t>
             </a:r>
             <a:r>
               <a:rPr lang="en-US" sz="3200" dirty="0">
-                <a:hlinkClick r:id="rId4"/>
+                <a:hlinkClick r:id="rId3"/>
               </a:rPr>
               <a:t>://htmlhelp.com/tools/validator</a:t>
             </a:r>
             <a:r>
               <a:rPr lang="en-US" sz="3200" dirty="0" smtClean="0">
-                <a:hlinkClick r:id="rId4"/>
+                <a:hlinkClick r:id="rId3"/>
               </a:rPr>
               <a:t>/</a:t>
             </a:r>
@@ -37106,11 +36540,6 @@
         </p:txBody>
       </p:sp>
     </p:spTree>
-    <p:extLst>
-      <p:ext uri="{BB962C8B-B14F-4D97-AF65-F5344CB8AC3E}">
-        <p14:creationId xmlns:p14="http://schemas.microsoft.com/office/powerpoint/2010/main" val="638503684"/>
-      </p:ext>
-    </p:extLst>
   </p:cSld>
   <p:clrMapOvr>
     <a:masterClrMapping/>
@@ -37168,7 +36597,7 @@
     </a:clrScheme>
     <a:fontScheme name="Retrospect">
       <a:majorFont>
-        <a:latin typeface="Calibri Light" panose="020F0302020204030204"/>
+        <a:latin typeface="Calibri Light"/>
         <a:ea typeface=""/>
         <a:cs typeface=""/>
         <a:font script="Jpan" typeface="ＭＳ Ｐゴシック"/>
@@ -37203,7 +36632,7 @@
         <a:font script="Geor" typeface="Sylfaen"/>
       </a:majorFont>
       <a:minorFont>
-        <a:latin typeface="Calibri" panose="020F0502020204030204"/>
+        <a:latin typeface="Calibri"/>
         <a:ea typeface=""/>
         <a:cs typeface=""/>
         <a:font script="Jpan" typeface="ＭＳ Ｐゴシック"/>
@@ -37398,11 +36827,9 @@
       </a:bgFillStyleLst>
     </a:fmtScheme>
   </a:themeElements>
-  <a:objectDefaults/>
-  <a:extraClrSchemeLst/>
   <a:extLst>
     <a:ext uri="{05A4C25C-085E-4340-85A3-A5531E510DB2}">
-      <thm15:themeFamily xmlns:thm15="http://schemas.microsoft.com/office/thememl/2012/main" name="Retrospect" id="{5F128B03-DCCA-4EEB-AB3B-CF2899314A46}" vid="{9CC26709-368C-4D72-9060-94E5B3FF3CD6}"/>
+      <thm15:themeFamily xmlns:thm15="http://schemas.microsoft.com/office/thememl/2012/main" name="Office Theme" id="{62F939B6-93AF-4DB8-9C6B-D6C7DFDC589F}" vid="{4A3C46E8-61CC-4603-A589-7422A47A8E4A}"/>
     </a:ext>
   </a:extLst>
 </a:theme>
@@ -37451,7 +36878,7 @@
     </a:clrScheme>
     <a:fontScheme name="Office">
       <a:majorFont>
-        <a:latin typeface="Calibri Light" panose="020F0302020204030204"/>
+        <a:latin typeface="Calibri Light"/>
         <a:ea typeface=""/>
         <a:cs typeface=""/>
         <a:font script="Jpan" typeface="ＭＳ Ｐゴシック"/>
@@ -37486,7 +36913,7 @@
         <a:font script="Geor" typeface="Sylfaen"/>
       </a:majorFont>
       <a:minorFont>
-        <a:latin typeface="Calibri" panose="020F0502020204030204"/>
+        <a:latin typeface="Calibri"/>
         <a:ea typeface=""/>
         <a:cs typeface=""/>
         <a:font script="Jpan" typeface="ＭＳ Ｐゴシック"/>
@@ -37659,8 +37086,6 @@
       </a:bgFillStyleLst>
     </a:fmtScheme>
   </a:themeElements>
-  <a:objectDefaults/>
-  <a:extraClrSchemeLst/>
   <a:extLst>
     <a:ext uri="{05A4C25C-085E-4340-85A3-A5531E510DB2}">
       <thm15:themeFamily xmlns:thm15="http://schemas.microsoft.com/office/thememl/2012/main" name="Office Theme" id="{62F939B6-93AF-4DB8-9C6B-D6C7DFDC589F}" vid="{4A3C46E8-61CC-4603-A589-7422A47A8E4A}"/>
@@ -37712,7 +37137,7 @@
     </a:clrScheme>
     <a:fontScheme name="Office">
       <a:majorFont>
-        <a:latin typeface="Calibri Light" panose="020F0302020204030204"/>
+        <a:latin typeface="Calibri Light"/>
         <a:ea typeface=""/>
         <a:cs typeface=""/>
         <a:font script="Jpan" typeface="ＭＳ Ｐゴシック"/>
@@ -37747,7 +37172,7 @@
         <a:font script="Geor" typeface="Sylfaen"/>
       </a:majorFont>
       <a:minorFont>
-        <a:latin typeface="Calibri" panose="020F0502020204030204"/>
+        <a:latin typeface="Calibri"/>
         <a:ea typeface=""/>
         <a:cs typeface=""/>
         <a:font script="Jpan" typeface="ＭＳ Ｐゴシック"/>
@@ -37920,8 +37345,6 @@
       </a:bgFillStyleLst>
     </a:fmtScheme>
   </a:themeElements>
-  <a:objectDefaults/>
-  <a:extraClrSchemeLst/>
   <a:extLst>
     <a:ext uri="{05A4C25C-085E-4340-85A3-A5531E510DB2}">
       <thm15:themeFamily xmlns:thm15="http://schemas.microsoft.com/office/thememl/2012/main" name="Office Theme" id="{62F939B6-93AF-4DB8-9C6B-D6C7DFDC589F}" vid="{4A3C46E8-61CC-4603-A589-7422A47A8E4A}"/>
